--- a/docs/sales-reform-toolkit/meetings/業績報告_40億ブリッジ.pptx
+++ b/docs/sales-reform-toolkit/meetings/業績報告_40億ブリッジ.pptx
@@ -7,6 +7,8 @@
   <p:sldIdLst>
     <p:sldId id="256" r:id="rId7"/>
     <p:sldId id="257" r:id="rId8"/>
+    <p:sldId id="258" r:id="rId9"/>
+    <p:sldId id="259" r:id="rId10"/>
   </p:sldIdLst>
   <p:sldSz cx="12191695" cy="6858000" type="screen4x3"/>
   <p:notesSz cx="6858000" cy="9144000"/>
@@ -3182,7 +3184,7 @@
                 <a:ea typeface="Yu Gothic"/>
                 <a:cs typeface="Yu Gothic"/>
               </a:rPr>
-              <a:t>営業利益40億への道筋 — ベース25億＋アップサイド15億</a:t>
+              <a:t>40億まで、あと20.2億 — 現在地からの道筋</a:t>
             </a:r>
           </a:p>
         </p:txBody>
@@ -3267,7 +3269,7 @@
                 <a:ea typeface="Yu Gothic"/>
                 <a:cs typeface="Yu Gothic"/>
               </a:rPr>
-              <a:t>対外は40億がミニマム。社内はアップサイド＋20億（7・6・7）で運営し、各部の凸凹を吸収します</a:t>
+              <a:t>通期見込19.8億（PLベース・販管費込み・8/13正本）。ここからの積み上げを4つのブロックで管理します</a:t>
             </a:r>
           </a:p>
         </p:txBody>
@@ -3280,8 +3282,8 @@
         </p:nvSpPr>
         <p:spPr>
           <a:xfrm>
-            <a:off x="777240" y="3634739"/>
-            <a:ext cx="1600200" cy="2125980"/>
+            <a:off x="731520" y="3876873"/>
+            <a:ext cx="1481328" cy="1792406"/>
           </a:xfrm>
           <a:prstGeom prst="roundRect">
             <a:avLst>
@@ -3326,8 +3328,8 @@
         </p:nvSpPr>
         <p:spPr>
           <a:xfrm>
-            <a:off x="594359" y="3323844"/>
-            <a:ext cx="1965960" cy="274320"/>
+            <a:off x="502920" y="3575121"/>
+            <a:ext cx="1938528" cy="274320"/>
           </a:xfrm>
           <a:prstGeom prst="rect">
             <a:avLst/>
@@ -3346,7 +3348,7 @@
               </a:spcAft>
             </a:pPr>
             <a:r>
-              <a:rPr sz="1400" b="1" i="0">
+              <a:rPr sz="1300" b="1" i="0">
                 <a:solidFill>
                   <a:srgbClr val="1B1B26"/>
                 </a:solidFill>
@@ -3354,7 +3356,7 @@
                 <a:ea typeface="Yu Gothic"/>
                 <a:cs typeface="Yu Gothic"/>
               </a:rPr>
-              <a:t>25億</a:t>
+              <a:t>19.8億</a:t>
             </a:r>
           </a:p>
         </p:txBody>
@@ -3367,8 +3369,8 @@
         </p:nvSpPr>
         <p:spPr>
           <a:xfrm>
-            <a:off x="777240" y="4560569"/>
-            <a:ext cx="1600200" cy="274320"/>
+            <a:off x="676656" y="4645060"/>
+            <a:ext cx="1591056" cy="274320"/>
           </a:xfrm>
           <a:prstGeom prst="rect">
             <a:avLst/>
@@ -3387,7 +3389,7 @@
               </a:spcAft>
             </a:pPr>
             <a:r>
-              <a:rPr sz="1200" b="1" i="0">
+              <a:rPr sz="1050" b="1" i="0">
                 <a:solidFill>
                   <a:srgbClr val="FFFFFF"/>
                 </a:solidFill>
@@ -3395,7 +3397,7 @@
                 <a:ea typeface="Yu Gothic"/>
                 <a:cs typeface="Yu Gothic"/>
               </a:rPr>
-              <a:t>ベース</a:t>
+              <a:t>現在地</a:t>
             </a:r>
           </a:p>
         </p:txBody>
@@ -3408,8 +3410,136 @@
         </p:nvSpPr>
         <p:spPr>
           <a:xfrm>
-            <a:off x="2926080" y="3209544"/>
-            <a:ext cx="1600200" cy="425196"/>
+            <a:off x="2788920" y="3523823"/>
+            <a:ext cx="1481328" cy="353049"/>
+          </a:xfrm>
+          <a:prstGeom prst="roundRect">
+            <a:avLst>
+              <a:gd name="adj" fmla="val 6000"/>
+            </a:avLst>
+          </a:prstGeom>
+          <a:solidFill>
+            <a:srgbClr val="B43C2E"/>
+          </a:solidFill>
+          <a:ln>
+            <a:noFill/>
+          </a:ln>
+          <a:effectLst/>
+        </p:spPr>
+        <p:style>
+          <a:lnRef idx="1">
+            <a:schemeClr val="accent1"/>
+          </a:lnRef>
+          <a:fillRef idx="3">
+            <a:schemeClr val="accent1"/>
+          </a:fillRef>
+          <a:effectRef idx="2">
+            <a:schemeClr val="accent1"/>
+          </a:effectRef>
+          <a:fontRef idx="minor">
+            <a:schemeClr val="lt1"/>
+          </a:fontRef>
+        </p:style>
+        <p:txBody>
+          <a:bodyPr rtlCol="0" anchor="ctr"/>
+          <a:lstStyle/>
+          <a:p>
+            <a:pPr algn="ctr"/>
+          </a:p>
+        </p:txBody>
+      </p:sp>
+      <p:sp>
+        <p:nvSpPr>
+          <p:cNvPr id="10" name="TextBox 9"/>
+          <p:cNvSpPr txBox="1"/>
+          <p:nvPr/>
+        </p:nvSpPr>
+        <p:spPr>
+          <a:xfrm>
+            <a:off x="2560320" y="3222071"/>
+            <a:ext cx="1938528" cy="274320"/>
+          </a:xfrm>
+          <a:prstGeom prst="rect">
+            <a:avLst/>
+          </a:prstGeom>
+          <a:noFill/>
+        </p:spPr>
+        <p:txBody>
+          <a:bodyPr wrap="square" lIns="0" rIns="0" tIns="0" bIns="0">
+            <a:spAutoFit/>
+          </a:bodyPr>
+          <a:lstStyle/>
+          <a:p>
+            <a:pPr algn="ctr">
+              <a:spcAft>
+                <a:spcPts val="400"/>
+              </a:spcAft>
+            </a:pPr>
+            <a:r>
+              <a:rPr sz="1300" b="1" i="0">
+                <a:solidFill>
+                  <a:srgbClr val="1B1B26"/>
+                </a:solidFill>
+                <a:latin typeface="Yu Gothic"/>
+                <a:ea typeface="Yu Gothic"/>
+                <a:cs typeface="Yu Gothic"/>
+              </a:rPr>
+              <a:t>＋3.9億</a:t>
+            </a:r>
+          </a:p>
+        </p:txBody>
+      </p:sp>
+      <p:sp>
+        <p:nvSpPr>
+          <p:cNvPr id="11" name="TextBox 10"/>
+          <p:cNvSpPr txBox="1"/>
+          <p:nvPr/>
+        </p:nvSpPr>
+        <p:spPr>
+          <a:xfrm>
+            <a:off x="2734056" y="3572332"/>
+            <a:ext cx="1591056" cy="274320"/>
+          </a:xfrm>
+          <a:prstGeom prst="rect">
+            <a:avLst/>
+          </a:prstGeom>
+          <a:noFill/>
+        </p:spPr>
+        <p:txBody>
+          <a:bodyPr wrap="square" lIns="0" rIns="0" tIns="0" bIns="0">
+            <a:spAutoFit/>
+          </a:bodyPr>
+          <a:lstStyle/>
+          <a:p>
+            <a:pPr algn="ctr">
+              <a:spcAft>
+                <a:spcPts val="400"/>
+              </a:spcAft>
+            </a:pPr>
+            <a:r>
+              <a:rPr sz="1050" b="1" i="0">
+                <a:solidFill>
+                  <a:srgbClr val="FFFFFF"/>
+                </a:solidFill>
+                <a:latin typeface="Yu Gothic"/>
+                <a:ea typeface="Yu Gothic"/>
+                <a:cs typeface="Yu Gothic"/>
+              </a:rPr>
+              <a:t>ベース挽回</a:t>
+            </a:r>
+          </a:p>
+        </p:txBody>
+      </p:sp>
+      <p:sp>
+        <p:nvSpPr>
+          <p:cNvPr id="12" name="Rounded Rectangle 11"/>
+          <p:cNvSpPr/>
+          <p:nvPr/>
+        </p:nvSpPr>
+        <p:spPr>
+          <a:xfrm>
+            <a:off x="4846320" y="2165939"/>
+            <a:ext cx="1481328" cy="1357884"/>
           </a:xfrm>
           <a:prstGeom prst="roundRect">
             <a:avLst>
@@ -3448,14 +3578,14 @@
       </p:sp>
       <p:sp>
         <p:nvSpPr>
-          <p:cNvPr id="10" name="TextBox 9"/>
+          <p:cNvPr id="13" name="TextBox 12"/>
           <p:cNvSpPr txBox="1"/>
           <p:nvPr/>
         </p:nvSpPr>
         <p:spPr>
           <a:xfrm>
-            <a:off x="2743200" y="2898648"/>
-            <a:ext cx="1965960" cy="274320"/>
+            <a:off x="4617720" y="1864187"/>
+            <a:ext cx="1938528" cy="274320"/>
           </a:xfrm>
           <a:prstGeom prst="rect">
             <a:avLst/>
@@ -3474,7 +3604,7 @@
               </a:spcAft>
             </a:pPr>
             <a:r>
-              <a:rPr sz="1400" b="1" i="0">
+              <a:rPr sz="1300" b="1" i="0">
                 <a:solidFill>
                   <a:srgbClr val="1B1B26"/>
                 </a:solidFill>
@@ -3482,21 +3612,21 @@
                 <a:ea typeface="Yu Gothic"/>
                 <a:cs typeface="Yu Gothic"/>
               </a:rPr>
-              <a:t>＋5億</a:t>
-            </a:r>
-          </a:p>
-        </p:txBody>
-      </p:sp>
-      <p:sp>
-        <p:nvSpPr>
-          <p:cNvPr id="11" name="TextBox 10"/>
+              <a:t>＋15億</a:t>
+            </a:r>
+          </a:p>
+        </p:txBody>
+      </p:sp>
+      <p:sp>
+        <p:nvSpPr>
+          <p:cNvPr id="14" name="TextBox 13"/>
           <p:cNvSpPr txBox="1"/>
           <p:nvPr/>
         </p:nvSpPr>
         <p:spPr>
           <a:xfrm>
-            <a:off x="2926080" y="3284982"/>
-            <a:ext cx="1600200" cy="274320"/>
+            <a:off x="4791456" y="2716865"/>
+            <a:ext cx="1591056" cy="274320"/>
           </a:xfrm>
           <a:prstGeom prst="rect">
             <a:avLst/>
@@ -3515,7 +3645,7 @@
               </a:spcAft>
             </a:pPr>
             <a:r>
-              <a:rPr sz="1200" b="1" i="0">
+              <a:rPr sz="1050" b="1" i="0">
                 <a:solidFill>
                   <a:srgbClr val="FFFFFF"/>
                 </a:solidFill>
@@ -3523,21 +3653,236 @@
                 <a:ea typeface="Yu Gothic"/>
                 <a:cs typeface="Yu Gothic"/>
               </a:rPr>
-              <a:t>ライセンス</a:t>
-            </a:r>
-          </a:p>
-        </p:txBody>
-      </p:sp>
-      <p:sp>
-        <p:nvSpPr>
-          <p:cNvPr id="12" name="Rectangle 11"/>
+              <a:t>アップサイド</a:t>
+            </a:r>
+          </a:p>
+        </p:txBody>
+      </p:sp>
+      <p:sp>
+        <p:nvSpPr>
+          <p:cNvPr id="15" name="Rounded Rectangle 14"/>
           <p:cNvSpPr/>
           <p:nvPr/>
         </p:nvSpPr>
         <p:spPr>
           <a:xfrm>
-            <a:off x="2926080" y="3634739"/>
-            <a:ext cx="9144" cy="6350"/>
+            <a:off x="6903720" y="2048256"/>
+            <a:ext cx="1481328" cy="117683"/>
+          </a:xfrm>
+          <a:prstGeom prst="roundRect">
+            <a:avLst>
+              <a:gd name="adj" fmla="val 6000"/>
+            </a:avLst>
+          </a:prstGeom>
+          <a:solidFill>
+            <a:srgbClr val="4F7DEE"/>
+          </a:solidFill>
+          <a:ln>
+            <a:noFill/>
+          </a:ln>
+          <a:effectLst/>
+        </p:spPr>
+        <p:style>
+          <a:lnRef idx="1">
+            <a:schemeClr val="accent1"/>
+          </a:lnRef>
+          <a:fillRef idx="3">
+            <a:schemeClr val="accent1"/>
+          </a:fillRef>
+          <a:effectRef idx="2">
+            <a:schemeClr val="accent1"/>
+          </a:effectRef>
+          <a:fontRef idx="minor">
+            <a:schemeClr val="lt1"/>
+          </a:fontRef>
+        </p:style>
+        <p:txBody>
+          <a:bodyPr rtlCol="0" anchor="ctr"/>
+          <a:lstStyle/>
+          <a:p>
+            <a:pPr algn="ctr"/>
+          </a:p>
+        </p:txBody>
+      </p:sp>
+      <p:sp>
+        <p:nvSpPr>
+          <p:cNvPr id="16" name="TextBox 15"/>
+          <p:cNvSpPr txBox="1"/>
+          <p:nvPr/>
+        </p:nvSpPr>
+        <p:spPr>
+          <a:xfrm>
+            <a:off x="6675120" y="1746504"/>
+            <a:ext cx="1938528" cy="274320"/>
+          </a:xfrm>
+          <a:prstGeom prst="rect">
+            <a:avLst/>
+          </a:prstGeom>
+          <a:noFill/>
+        </p:spPr>
+        <p:txBody>
+          <a:bodyPr wrap="square" lIns="0" rIns="0" tIns="0" bIns="0">
+            <a:spAutoFit/>
+          </a:bodyPr>
+          <a:lstStyle/>
+          <a:p>
+            <a:pPr algn="ctr">
+              <a:spcAft>
+                <a:spcPts val="400"/>
+              </a:spcAft>
+            </a:pPr>
+            <a:r>
+              <a:rPr sz="1300" b="1" i="0">
+                <a:solidFill>
+                  <a:srgbClr val="1B1B26"/>
+                </a:solidFill>
+                <a:latin typeface="Yu Gothic"/>
+                <a:ea typeface="Yu Gothic"/>
+                <a:cs typeface="Yu Gothic"/>
+              </a:rPr>
+              <a:t>＋1.3億</a:t>
+            </a:r>
+          </a:p>
+        </p:txBody>
+      </p:sp>
+      <p:sp>
+        <p:nvSpPr>
+          <p:cNvPr id="17" name="Rounded Rectangle 16"/>
+          <p:cNvSpPr/>
+          <p:nvPr/>
+        </p:nvSpPr>
+        <p:spPr>
+          <a:xfrm>
+            <a:off x="8961120" y="2048256"/>
+            <a:ext cx="1481328" cy="3621024"/>
+          </a:xfrm>
+          <a:prstGeom prst="roundRect">
+            <a:avLst>
+              <a:gd name="adj" fmla="val 6000"/>
+            </a:avLst>
+          </a:prstGeom>
+          <a:solidFill>
+            <a:srgbClr val="1E40AF"/>
+          </a:solidFill>
+          <a:ln>
+            <a:noFill/>
+          </a:ln>
+          <a:effectLst/>
+        </p:spPr>
+        <p:style>
+          <a:lnRef idx="1">
+            <a:schemeClr val="accent1"/>
+          </a:lnRef>
+          <a:fillRef idx="3">
+            <a:schemeClr val="accent1"/>
+          </a:fillRef>
+          <a:effectRef idx="2">
+            <a:schemeClr val="accent1"/>
+          </a:effectRef>
+          <a:fontRef idx="minor">
+            <a:schemeClr val="lt1"/>
+          </a:fontRef>
+        </p:style>
+        <p:txBody>
+          <a:bodyPr rtlCol="0" anchor="ctr"/>
+          <a:lstStyle/>
+          <a:p>
+            <a:pPr algn="ctr"/>
+          </a:p>
+        </p:txBody>
+      </p:sp>
+      <p:sp>
+        <p:nvSpPr>
+          <p:cNvPr id="18" name="TextBox 17"/>
+          <p:cNvSpPr txBox="1"/>
+          <p:nvPr/>
+        </p:nvSpPr>
+        <p:spPr>
+          <a:xfrm>
+            <a:off x="8732520" y="1746504"/>
+            <a:ext cx="1938528" cy="274320"/>
+          </a:xfrm>
+          <a:prstGeom prst="rect">
+            <a:avLst/>
+          </a:prstGeom>
+          <a:noFill/>
+        </p:spPr>
+        <p:txBody>
+          <a:bodyPr wrap="square" lIns="0" rIns="0" tIns="0" bIns="0">
+            <a:spAutoFit/>
+          </a:bodyPr>
+          <a:lstStyle/>
+          <a:p>
+            <a:pPr algn="ctr">
+              <a:spcAft>
+                <a:spcPts val="400"/>
+              </a:spcAft>
+            </a:pPr>
+            <a:r>
+              <a:rPr sz="1300" b="1" i="0">
+                <a:solidFill>
+                  <a:srgbClr val="1B1B26"/>
+                </a:solidFill>
+                <a:latin typeface="Yu Gothic"/>
+                <a:ea typeface="Yu Gothic"/>
+                <a:cs typeface="Yu Gothic"/>
+              </a:rPr>
+              <a:t>40億</a:t>
+            </a:r>
+          </a:p>
+        </p:txBody>
+      </p:sp>
+      <p:sp>
+        <p:nvSpPr>
+          <p:cNvPr id="19" name="TextBox 18"/>
+          <p:cNvSpPr txBox="1"/>
+          <p:nvPr/>
+        </p:nvSpPr>
+        <p:spPr>
+          <a:xfrm>
+            <a:off x="8906256" y="3730752"/>
+            <a:ext cx="1591056" cy="274320"/>
+          </a:xfrm>
+          <a:prstGeom prst="rect">
+            <a:avLst/>
+          </a:prstGeom>
+          <a:noFill/>
+        </p:spPr>
+        <p:txBody>
+          <a:bodyPr wrap="square" lIns="0" rIns="0" tIns="0" bIns="0">
+            <a:spAutoFit/>
+          </a:bodyPr>
+          <a:lstStyle/>
+          <a:p>
+            <a:pPr algn="ctr">
+              <a:spcAft>
+                <a:spcPts val="400"/>
+              </a:spcAft>
+            </a:pPr>
+            <a:r>
+              <a:rPr sz="1050" b="1" i="0">
+                <a:solidFill>
+                  <a:srgbClr val="FFFFFF"/>
+                </a:solidFill>
+                <a:latin typeface="Yu Gothic"/>
+                <a:ea typeface="Yu Gothic"/>
+                <a:cs typeface="Yu Gothic"/>
+              </a:rPr>
+              <a:t>今期目標</a:t>
+            </a:r>
+          </a:p>
+        </p:txBody>
+      </p:sp>
+      <p:sp>
+        <p:nvSpPr>
+          <p:cNvPr id="20" name="Rectangle 19"/>
+          <p:cNvSpPr/>
+          <p:nvPr/>
+        </p:nvSpPr>
+        <p:spPr>
+          <a:xfrm>
+            <a:off x="2212848" y="3876873"/>
+            <a:ext cx="576071" cy="13970"/>
           </a:xfrm>
           <a:prstGeom prst="rect">
             <a:avLst/>
@@ -3574,142 +3919,14 @@
       </p:sp>
       <p:sp>
         <p:nvSpPr>
-          <p:cNvPr id="13" name="Rounded Rectangle 12"/>
+          <p:cNvPr id="21" name="Rectangle 20"/>
           <p:cNvSpPr/>
           <p:nvPr/>
         </p:nvSpPr>
         <p:spPr>
           <a:xfrm>
-            <a:off x="5074920" y="2784348"/>
-            <a:ext cx="1600200" cy="425196"/>
-          </a:xfrm>
-          <a:prstGeom prst="roundRect">
-            <a:avLst>
-              <a:gd name="adj" fmla="val 6000"/>
-            </a:avLst>
-          </a:prstGeom>
-          <a:solidFill>
-            <a:srgbClr val="2563EB"/>
-          </a:solidFill>
-          <a:ln>
-            <a:noFill/>
-          </a:ln>
-          <a:effectLst/>
-        </p:spPr>
-        <p:style>
-          <a:lnRef idx="1">
-            <a:schemeClr val="accent1"/>
-          </a:lnRef>
-          <a:fillRef idx="3">
-            <a:schemeClr val="accent1"/>
-          </a:fillRef>
-          <a:effectRef idx="2">
-            <a:schemeClr val="accent1"/>
-          </a:effectRef>
-          <a:fontRef idx="minor">
-            <a:schemeClr val="lt1"/>
-          </a:fontRef>
-        </p:style>
-        <p:txBody>
-          <a:bodyPr rtlCol="0" anchor="ctr"/>
-          <a:lstStyle/>
-          <a:p>
-            <a:pPr algn="ctr"/>
-          </a:p>
-        </p:txBody>
-      </p:sp>
-      <p:sp>
-        <p:nvSpPr>
-          <p:cNvPr id="14" name="TextBox 13"/>
-          <p:cNvSpPr txBox="1"/>
-          <p:nvPr/>
-        </p:nvSpPr>
-        <p:spPr>
-          <a:xfrm>
-            <a:off x="4892040" y="2473452"/>
-            <a:ext cx="1965960" cy="274320"/>
-          </a:xfrm>
-          <a:prstGeom prst="rect">
-            <a:avLst/>
-          </a:prstGeom>
-          <a:noFill/>
-        </p:spPr>
-        <p:txBody>
-          <a:bodyPr wrap="square" lIns="0" rIns="0" tIns="0" bIns="0">
-            <a:spAutoFit/>
-          </a:bodyPr>
-          <a:lstStyle/>
-          <a:p>
-            <a:pPr algn="ctr">
-              <a:spcAft>
-                <a:spcPts val="400"/>
-              </a:spcAft>
-            </a:pPr>
-            <a:r>
-              <a:rPr sz="1400" b="1" i="0">
-                <a:solidFill>
-                  <a:srgbClr val="1B1B26"/>
-                </a:solidFill>
-                <a:latin typeface="Yu Gothic"/>
-                <a:ea typeface="Yu Gothic"/>
-                <a:cs typeface="Yu Gothic"/>
-              </a:rPr>
-              <a:t>＋5億</a:t>
-            </a:r>
-          </a:p>
-        </p:txBody>
-      </p:sp>
-      <p:sp>
-        <p:nvSpPr>
-          <p:cNvPr id="15" name="TextBox 14"/>
-          <p:cNvSpPr txBox="1"/>
-          <p:nvPr/>
-        </p:nvSpPr>
-        <p:spPr>
-          <a:xfrm>
-            <a:off x="5074920" y="2859786"/>
-            <a:ext cx="1600200" cy="274320"/>
-          </a:xfrm>
-          <a:prstGeom prst="rect">
-            <a:avLst/>
-          </a:prstGeom>
-          <a:noFill/>
-        </p:spPr>
-        <p:txBody>
-          <a:bodyPr wrap="square" lIns="0" rIns="0" tIns="0" bIns="0">
-            <a:spAutoFit/>
-          </a:bodyPr>
-          <a:lstStyle/>
-          <a:p>
-            <a:pPr algn="ctr">
-              <a:spcAft>
-                <a:spcPts val="400"/>
-              </a:spcAft>
-            </a:pPr>
-            <a:r>
-              <a:rPr sz="1200" b="1" i="0">
-                <a:solidFill>
-                  <a:srgbClr val="FFFFFF"/>
-                </a:solidFill>
-                <a:latin typeface="Yu Gothic"/>
-                <a:ea typeface="Yu Gothic"/>
-                <a:cs typeface="Yu Gothic"/>
-              </a:rPr>
-              <a:t>商品</a:t>
-            </a:r>
-          </a:p>
-        </p:txBody>
-      </p:sp>
-      <p:sp>
-        <p:nvSpPr>
-          <p:cNvPr id="16" name="Rectangle 15"/>
-          <p:cNvSpPr/>
-          <p:nvPr/>
-        </p:nvSpPr>
-        <p:spPr>
-          <a:xfrm>
-            <a:off x="5074920" y="3209544"/>
-            <a:ext cx="9144" cy="6350"/>
+            <a:off x="4270248" y="3523823"/>
+            <a:ext cx="576071" cy="13970"/>
           </a:xfrm>
           <a:prstGeom prst="rect">
             <a:avLst/>
@@ -3746,142 +3963,14 @@
       </p:sp>
       <p:sp>
         <p:nvSpPr>
-          <p:cNvPr id="17" name="Rounded Rectangle 16"/>
+          <p:cNvPr id="22" name="Rectangle 21"/>
           <p:cNvSpPr/>
           <p:nvPr/>
         </p:nvSpPr>
         <p:spPr>
           <a:xfrm>
-            <a:off x="7223760" y="2359152"/>
-            <a:ext cx="1600200" cy="425196"/>
-          </a:xfrm>
-          <a:prstGeom prst="roundRect">
-            <a:avLst>
-              <a:gd name="adj" fmla="val 6000"/>
-            </a:avLst>
-          </a:prstGeom>
-          <a:solidFill>
-            <a:srgbClr val="2563EB"/>
-          </a:solidFill>
-          <a:ln>
-            <a:noFill/>
-          </a:ln>
-          <a:effectLst/>
-        </p:spPr>
-        <p:style>
-          <a:lnRef idx="1">
-            <a:schemeClr val="accent1"/>
-          </a:lnRef>
-          <a:fillRef idx="3">
-            <a:schemeClr val="accent1"/>
-          </a:fillRef>
-          <a:effectRef idx="2">
-            <a:schemeClr val="accent1"/>
-          </a:effectRef>
-          <a:fontRef idx="minor">
-            <a:schemeClr val="lt1"/>
-          </a:fontRef>
-        </p:style>
-        <p:txBody>
-          <a:bodyPr rtlCol="0" anchor="ctr"/>
-          <a:lstStyle/>
-          <a:p>
-            <a:pPr algn="ctr"/>
-          </a:p>
-        </p:txBody>
-      </p:sp>
-      <p:sp>
-        <p:nvSpPr>
-          <p:cNvPr id="18" name="TextBox 17"/>
-          <p:cNvSpPr txBox="1"/>
-          <p:nvPr/>
-        </p:nvSpPr>
-        <p:spPr>
-          <a:xfrm>
-            <a:off x="7040880" y="2048256"/>
-            <a:ext cx="1965960" cy="274320"/>
-          </a:xfrm>
-          <a:prstGeom prst="rect">
-            <a:avLst/>
-          </a:prstGeom>
-          <a:noFill/>
-        </p:spPr>
-        <p:txBody>
-          <a:bodyPr wrap="square" lIns="0" rIns="0" tIns="0" bIns="0">
-            <a:spAutoFit/>
-          </a:bodyPr>
-          <a:lstStyle/>
-          <a:p>
-            <a:pPr algn="ctr">
-              <a:spcAft>
-                <a:spcPts val="400"/>
-              </a:spcAft>
-            </a:pPr>
-            <a:r>
-              <a:rPr sz="1400" b="1" i="0">
-                <a:solidFill>
-                  <a:srgbClr val="1B1B26"/>
-                </a:solidFill>
-                <a:latin typeface="Yu Gothic"/>
-                <a:ea typeface="Yu Gothic"/>
-                <a:cs typeface="Yu Gothic"/>
-              </a:rPr>
-              <a:t>＋5億</a:t>
-            </a:r>
-          </a:p>
-        </p:txBody>
-      </p:sp>
-      <p:sp>
-        <p:nvSpPr>
-          <p:cNvPr id="19" name="TextBox 18"/>
-          <p:cNvSpPr txBox="1"/>
-          <p:nvPr/>
-        </p:nvSpPr>
-        <p:spPr>
-          <a:xfrm>
-            <a:off x="7223760" y="2434590"/>
-            <a:ext cx="1600200" cy="274320"/>
-          </a:xfrm>
-          <a:prstGeom prst="rect">
-            <a:avLst/>
-          </a:prstGeom>
-          <a:noFill/>
-        </p:spPr>
-        <p:txBody>
-          <a:bodyPr wrap="square" lIns="0" rIns="0" tIns="0" bIns="0">
-            <a:spAutoFit/>
-          </a:bodyPr>
-          <a:lstStyle/>
-          <a:p>
-            <a:pPr algn="ctr">
-              <a:spcAft>
-                <a:spcPts val="400"/>
-              </a:spcAft>
-            </a:pPr>
-            <a:r>
-              <a:rPr sz="1200" b="1" i="0">
-                <a:solidFill>
-                  <a:srgbClr val="FFFFFF"/>
-                </a:solidFill>
-                <a:latin typeface="Yu Gothic"/>
-                <a:ea typeface="Yu Gothic"/>
-                <a:cs typeface="Yu Gothic"/>
-              </a:rPr>
-              <a:t>中国</a:t>
-            </a:r>
-          </a:p>
-        </p:txBody>
-      </p:sp>
-      <p:sp>
-        <p:nvSpPr>
-          <p:cNvPr id="20" name="Rectangle 19"/>
-          <p:cNvSpPr/>
-          <p:nvPr/>
-        </p:nvSpPr>
-        <p:spPr>
-          <a:xfrm>
-            <a:off x="7223760" y="2784348"/>
-            <a:ext cx="9144" cy="6350"/>
+            <a:off x="6327648" y="2165939"/>
+            <a:ext cx="576071" cy="13970"/>
           </a:xfrm>
           <a:prstGeom prst="rect">
             <a:avLst/>
@@ -3918,14 +4007,14 @@
       </p:sp>
       <p:sp>
         <p:nvSpPr>
-          <p:cNvPr id="21" name="Rectangle 20"/>
+          <p:cNvPr id="23" name="Rectangle 22"/>
           <p:cNvSpPr/>
           <p:nvPr/>
         </p:nvSpPr>
         <p:spPr>
           <a:xfrm>
-            <a:off x="2377440" y="3634739"/>
-            <a:ext cx="548640" cy="13970"/>
+            <a:off x="8385048" y="2048256"/>
+            <a:ext cx="576072" cy="13970"/>
           </a:xfrm>
           <a:prstGeom prst="rect">
             <a:avLst/>
@@ -3962,179 +4051,119 @@
       </p:sp>
       <p:sp>
         <p:nvSpPr>
-          <p:cNvPr id="22" name="Rectangle 21"/>
-          <p:cNvSpPr/>
-          <p:nvPr/>
-        </p:nvSpPr>
-        <p:spPr>
-          <a:xfrm>
-            <a:off x="4526280" y="3209544"/>
-            <a:ext cx="548639" cy="13970"/>
-          </a:xfrm>
-          <a:prstGeom prst="rect">
-            <a:avLst/>
-          </a:prstGeom>
-          <a:solidFill>
-            <a:srgbClr val="E5E7EB"/>
-          </a:solidFill>
-          <a:ln>
-            <a:noFill/>
-          </a:ln>
-          <a:effectLst/>
-        </p:spPr>
-        <p:style>
-          <a:lnRef idx="1">
-            <a:schemeClr val="accent1"/>
-          </a:lnRef>
-          <a:fillRef idx="3">
-            <a:schemeClr val="accent1"/>
-          </a:fillRef>
-          <a:effectRef idx="2">
-            <a:schemeClr val="accent1"/>
-          </a:effectRef>
-          <a:fontRef idx="minor">
-            <a:schemeClr val="lt1"/>
-          </a:fontRef>
-        </p:style>
-        <p:txBody>
-          <a:bodyPr rtlCol="0" anchor="ctr"/>
-          <a:lstStyle/>
-          <a:p>
-            <a:pPr algn="ctr"/>
-          </a:p>
-        </p:txBody>
-      </p:sp>
-      <p:sp>
-        <p:nvSpPr>
-          <p:cNvPr id="23" name="Rectangle 22"/>
-          <p:cNvSpPr/>
-          <p:nvPr/>
-        </p:nvSpPr>
-        <p:spPr>
-          <a:xfrm>
-            <a:off x="6675120" y="2784348"/>
-            <a:ext cx="548640" cy="13970"/>
-          </a:xfrm>
-          <a:prstGeom prst="rect">
-            <a:avLst/>
-          </a:prstGeom>
-          <a:solidFill>
-            <a:srgbClr val="E5E7EB"/>
-          </a:solidFill>
-          <a:ln>
-            <a:noFill/>
-          </a:ln>
-          <a:effectLst/>
-        </p:spPr>
-        <p:style>
-          <a:lnRef idx="1">
-            <a:schemeClr val="accent1"/>
-          </a:lnRef>
-          <a:fillRef idx="3">
-            <a:schemeClr val="accent1"/>
-          </a:fillRef>
-          <a:effectRef idx="2">
-            <a:schemeClr val="accent1"/>
-          </a:effectRef>
-          <a:fontRef idx="minor">
-            <a:schemeClr val="lt1"/>
-          </a:fontRef>
-        </p:style>
-        <p:txBody>
-          <a:bodyPr rtlCol="0" anchor="ctr"/>
-          <a:lstStyle/>
-          <a:p>
-            <a:pPr algn="ctr"/>
-          </a:p>
-        </p:txBody>
-      </p:sp>
-      <p:sp>
-        <p:nvSpPr>
-          <p:cNvPr id="24" name="Rectangle 23"/>
-          <p:cNvSpPr/>
-          <p:nvPr/>
-        </p:nvSpPr>
-        <p:spPr>
-          <a:xfrm>
-            <a:off x="8823960" y="2359152"/>
-            <a:ext cx="822960" cy="13970"/>
-          </a:xfrm>
-          <a:prstGeom prst="rect">
-            <a:avLst/>
-          </a:prstGeom>
-          <a:solidFill>
-            <a:srgbClr val="E5E7EB"/>
-          </a:solidFill>
-          <a:ln>
-            <a:noFill/>
-          </a:ln>
-          <a:effectLst/>
-        </p:spPr>
-        <p:style>
-          <a:lnRef idx="1">
-            <a:schemeClr val="accent1"/>
-          </a:lnRef>
-          <a:fillRef idx="3">
-            <a:schemeClr val="accent1"/>
-          </a:fillRef>
-          <a:effectRef idx="2">
-            <a:schemeClr val="accent1"/>
-          </a:effectRef>
-          <a:fontRef idx="minor">
-            <a:schemeClr val="lt1"/>
-          </a:fontRef>
-        </p:style>
-        <p:txBody>
-          <a:bodyPr rtlCol="0" anchor="ctr"/>
-          <a:lstStyle/>
-          <a:p>
-            <a:pPr algn="ctr"/>
-          </a:p>
-        </p:txBody>
-      </p:sp>
-      <p:sp>
-        <p:nvSpPr>
-          <p:cNvPr id="25" name="Rounded Rectangle 24"/>
-          <p:cNvSpPr/>
-          <p:nvPr/>
-        </p:nvSpPr>
-        <p:spPr>
-          <a:xfrm>
-            <a:off x="9646920" y="2359152"/>
-            <a:ext cx="1600200" cy="3401568"/>
-          </a:xfrm>
-          <a:prstGeom prst="roundRect">
-            <a:avLst>
-              <a:gd name="adj" fmla="val 6000"/>
-            </a:avLst>
-          </a:prstGeom>
-          <a:solidFill>
-            <a:srgbClr val="1E40AF"/>
-          </a:solidFill>
-          <a:ln>
-            <a:noFill/>
-          </a:ln>
-          <a:effectLst/>
-        </p:spPr>
-        <p:style>
-          <a:lnRef idx="1">
-            <a:schemeClr val="accent1"/>
-          </a:lnRef>
-          <a:fillRef idx="3">
-            <a:schemeClr val="accent1"/>
-          </a:fillRef>
-          <a:effectRef idx="2">
-            <a:schemeClr val="accent1"/>
-          </a:effectRef>
-          <a:fontRef idx="minor">
-            <a:schemeClr val="lt1"/>
-          </a:fontRef>
-        </p:style>
-        <p:txBody>
-          <a:bodyPr rtlCol="0" anchor="ctr"/>
-          <a:lstStyle/>
-          <a:p>
-            <a:pPr algn="ctr"/>
+          <p:cNvPr id="24" name="TextBox 23"/>
+          <p:cNvSpPr txBox="1"/>
+          <p:nvPr/>
+        </p:nvSpPr>
+        <p:spPr>
+          <a:xfrm>
+            <a:off x="2468879" y="5797296"/>
+            <a:ext cx="2148840" cy="548640"/>
+          </a:xfrm>
+          <a:prstGeom prst="rect">
+            <a:avLst/>
+          </a:prstGeom>
+          <a:noFill/>
+        </p:spPr>
+        <p:txBody>
+          <a:bodyPr wrap="square" lIns="0" rIns="0" tIns="0" bIns="0">
+            <a:spAutoFit/>
+          </a:bodyPr>
+          <a:lstStyle/>
+          <a:p>
+            <a:pPr algn="ctr">
+              <a:spcAft>
+                <a:spcPts val="100"/>
+              </a:spcAft>
+            </a:pPr>
+            <a:r>
+              <a:rPr sz="950" b="1" i="0">
+                <a:solidFill>
+                  <a:srgbClr val="1E40AF"/>
+                </a:solidFill>
+                <a:latin typeface="Yu Gothic"/>
+                <a:ea typeface="Yu Gothic"/>
+                <a:cs typeface="Yu Gothic"/>
+              </a:rPr>
+              <a:t>毀損の復元</a:t>
+            </a:r>
+          </a:p>
+          <a:p>
+            <a:pPr algn="ctr">
+              <a:spcAft>
+                <a:spcPts val="0"/>
+              </a:spcAft>
+            </a:pPr>
+            <a:r>
+              <a:rPr sz="750" b="0" i="0">
+                <a:solidFill>
+                  <a:srgbClr val="6B7280"/>
+                </a:solidFill>
+                <a:latin typeface="Yu Gothic"/>
+                <a:ea typeface="Yu Gothic"/>
+                <a:cs typeface="Yu Gothic"/>
+              </a:rPr>
+              <a:t>ライブ後ズレ・海外ディス・国内MD（次頁）</a:t>
+            </a:r>
+          </a:p>
+        </p:txBody>
+      </p:sp>
+      <p:sp>
+        <p:nvSpPr>
+          <p:cNvPr id="25" name="TextBox 24"/>
+          <p:cNvSpPr txBox="1"/>
+          <p:nvPr/>
+        </p:nvSpPr>
+        <p:spPr>
+          <a:xfrm>
+            <a:off x="4526280" y="5797296"/>
+            <a:ext cx="2148840" cy="548640"/>
+          </a:xfrm>
+          <a:prstGeom prst="rect">
+            <a:avLst/>
+          </a:prstGeom>
+          <a:noFill/>
+        </p:spPr>
+        <p:txBody>
+          <a:bodyPr wrap="square" lIns="0" rIns="0" tIns="0" bIns="0">
+            <a:spAutoFit/>
+          </a:bodyPr>
+          <a:lstStyle/>
+          <a:p>
+            <a:pPr algn="ctr">
+              <a:spcAft>
+                <a:spcPts val="100"/>
+              </a:spcAft>
+            </a:pPr>
+            <a:r>
+              <a:rPr sz="950" b="1" i="0">
+                <a:solidFill>
+                  <a:srgbClr val="1E40AF"/>
+                </a:solidFill>
+                <a:latin typeface="Yu Gothic"/>
+                <a:ea typeface="Yu Gothic"/>
+                <a:cs typeface="Yu Gothic"/>
+              </a:rPr>
+              <a:t>確度で管理</a:t>
+            </a:r>
+          </a:p>
+          <a:p>
+            <a:pPr algn="ctr">
+              <a:spcAft>
+                <a:spcPts val="0"/>
+              </a:spcAft>
+            </a:pPr>
+            <a:r>
+              <a:rPr sz="750" b="0" i="0">
+                <a:solidFill>
+                  <a:srgbClr val="6B7280"/>
+                </a:solidFill>
+                <a:latin typeface="Yu Gothic"/>
+                <a:ea typeface="Yu Gothic"/>
+                <a:cs typeface="Yu Gothic"/>
+              </a:rPr>
+              <a:t>黒0.3/青/赤のパイプライン（4頁目）</a:t>
+            </a:r>
           </a:p>
         </p:txBody>
       </p:sp>
@@ -4146,8 +4175,8 @@
         </p:nvSpPr>
         <p:spPr>
           <a:xfrm>
-            <a:off x="9464040" y="2048256"/>
-            <a:ext cx="1965960" cy="274320"/>
+            <a:off x="6583680" y="5797296"/>
+            <a:ext cx="2148840" cy="548640"/>
           </a:xfrm>
           <a:prstGeom prst="rect">
             <a:avLst/>
@@ -4162,19 +4191,37 @@
           <a:p>
             <a:pPr algn="ctr">
               <a:spcAft>
-                <a:spcPts val="400"/>
-              </a:spcAft>
-            </a:pPr>
-            <a:r>
-              <a:rPr sz="1400" b="1" i="0">
-                <a:solidFill>
-                  <a:srgbClr val="1B1B26"/>
-                </a:solidFill>
-                <a:latin typeface="Yu Gothic"/>
-                <a:ea typeface="Yu Gothic"/>
-                <a:cs typeface="Yu Gothic"/>
-              </a:rPr>
-              <a:t>40億</a:t>
+                <a:spcPts val="100"/>
+              </a:spcAft>
+            </a:pPr>
+            <a:r>
+              <a:rPr sz="950" b="1" i="0">
+                <a:solidFill>
+                  <a:srgbClr val="1E40AF"/>
+                </a:solidFill>
+                <a:latin typeface="Yu Gothic"/>
+                <a:ea typeface="Yu Gothic"/>
+                <a:cs typeface="Yu Gothic"/>
+              </a:rPr>
+              <a:t>コスト削減（第3のレバー）</a:t>
+            </a:r>
+          </a:p>
+          <a:p>
+            <a:pPr algn="ctr">
+              <a:spcAft>
+                <a:spcPts val="0"/>
+              </a:spcAft>
+            </a:pPr>
+            <a:r>
+              <a:rPr sz="750" b="0" i="0">
+                <a:solidFill>
+                  <a:srgbClr val="6B7280"/>
+                </a:solidFill>
+                <a:latin typeface="Yu Gothic"/>
+                <a:ea typeface="Yu Gothic"/>
+                <a:cs typeface="Yu Gothic"/>
+              </a:rPr>
+              <a:t>販管費超過+1.0億の解消を含む（コストチーム）</a:t>
             </a:r>
           </a:p>
         </p:txBody>
@@ -4187,8 +4234,8 @@
         </p:nvSpPr>
         <p:spPr>
           <a:xfrm>
-            <a:off x="9646920" y="3922775"/>
-            <a:ext cx="1600200" cy="274320"/>
+            <a:off x="731520" y="2377440"/>
+            <a:ext cx="3794760" cy="1005840"/>
           </a:xfrm>
           <a:prstGeom prst="rect">
             <a:avLst/>
@@ -4201,79 +4248,71 @@
           </a:bodyPr>
           <a:lstStyle/>
           <a:p>
-            <a:pPr algn="ctr">
+            <a:pPr algn="l">
+              <a:spcAft>
+                <a:spcPts val="200"/>
+              </a:spcAft>
+            </a:pPr>
+            <a:r>
+              <a:rPr sz="1050" b="1" i="0">
+                <a:solidFill>
+                  <a:srgbClr val="6B7280"/>
+                </a:solidFill>
+                <a:latin typeface="Yu Gothic"/>
+                <a:ea typeface="Yu Gothic"/>
+                <a:cs typeface="Yu Gothic"/>
+              </a:rPr>
+              <a:t>前期5.7億 → 見込19.8億（＋14.2億の改善）。</a:t>
+            </a:r>
+          </a:p>
+          <a:p>
+            <a:pPr algn="l">
               <a:spcAft>
                 <a:spcPts val="400"/>
               </a:spcAft>
             </a:pPr>
             <a:r>
-              <a:rPr sz="1200" b="1" i="0">
-                <a:solidFill>
-                  <a:srgbClr val="FFFFFF"/>
-                </a:solidFill>
-                <a:latin typeface="Yu Gothic"/>
-                <a:ea typeface="Yu Gothic"/>
-                <a:cs typeface="Yu Gothic"/>
-              </a:rPr>
-              <a:t>今期目標</a:t>
-            </a:r>
-          </a:p>
-        </p:txBody>
-      </p:sp>
-      <p:sp>
-        <p:nvSpPr>
-          <p:cNvPr id="28" name="Rectangle 27"/>
-          <p:cNvSpPr/>
-          <p:nvPr/>
-        </p:nvSpPr>
-        <p:spPr>
-          <a:xfrm>
-            <a:off x="777240" y="1933956"/>
-            <a:ext cx="10469880" cy="15240"/>
-          </a:xfrm>
-          <a:prstGeom prst="rect">
-            <a:avLst/>
-          </a:prstGeom>
-          <a:solidFill>
-            <a:srgbClr val="4F7DEE"/>
-          </a:solidFill>
-          <a:ln>
-            <a:noFill/>
-          </a:ln>
-          <a:effectLst/>
-        </p:spPr>
-        <p:style>
-          <a:lnRef idx="1">
-            <a:schemeClr val="accent1"/>
-          </a:lnRef>
-          <a:fillRef idx="3">
-            <a:schemeClr val="accent1"/>
-          </a:fillRef>
-          <a:effectRef idx="2">
-            <a:schemeClr val="accent1"/>
-          </a:effectRef>
-          <a:fontRef idx="minor">
-            <a:schemeClr val="lt1"/>
-          </a:fontRef>
-        </p:style>
-        <p:txBody>
-          <a:bodyPr rtlCol="0" anchor="ctr"/>
-          <a:lstStyle/>
-          <a:p>
-            <a:pPr algn="ctr"/>
-          </a:p>
-        </p:txBody>
-      </p:sp>
-      <p:sp>
-        <p:nvSpPr>
-          <p:cNvPr id="29" name="TextBox 28"/>
+              <a:rPr sz="1050" b="1" i="0">
+                <a:solidFill>
+                  <a:srgbClr val="6B7280"/>
+                </a:solidFill>
+                <a:latin typeface="Yu Gothic"/>
+                <a:ea typeface="Yu Gothic"/>
+                <a:cs typeface="Yu Gothic"/>
+              </a:rPr>
+              <a:t>ただし部門目標23.7億比では▲3.9億</a:t>
+            </a:r>
+          </a:p>
+          <a:p>
+            <a:pPr algn="l">
+              <a:spcAft>
+                <a:spcPts val="0"/>
+              </a:spcAft>
+            </a:pPr>
+            <a:r>
+              <a:rPr sz="900" b="0" i="0">
+                <a:solidFill>
+                  <a:srgbClr val="6B7280"/>
+                </a:solidFill>
+                <a:latin typeface="Yu Gothic"/>
+                <a:ea typeface="Yu Gothic"/>
+                <a:cs typeface="Yu Gothic"/>
+              </a:rPr>
+              <a:t>※カード9弾（8/17受注）等は見込に未反映。毎月この場で「あといくら」を更新します</a:t>
+            </a:r>
+          </a:p>
+        </p:txBody>
+      </p:sp>
+      <p:sp>
+        <p:nvSpPr>
+          <p:cNvPr id="28" name="TextBox 27"/>
           <p:cNvSpPr txBox="1"/>
           <p:nvPr/>
         </p:nvSpPr>
         <p:spPr>
           <a:xfrm>
-            <a:off x="9464040" y="1659636"/>
-            <a:ext cx="2194560" cy="256032"/>
+            <a:off x="502920" y="6510528"/>
+            <a:ext cx="8229600" cy="237744"/>
           </a:xfrm>
           <a:prstGeom prst="rect">
             <a:avLst/>
@@ -4286,66 +4325,7 @@
           </a:bodyPr>
           <a:lstStyle/>
           <a:p>
-            <a:pPr algn="r">
-              <a:spcAft>
-                <a:spcPts val="400"/>
-              </a:spcAft>
-            </a:pPr>
-            <a:r>
-              <a:rPr sz="1000" b="1" i="0">
-                <a:solidFill>
-                  <a:srgbClr val="4F7DEE"/>
-                </a:solidFill>
-                <a:latin typeface="Yu Gothic"/>
-                <a:ea typeface="Yu Gothic"/>
-                <a:cs typeface="Yu Gothic"/>
-              </a:rPr>
-              <a:t>社内ミニマム 45億（＋20億）</a:t>
-            </a:r>
-          </a:p>
-        </p:txBody>
-      </p:sp>
-      <p:sp>
-        <p:nvSpPr>
-          <p:cNvPr id="30" name="TextBox 29"/>
-          <p:cNvSpPr txBox="1"/>
-          <p:nvPr/>
-        </p:nvSpPr>
-        <p:spPr>
-          <a:xfrm>
-            <a:off x="2670048" y="5870448"/>
-            <a:ext cx="2103120" cy="566928"/>
-          </a:xfrm>
-          <a:prstGeom prst="rect">
-            <a:avLst/>
-          </a:prstGeom>
-          <a:noFill/>
-        </p:spPr>
-        <p:txBody>
-          <a:bodyPr wrap="square" lIns="0" rIns="0" tIns="0" bIns="0">
-            <a:spAutoFit/>
-          </a:bodyPr>
-          <a:lstStyle/>
-          <a:p>
-            <a:pPr algn="ctr">
-              <a:spcAft>
-                <a:spcPts val="100"/>
-              </a:spcAft>
-            </a:pPr>
-            <a:r>
-              <a:rPr sz="1000" b="1" i="0">
-                <a:solidFill>
-                  <a:srgbClr val="1E40AF"/>
-                </a:solidFill>
-                <a:latin typeface="Yu Gothic"/>
-                <a:ea typeface="Yu Gothic"/>
-                <a:cs typeface="Yu Gothic"/>
-              </a:rPr>
-              <a:t>社内目標＋7億</a:t>
-            </a:r>
-          </a:p>
-          <a:p>
-            <a:pPr algn="ctr">
+            <a:pPr algn="l">
               <a:spcAft>
                 <a:spcPts val="0"/>
               </a:spcAft>
@@ -4353,250 +4333,6 @@
             <a:r>
               <a:rPr sz="800" b="0" i="0">
                 <a:solidFill>
-                  <a:srgbClr val="6B7280"/>
-                </a:solidFill>
-                <a:latin typeface="Yu Gothic"/>
-                <a:ea typeface="Yu Gothic"/>
-                <a:cs typeface="Yu Gothic"/>
-              </a:rPr>
-              <a:t>大型広告の継続化・上位22社深耕・トップ外交</a:t>
-            </a:r>
-          </a:p>
-        </p:txBody>
-      </p:sp>
-      <p:sp>
-        <p:nvSpPr>
-          <p:cNvPr id="31" name="TextBox 30"/>
-          <p:cNvSpPr txBox="1"/>
-          <p:nvPr/>
-        </p:nvSpPr>
-        <p:spPr>
-          <a:xfrm>
-            <a:off x="4818888" y="5870448"/>
-            <a:ext cx="2103120" cy="566928"/>
-          </a:xfrm>
-          <a:prstGeom prst="rect">
-            <a:avLst/>
-          </a:prstGeom>
-          <a:noFill/>
-        </p:spPr>
-        <p:txBody>
-          <a:bodyPr wrap="square" lIns="0" rIns="0" tIns="0" bIns="0">
-            <a:spAutoFit/>
-          </a:bodyPr>
-          <a:lstStyle/>
-          <a:p>
-            <a:pPr algn="ctr">
-              <a:spcAft>
-                <a:spcPts val="100"/>
-              </a:spcAft>
-            </a:pPr>
-            <a:r>
-              <a:rPr sz="1000" b="1" i="0">
-                <a:solidFill>
-                  <a:srgbClr val="1E40AF"/>
-                </a:solidFill>
-                <a:latin typeface="Yu Gothic"/>
-                <a:ea typeface="Yu Gothic"/>
-                <a:cs typeface="Yu Gothic"/>
-              </a:rPr>
-              <a:t>社内目標＋6億</a:t>
-            </a:r>
-          </a:p>
-          <a:p>
-            <a:pPr algn="ctr">
-              <a:spcAft>
-                <a:spcPts val="0"/>
-              </a:spcAft>
-            </a:pPr>
-            <a:r>
-              <a:rPr sz="800" b="0" i="0">
-                <a:solidFill>
-                  <a:srgbClr val="6B7280"/>
-                </a:solidFill>
-                <a:latin typeface="Yu Gothic"/>
-                <a:ea typeface="Yu Gothic"/>
-                <a:cs typeface="Yu Gothic"/>
-              </a:rPr>
-              <a:t>カード9弾(8/17確定)・UM/EC・横展開</a:t>
-            </a:r>
-          </a:p>
-        </p:txBody>
-      </p:sp>
-      <p:sp>
-        <p:nvSpPr>
-          <p:cNvPr id="32" name="TextBox 31"/>
-          <p:cNvSpPr txBox="1"/>
-          <p:nvPr/>
-        </p:nvSpPr>
-        <p:spPr>
-          <a:xfrm>
-            <a:off x="6967728" y="5870448"/>
-            <a:ext cx="2103120" cy="566928"/>
-          </a:xfrm>
-          <a:prstGeom prst="rect">
-            <a:avLst/>
-          </a:prstGeom>
-          <a:noFill/>
-        </p:spPr>
-        <p:txBody>
-          <a:bodyPr wrap="square" lIns="0" rIns="0" tIns="0" bIns="0">
-            <a:spAutoFit/>
-          </a:bodyPr>
-          <a:lstStyle/>
-          <a:p>
-            <a:pPr algn="ctr">
-              <a:spcAft>
-                <a:spcPts val="100"/>
-              </a:spcAft>
-            </a:pPr>
-            <a:r>
-              <a:rPr sz="1000" b="1" i="0">
-                <a:solidFill>
-                  <a:srgbClr val="1E40AF"/>
-                </a:solidFill>
-                <a:latin typeface="Yu Gothic"/>
-                <a:ea typeface="Yu Gothic"/>
-                <a:cs typeface="Yu Gothic"/>
-              </a:rPr>
-              <a:t>社内目標＋7億</a:t>
-            </a:r>
-          </a:p>
-          <a:p>
-            <a:pPr algn="ctr">
-              <a:spcAft>
-                <a:spcPts val="0"/>
-              </a:spcAft>
-            </a:pPr>
-            <a:r>
-              <a:rPr sz="800" b="0" i="0">
-                <a:solidFill>
-                  <a:srgbClr val="6B7280"/>
-                </a:solidFill>
-                <a:latin typeface="Yu Gothic"/>
-                <a:ea typeface="Yu Gothic"/>
-                <a:cs typeface="Yu Gothic"/>
-              </a:rPr>
-              <a:t>MG改定・Blokees・越境EC</a:t>
-            </a:r>
-          </a:p>
-        </p:txBody>
-      </p:sp>
-      <p:sp>
-        <p:nvSpPr>
-          <p:cNvPr id="33" name="Rounded Rectangle 32"/>
-          <p:cNvSpPr/>
-          <p:nvPr/>
-        </p:nvSpPr>
-        <p:spPr>
-          <a:xfrm>
-            <a:off x="502920" y="6400800"/>
-            <a:ext cx="11183112" cy="0"/>
-          </a:xfrm>
-          <a:prstGeom prst="roundRect">
-            <a:avLst>
-              <a:gd name="adj" fmla="val 10000"/>
-            </a:avLst>
-          </a:prstGeom>
-          <a:noFill/>
-          <a:ln>
-            <a:noFill/>
-          </a:ln>
-          <a:effectLst/>
-        </p:spPr>
-        <p:style>
-          <a:lnRef idx="1">
-            <a:schemeClr val="accent1"/>
-          </a:lnRef>
-          <a:fillRef idx="3">
-            <a:schemeClr val="accent1"/>
-          </a:fillRef>
-          <a:effectRef idx="2">
-            <a:schemeClr val="accent1"/>
-          </a:effectRef>
-          <a:fontRef idx="minor">
-            <a:schemeClr val="lt1"/>
-          </a:fontRef>
-        </p:style>
-        <p:txBody>
-          <a:bodyPr rtlCol="0" anchor="ctr"/>
-          <a:lstStyle/>
-          <a:p>
-            <a:pPr algn="ctr"/>
-          </a:p>
-        </p:txBody>
-      </p:sp>
-      <p:sp>
-        <p:nvSpPr>
-          <p:cNvPr id="34" name="TextBox 33"/>
-          <p:cNvSpPr txBox="1"/>
-          <p:nvPr/>
-        </p:nvSpPr>
-        <p:spPr>
-          <a:xfrm>
-            <a:off x="777240" y="2212848"/>
-            <a:ext cx="5943600" cy="274320"/>
-          </a:xfrm>
-          <a:prstGeom prst="rect">
-            <a:avLst/>
-          </a:prstGeom>
-          <a:noFill/>
-        </p:spPr>
-        <p:txBody>
-          <a:bodyPr wrap="square" lIns="0" rIns="0" tIns="0" bIns="0">
-            <a:spAutoFit/>
-          </a:bodyPr>
-          <a:lstStyle/>
-          <a:p>
-            <a:pPr algn="l">
-              <a:spcAft>
-                <a:spcPts val="400"/>
-              </a:spcAft>
-            </a:pPr>
-            <a:r>
-              <a:rPr sz="1000" b="1" i="0">
-                <a:solidFill>
-                  <a:srgbClr val="6B7280"/>
-                </a:solidFill>
-                <a:latin typeface="Yu Gothic"/>
-                <a:ea typeface="Yu Gothic"/>
-                <a:cs typeface="Yu Gothic"/>
-              </a:rPr>
-              <a:t>各＋5億は「利益の積み上げ＋コスト削減」の合成で達成してよい（例：利益3億＋コスト削減2億）</a:t>
-            </a:r>
-          </a:p>
-        </p:txBody>
-      </p:sp>
-      <p:sp>
-        <p:nvSpPr>
-          <p:cNvPr id="35" name="TextBox 34"/>
-          <p:cNvSpPr txBox="1"/>
-          <p:nvPr/>
-        </p:nvSpPr>
-        <p:spPr>
-          <a:xfrm>
-            <a:off x="502920" y="6510528"/>
-            <a:ext cx="8229600" cy="237744"/>
-          </a:xfrm>
-          <a:prstGeom prst="rect">
-            <a:avLst/>
-          </a:prstGeom>
-          <a:noFill/>
-        </p:spPr>
-        <p:txBody>
-          <a:bodyPr wrap="square" lIns="0" rIns="0" tIns="0" bIns="0">
-            <a:spAutoFit/>
-          </a:bodyPr>
-          <a:lstStyle/>
-          <a:p>
-            <a:pPr algn="l">
-              <a:spcAft>
-                <a:spcPts val="0"/>
-              </a:spcAft>
-            </a:pPr>
-            <a:r>
-              <a:rPr sz="800" b="0" i="0">
-                <a:solidFill>
                   <a:srgbClr val="8A8F9C"/>
                 </a:solidFill>
                 <a:latin typeface="Yu Gothic"/>
@@ -4610,7 +4346,7 @@
       </p:sp>
       <p:sp>
         <p:nvSpPr>
-          <p:cNvPr id="36" name="TextBox 35"/>
+          <p:cNvPr id="29" name="TextBox 28"/>
           <p:cNvSpPr txBox="1"/>
           <p:nvPr/>
         </p:nvSpPr>
@@ -4760,7 +4496,7 @@
                 <a:ea typeface="Yu Gothic"/>
                 <a:cs typeface="Yu Gothic"/>
               </a:rPr>
-              <a:t>アップサイド15億の中身 — 確度別パイプライン</a:t>
+              <a:t>どこで漏れているか — 目標比▲3.9億の中身</a:t>
             </a:r>
           </a:p>
         </p:txBody>
@@ -4845,7 +4581,1427 @@
                 <a:ea typeface="Yu Gothic"/>
                 <a:cs typeface="Yu Gothic"/>
               </a:rPr>
-              <a:t>黒（確定）・青（根拠あり）・赤（構想）で管理し、毎月この場で「赤が青に変わったか」を確認します</a:t>
+              <a:t>悪化は3カ所に集中。それぞれ挽回プランのオーナーと期限を決めます（単位：百万円）</a:t>
+            </a:r>
+          </a:p>
+        </p:txBody>
+      </p:sp>
+      <p:sp>
+        <p:nvSpPr>
+          <p:cNvPr id="6" name="TextBox 5"/>
+          <p:cNvSpPr txBox="1"/>
+          <p:nvPr/>
+        </p:nvSpPr>
+        <p:spPr>
+          <a:xfrm>
+            <a:off x="502920" y="1947672"/>
+            <a:ext cx="2286000" cy="274320"/>
+          </a:xfrm>
+          <a:prstGeom prst="rect">
+            <a:avLst/>
+          </a:prstGeom>
+          <a:noFill/>
+        </p:spPr>
+        <p:txBody>
+          <a:bodyPr wrap="square" lIns="0" rIns="0" tIns="0" bIns="0">
+            <a:spAutoFit/>
+          </a:bodyPr>
+          <a:lstStyle/>
+          <a:p>
+            <a:pPr algn="l">
+              <a:spcAft>
+                <a:spcPts val="400"/>
+              </a:spcAft>
+            </a:pPr>
+            <a:r>
+              <a:rPr sz="1100" b="1" i="0">
+                <a:solidFill>
+                  <a:srgbClr val="1B1B26"/>
+                </a:solidFill>
+                <a:latin typeface="Yu Gothic"/>
+                <a:ea typeface="Yu Gothic"/>
+                <a:cs typeface="Yu Gothic"/>
+              </a:rPr>
+              <a:t>ライセンス営業部</a:t>
+            </a:r>
+          </a:p>
+        </p:txBody>
+      </p:sp>
+      <p:sp>
+        <p:nvSpPr>
+          <p:cNvPr id="7" name="Rounded Rectangle 6"/>
+          <p:cNvSpPr/>
+          <p:nvPr/>
+        </p:nvSpPr>
+        <p:spPr>
+          <a:xfrm>
+            <a:off x="2880360" y="1956816"/>
+            <a:ext cx="2834640" cy="237744"/>
+          </a:xfrm>
+          <a:prstGeom prst="roundRect">
+            <a:avLst>
+              <a:gd name="adj" fmla="val 40000"/>
+            </a:avLst>
+          </a:prstGeom>
+          <a:solidFill>
+            <a:srgbClr val="B43C2E"/>
+          </a:solidFill>
+          <a:ln>
+            <a:noFill/>
+          </a:ln>
+          <a:effectLst/>
+        </p:spPr>
+        <p:style>
+          <a:lnRef idx="1">
+            <a:schemeClr val="accent1"/>
+          </a:lnRef>
+          <a:fillRef idx="3">
+            <a:schemeClr val="accent1"/>
+          </a:fillRef>
+          <a:effectRef idx="2">
+            <a:schemeClr val="accent1"/>
+          </a:effectRef>
+          <a:fontRef idx="minor">
+            <a:schemeClr val="lt1"/>
+          </a:fontRef>
+        </p:style>
+        <p:txBody>
+          <a:bodyPr rtlCol="0" anchor="ctr"/>
+          <a:lstStyle/>
+          <a:p>
+            <a:pPr algn="ctr"/>
+          </a:p>
+        </p:txBody>
+      </p:sp>
+      <p:sp>
+        <p:nvSpPr>
+          <p:cNvPr id="8" name="TextBox 7"/>
+          <p:cNvSpPr txBox="1"/>
+          <p:nvPr/>
+        </p:nvSpPr>
+        <p:spPr>
+          <a:xfrm>
+            <a:off x="5806440" y="1938528"/>
+            <a:ext cx="914400" cy="274320"/>
+          </a:xfrm>
+          <a:prstGeom prst="rect">
+            <a:avLst/>
+          </a:prstGeom>
+          <a:noFill/>
+        </p:spPr>
+        <p:txBody>
+          <a:bodyPr wrap="square" lIns="0" rIns="0" tIns="0" bIns="0">
+            <a:spAutoFit/>
+          </a:bodyPr>
+          <a:lstStyle/>
+          <a:p>
+            <a:pPr algn="l">
+              <a:spcAft>
+                <a:spcPts val="400"/>
+              </a:spcAft>
+            </a:pPr>
+            <a:r>
+              <a:rPr sz="1100" b="1" i="0">
+                <a:solidFill>
+                  <a:srgbClr val="B43C2E"/>
+                </a:solidFill>
+                <a:latin typeface="Yu Gothic"/>
+                <a:ea typeface="Yu Gothic"/>
+                <a:cs typeface="Yu Gothic"/>
+              </a:rPr>
+              <a:t>-220</a:t>
+            </a:r>
+          </a:p>
+        </p:txBody>
+      </p:sp>
+      <p:sp>
+        <p:nvSpPr>
+          <p:cNvPr id="9" name="TextBox 8"/>
+          <p:cNvSpPr txBox="1"/>
+          <p:nvPr/>
+        </p:nvSpPr>
+        <p:spPr>
+          <a:xfrm>
+            <a:off x="6720840" y="1938528"/>
+            <a:ext cx="4023360" cy="512064"/>
+          </a:xfrm>
+          <a:prstGeom prst="rect">
+            <a:avLst/>
+          </a:prstGeom>
+          <a:noFill/>
+        </p:spPr>
+        <p:txBody>
+          <a:bodyPr wrap="square" lIns="0" rIns="0" tIns="0" bIns="0">
+            <a:spAutoFit/>
+          </a:bodyPr>
+          <a:lstStyle/>
+          <a:p>
+            <a:pPr algn="l">
+              <a:spcAft>
+                <a:spcPts val="400"/>
+              </a:spcAft>
+            </a:pPr>
+            <a:r>
+              <a:rPr sz="850" b="0" i="0">
+                <a:solidFill>
+                  <a:srgbClr val="1B1B26"/>
+                </a:solidFill>
+                <a:latin typeface="Yu Gothic"/>
+                <a:ea typeface="Yu Gothic"/>
+                <a:cs typeface="Yu Gothic"/>
+              </a:rPr>
+              <a:t>海外ディス▲90（売上見込がマイナス値・正体の特定が必要）／国内MD▲62／中国▲33</a:t>
+            </a:r>
+          </a:p>
+        </p:txBody>
+      </p:sp>
+      <p:sp>
+        <p:nvSpPr>
+          <p:cNvPr id="10" name="TextBox 9"/>
+          <p:cNvSpPr txBox="1"/>
+          <p:nvPr/>
+        </p:nvSpPr>
+        <p:spPr>
+          <a:xfrm>
+            <a:off x="10972800" y="1947672"/>
+            <a:ext cx="731520" cy="274320"/>
+          </a:xfrm>
+          <a:prstGeom prst="rect">
+            <a:avLst/>
+          </a:prstGeom>
+          <a:noFill/>
+        </p:spPr>
+        <p:txBody>
+          <a:bodyPr wrap="square" lIns="0" rIns="0" tIns="0" bIns="0">
+            <a:spAutoFit/>
+          </a:bodyPr>
+          <a:lstStyle/>
+          <a:p>
+            <a:pPr algn="l">
+              <a:spcAft>
+                <a:spcPts val="400"/>
+              </a:spcAft>
+            </a:pPr>
+            <a:r>
+              <a:rPr sz="950" b="1" i="0">
+                <a:solidFill>
+                  <a:srgbClr val="2563EB"/>
+                </a:solidFill>
+                <a:latin typeface="Yu Gothic"/>
+                <a:ea typeface="Yu Gothic"/>
+                <a:cs typeface="Yu Gothic"/>
+              </a:rPr>
+              <a:t>南谷</a:t>
+            </a:r>
+          </a:p>
+        </p:txBody>
+      </p:sp>
+      <p:sp>
+        <p:nvSpPr>
+          <p:cNvPr id="11" name="TextBox 10"/>
+          <p:cNvSpPr txBox="1"/>
+          <p:nvPr/>
+        </p:nvSpPr>
+        <p:spPr>
+          <a:xfrm>
+            <a:off x="502920" y="2715768"/>
+            <a:ext cx="2286000" cy="274320"/>
+          </a:xfrm>
+          <a:prstGeom prst="rect">
+            <a:avLst/>
+          </a:prstGeom>
+          <a:noFill/>
+        </p:spPr>
+        <p:txBody>
+          <a:bodyPr wrap="square" lIns="0" rIns="0" tIns="0" bIns="0">
+            <a:spAutoFit/>
+          </a:bodyPr>
+          <a:lstStyle/>
+          <a:p>
+            <a:pPr algn="l">
+              <a:spcAft>
+                <a:spcPts val="400"/>
+              </a:spcAft>
+            </a:pPr>
+            <a:r>
+              <a:rPr sz="1100" b="1" i="0">
+                <a:solidFill>
+                  <a:srgbClr val="1B1B26"/>
+                </a:solidFill>
+                <a:latin typeface="Yu Gothic"/>
+                <a:ea typeface="Yu Gothic"/>
+                <a:cs typeface="Yu Gothic"/>
+              </a:rPr>
+              <a:t>ライブイベント部</a:t>
+            </a:r>
+          </a:p>
+        </p:txBody>
+      </p:sp>
+      <p:sp>
+        <p:nvSpPr>
+          <p:cNvPr id="12" name="Rounded Rectangle 11"/>
+          <p:cNvSpPr/>
+          <p:nvPr/>
+        </p:nvSpPr>
+        <p:spPr>
+          <a:xfrm>
+            <a:off x="2880360" y="2724912"/>
+            <a:ext cx="2357905" cy="237744"/>
+          </a:xfrm>
+          <a:prstGeom prst="roundRect">
+            <a:avLst>
+              <a:gd name="adj" fmla="val 40000"/>
+            </a:avLst>
+          </a:prstGeom>
+          <a:solidFill>
+            <a:srgbClr val="B43C2E"/>
+          </a:solidFill>
+          <a:ln>
+            <a:noFill/>
+          </a:ln>
+          <a:effectLst/>
+        </p:spPr>
+        <p:style>
+          <a:lnRef idx="1">
+            <a:schemeClr val="accent1"/>
+          </a:lnRef>
+          <a:fillRef idx="3">
+            <a:schemeClr val="accent1"/>
+          </a:fillRef>
+          <a:effectRef idx="2">
+            <a:schemeClr val="accent1"/>
+          </a:effectRef>
+          <a:fontRef idx="minor">
+            <a:schemeClr val="lt1"/>
+          </a:fontRef>
+        </p:style>
+        <p:txBody>
+          <a:bodyPr rtlCol="0" anchor="ctr"/>
+          <a:lstStyle/>
+          <a:p>
+            <a:pPr algn="ctr"/>
+          </a:p>
+        </p:txBody>
+      </p:sp>
+      <p:sp>
+        <p:nvSpPr>
+          <p:cNvPr id="13" name="TextBox 12"/>
+          <p:cNvSpPr txBox="1"/>
+          <p:nvPr/>
+        </p:nvSpPr>
+        <p:spPr>
+          <a:xfrm>
+            <a:off x="5329705" y="2706624"/>
+            <a:ext cx="914400" cy="274320"/>
+          </a:xfrm>
+          <a:prstGeom prst="rect">
+            <a:avLst/>
+          </a:prstGeom>
+          <a:noFill/>
+        </p:spPr>
+        <p:txBody>
+          <a:bodyPr wrap="square" lIns="0" rIns="0" tIns="0" bIns="0">
+            <a:spAutoFit/>
+          </a:bodyPr>
+          <a:lstStyle/>
+          <a:p>
+            <a:pPr algn="l">
+              <a:spcAft>
+                <a:spcPts val="400"/>
+              </a:spcAft>
+            </a:pPr>
+            <a:r>
+              <a:rPr sz="1100" b="1" i="0">
+                <a:solidFill>
+                  <a:srgbClr val="B43C2E"/>
+                </a:solidFill>
+                <a:latin typeface="Yu Gothic"/>
+                <a:ea typeface="Yu Gothic"/>
+                <a:cs typeface="Yu Gothic"/>
+              </a:rPr>
+              <a:t>-183</a:t>
+            </a:r>
+          </a:p>
+        </p:txBody>
+      </p:sp>
+      <p:sp>
+        <p:nvSpPr>
+          <p:cNvPr id="14" name="TextBox 13"/>
+          <p:cNvSpPr txBox="1"/>
+          <p:nvPr/>
+        </p:nvSpPr>
+        <p:spPr>
+          <a:xfrm>
+            <a:off x="6720840" y="2706624"/>
+            <a:ext cx="4023360" cy="512064"/>
+          </a:xfrm>
+          <a:prstGeom prst="rect">
+            <a:avLst/>
+          </a:prstGeom>
+          <a:noFill/>
+        </p:spPr>
+        <p:txBody>
+          <a:bodyPr wrap="square" lIns="0" rIns="0" tIns="0" bIns="0">
+            <a:spAutoFit/>
+          </a:bodyPr>
+          <a:lstStyle/>
+          <a:p>
+            <a:pPr algn="l">
+              <a:spcAft>
+                <a:spcPts val="400"/>
+              </a:spcAft>
+            </a:pPr>
+            <a:r>
+              <a:rPr sz="850" b="0" i="0">
+                <a:solidFill>
+                  <a:srgbClr val="1B1B26"/>
+                </a:solidFill>
+                <a:latin typeface="Yu Gothic"/>
+                <a:ea typeface="Yu Gothic"/>
+                <a:cs typeface="Yu Gothic"/>
+              </a:rPr>
+              <a:t>粗利▲185。LSS人件費の原価付替＋有料ライブの後ズレ。時期差か実力減かの切り分けを</a:t>
+            </a:r>
+          </a:p>
+        </p:txBody>
+      </p:sp>
+      <p:sp>
+        <p:nvSpPr>
+          <p:cNvPr id="15" name="TextBox 14"/>
+          <p:cNvSpPr txBox="1"/>
+          <p:nvPr/>
+        </p:nvSpPr>
+        <p:spPr>
+          <a:xfrm>
+            <a:off x="10972800" y="2715768"/>
+            <a:ext cx="731520" cy="274320"/>
+          </a:xfrm>
+          <a:prstGeom prst="rect">
+            <a:avLst/>
+          </a:prstGeom>
+          <a:noFill/>
+        </p:spPr>
+        <p:txBody>
+          <a:bodyPr wrap="square" lIns="0" rIns="0" tIns="0" bIns="0">
+            <a:spAutoFit/>
+          </a:bodyPr>
+          <a:lstStyle/>
+          <a:p>
+            <a:pPr algn="l">
+              <a:spcAft>
+                <a:spcPts val="400"/>
+              </a:spcAft>
+            </a:pPr>
+            <a:r>
+              <a:rPr sz="950" b="1" i="0">
+                <a:solidFill>
+                  <a:srgbClr val="2563EB"/>
+                </a:solidFill>
+                <a:latin typeface="Yu Gothic"/>
+                <a:ea typeface="Yu Gothic"/>
+                <a:cs typeface="Yu Gothic"/>
+              </a:rPr>
+              <a:t>南谷・菅野</a:t>
+            </a:r>
+          </a:p>
+        </p:txBody>
+      </p:sp>
+      <p:sp>
+        <p:nvSpPr>
+          <p:cNvPr id="16" name="TextBox 15"/>
+          <p:cNvSpPr txBox="1"/>
+          <p:nvPr/>
+        </p:nvSpPr>
+        <p:spPr>
+          <a:xfrm>
+            <a:off x="502920" y="3483863"/>
+            <a:ext cx="2286000" cy="274320"/>
+          </a:xfrm>
+          <a:prstGeom prst="rect">
+            <a:avLst/>
+          </a:prstGeom>
+          <a:noFill/>
+        </p:spPr>
+        <p:txBody>
+          <a:bodyPr wrap="square" lIns="0" rIns="0" tIns="0" bIns="0">
+            <a:spAutoFit/>
+          </a:bodyPr>
+          <a:lstStyle/>
+          <a:p>
+            <a:pPr algn="l">
+              <a:spcAft>
+                <a:spcPts val="400"/>
+              </a:spcAft>
+            </a:pPr>
+            <a:r>
+              <a:rPr sz="1100" b="1" i="0">
+                <a:solidFill>
+                  <a:srgbClr val="1B1B26"/>
+                </a:solidFill>
+                <a:latin typeface="Yu Gothic"/>
+                <a:ea typeface="Yu Gothic"/>
+                <a:cs typeface="Yu Gothic"/>
+              </a:rPr>
+              <a:t>管理部門の販管費</a:t>
+            </a:r>
+          </a:p>
+        </p:txBody>
+      </p:sp>
+      <p:sp>
+        <p:nvSpPr>
+          <p:cNvPr id="17" name="Rounded Rectangle 16"/>
+          <p:cNvSpPr/>
+          <p:nvPr/>
+        </p:nvSpPr>
+        <p:spPr>
+          <a:xfrm>
+            <a:off x="2880360" y="3493008"/>
+            <a:ext cx="1932709" cy="237744"/>
+          </a:xfrm>
+          <a:prstGeom prst="roundRect">
+            <a:avLst>
+              <a:gd name="adj" fmla="val 40000"/>
+            </a:avLst>
+          </a:prstGeom>
+          <a:solidFill>
+            <a:srgbClr val="B43C2E"/>
+          </a:solidFill>
+          <a:ln>
+            <a:noFill/>
+          </a:ln>
+          <a:effectLst/>
+        </p:spPr>
+        <p:style>
+          <a:lnRef idx="1">
+            <a:schemeClr val="accent1"/>
+          </a:lnRef>
+          <a:fillRef idx="3">
+            <a:schemeClr val="accent1"/>
+          </a:fillRef>
+          <a:effectRef idx="2">
+            <a:schemeClr val="accent1"/>
+          </a:effectRef>
+          <a:fontRef idx="minor">
+            <a:schemeClr val="lt1"/>
+          </a:fontRef>
+        </p:style>
+        <p:txBody>
+          <a:bodyPr rtlCol="0" anchor="ctr"/>
+          <a:lstStyle/>
+          <a:p>
+            <a:pPr algn="ctr"/>
+          </a:p>
+        </p:txBody>
+      </p:sp>
+      <p:sp>
+        <p:nvSpPr>
+          <p:cNvPr id="18" name="TextBox 17"/>
+          <p:cNvSpPr txBox="1"/>
+          <p:nvPr/>
+        </p:nvSpPr>
+        <p:spPr>
+          <a:xfrm>
+            <a:off x="4904509" y="3474720"/>
+            <a:ext cx="914400" cy="274320"/>
+          </a:xfrm>
+          <a:prstGeom prst="rect">
+            <a:avLst/>
+          </a:prstGeom>
+          <a:noFill/>
+        </p:spPr>
+        <p:txBody>
+          <a:bodyPr wrap="square" lIns="0" rIns="0" tIns="0" bIns="0">
+            <a:spAutoFit/>
+          </a:bodyPr>
+          <a:lstStyle/>
+          <a:p>
+            <a:pPr algn="l">
+              <a:spcAft>
+                <a:spcPts val="400"/>
+              </a:spcAft>
+            </a:pPr>
+            <a:r>
+              <a:rPr sz="1100" b="1" i="0">
+                <a:solidFill>
+                  <a:srgbClr val="B43C2E"/>
+                </a:solidFill>
+                <a:latin typeface="Yu Gothic"/>
+                <a:ea typeface="Yu Gothic"/>
+                <a:cs typeface="Yu Gothic"/>
+              </a:rPr>
+              <a:t>-150</a:t>
+            </a:r>
+          </a:p>
+        </p:txBody>
+      </p:sp>
+      <p:sp>
+        <p:nvSpPr>
+          <p:cNvPr id="19" name="TextBox 18"/>
+          <p:cNvSpPr txBox="1"/>
+          <p:nvPr/>
+        </p:nvSpPr>
+        <p:spPr>
+          <a:xfrm>
+            <a:off x="6720840" y="3474720"/>
+            <a:ext cx="4023360" cy="512064"/>
+          </a:xfrm>
+          <a:prstGeom prst="rect">
+            <a:avLst/>
+          </a:prstGeom>
+          <a:noFill/>
+        </p:spPr>
+        <p:txBody>
+          <a:bodyPr wrap="square" lIns="0" rIns="0" tIns="0" bIns="0">
+            <a:spAutoFit/>
+          </a:bodyPr>
+          <a:lstStyle/>
+          <a:p>
+            <a:pPr algn="l">
+              <a:spcAft>
+                <a:spcPts val="400"/>
+              </a:spcAft>
+            </a:pPr>
+            <a:r>
+              <a:rPr sz="850" b="0" i="0">
+                <a:solidFill>
+                  <a:srgbClr val="1B1B26"/>
+                </a:solidFill>
+                <a:latin typeface="Yu Gothic"/>
+                <a:ea typeface="Yu Gothic"/>
+                <a:cs typeface="Yu Gothic"/>
+              </a:rPr>
+              <a:t>総務＋101・法務/人事/財務経理＋106の超過。コスト削減チームの第1案件</a:t>
+            </a:r>
+          </a:p>
+        </p:txBody>
+      </p:sp>
+      <p:sp>
+        <p:nvSpPr>
+          <p:cNvPr id="20" name="TextBox 19"/>
+          <p:cNvSpPr txBox="1"/>
+          <p:nvPr/>
+        </p:nvSpPr>
+        <p:spPr>
+          <a:xfrm>
+            <a:off x="10972800" y="3483863"/>
+            <a:ext cx="731520" cy="274320"/>
+          </a:xfrm>
+          <a:prstGeom prst="rect">
+            <a:avLst/>
+          </a:prstGeom>
+          <a:noFill/>
+        </p:spPr>
+        <p:txBody>
+          <a:bodyPr wrap="square" lIns="0" rIns="0" tIns="0" bIns="0">
+            <a:spAutoFit/>
+          </a:bodyPr>
+          <a:lstStyle/>
+          <a:p>
+            <a:pPr algn="l">
+              <a:spcAft>
+                <a:spcPts val="400"/>
+              </a:spcAft>
+            </a:pPr>
+            <a:r>
+              <a:rPr sz="950" b="1" i="0">
+                <a:solidFill>
+                  <a:srgbClr val="2563EB"/>
+                </a:solidFill>
+                <a:latin typeface="Yu Gothic"/>
+                <a:ea typeface="Yu Gothic"/>
+                <a:cs typeface="Yu Gothic"/>
+              </a:rPr>
+              <a:t>高橋</a:t>
+            </a:r>
+          </a:p>
+        </p:txBody>
+      </p:sp>
+      <p:sp>
+        <p:nvSpPr>
+          <p:cNvPr id="21" name="TextBox 20"/>
+          <p:cNvSpPr txBox="1"/>
+          <p:nvPr/>
+        </p:nvSpPr>
+        <p:spPr>
+          <a:xfrm>
+            <a:off x="502920" y="4251960"/>
+            <a:ext cx="2286000" cy="274320"/>
+          </a:xfrm>
+          <a:prstGeom prst="rect">
+            <a:avLst/>
+          </a:prstGeom>
+          <a:noFill/>
+        </p:spPr>
+        <p:txBody>
+          <a:bodyPr wrap="square" lIns="0" rIns="0" tIns="0" bIns="0">
+            <a:spAutoFit/>
+          </a:bodyPr>
+          <a:lstStyle/>
+          <a:p>
+            <a:pPr algn="l">
+              <a:spcAft>
+                <a:spcPts val="400"/>
+              </a:spcAft>
+            </a:pPr>
+            <a:r>
+              <a:rPr sz="1100" b="1" i="0">
+                <a:solidFill>
+                  <a:srgbClr val="1B1B26"/>
+                </a:solidFill>
+                <a:latin typeface="Yu Gothic"/>
+                <a:ea typeface="Yu Gothic"/>
+                <a:cs typeface="Yu Gothic"/>
+              </a:rPr>
+              <a:t>商品開発（カード）</a:t>
+            </a:r>
+          </a:p>
+        </p:txBody>
+      </p:sp>
+      <p:sp>
+        <p:nvSpPr>
+          <p:cNvPr id="22" name="Rounded Rectangle 21"/>
+          <p:cNvSpPr/>
+          <p:nvPr/>
+        </p:nvSpPr>
+        <p:spPr>
+          <a:xfrm>
+            <a:off x="2880360" y="4261104"/>
+            <a:ext cx="373657" cy="237744"/>
+          </a:xfrm>
+          <a:prstGeom prst="roundRect">
+            <a:avLst>
+              <a:gd name="adj" fmla="val 40000"/>
+            </a:avLst>
+          </a:prstGeom>
+          <a:solidFill>
+            <a:srgbClr val="B43C2E"/>
+          </a:solidFill>
+          <a:ln>
+            <a:noFill/>
+          </a:ln>
+          <a:effectLst/>
+        </p:spPr>
+        <p:style>
+          <a:lnRef idx="1">
+            <a:schemeClr val="accent1"/>
+          </a:lnRef>
+          <a:fillRef idx="3">
+            <a:schemeClr val="accent1"/>
+          </a:fillRef>
+          <a:effectRef idx="2">
+            <a:schemeClr val="accent1"/>
+          </a:effectRef>
+          <a:fontRef idx="minor">
+            <a:schemeClr val="lt1"/>
+          </a:fontRef>
+        </p:style>
+        <p:txBody>
+          <a:bodyPr rtlCol="0" anchor="ctr"/>
+          <a:lstStyle/>
+          <a:p>
+            <a:pPr algn="ctr"/>
+          </a:p>
+        </p:txBody>
+      </p:sp>
+      <p:sp>
+        <p:nvSpPr>
+          <p:cNvPr id="23" name="TextBox 22"/>
+          <p:cNvSpPr txBox="1"/>
+          <p:nvPr/>
+        </p:nvSpPr>
+        <p:spPr>
+          <a:xfrm>
+            <a:off x="3345457" y="4242816"/>
+            <a:ext cx="914400" cy="274320"/>
+          </a:xfrm>
+          <a:prstGeom prst="rect">
+            <a:avLst/>
+          </a:prstGeom>
+          <a:noFill/>
+        </p:spPr>
+        <p:txBody>
+          <a:bodyPr wrap="square" lIns="0" rIns="0" tIns="0" bIns="0">
+            <a:spAutoFit/>
+          </a:bodyPr>
+          <a:lstStyle/>
+          <a:p>
+            <a:pPr algn="l">
+              <a:spcAft>
+                <a:spcPts val="400"/>
+              </a:spcAft>
+            </a:pPr>
+            <a:r>
+              <a:rPr sz="1100" b="1" i="0">
+                <a:solidFill>
+                  <a:srgbClr val="B43C2E"/>
+                </a:solidFill>
+                <a:latin typeface="Yu Gothic"/>
+                <a:ea typeface="Yu Gothic"/>
+                <a:cs typeface="Yu Gothic"/>
+              </a:rPr>
+              <a:t>-29</a:t>
+            </a:r>
+          </a:p>
+        </p:txBody>
+      </p:sp>
+      <p:sp>
+        <p:nvSpPr>
+          <p:cNvPr id="24" name="TextBox 23"/>
+          <p:cNvSpPr txBox="1"/>
+          <p:nvPr/>
+        </p:nvSpPr>
+        <p:spPr>
+          <a:xfrm>
+            <a:off x="6720840" y="4242816"/>
+            <a:ext cx="4023360" cy="512064"/>
+          </a:xfrm>
+          <a:prstGeom prst="rect">
+            <a:avLst/>
+          </a:prstGeom>
+          <a:noFill/>
+        </p:spPr>
+        <p:txBody>
+          <a:bodyPr wrap="square" lIns="0" rIns="0" tIns="0" bIns="0">
+            <a:spAutoFit/>
+          </a:bodyPr>
+          <a:lstStyle/>
+          <a:p>
+            <a:pPr algn="l">
+              <a:spcAft>
+                <a:spcPts val="400"/>
+              </a:spcAft>
+            </a:pPr>
+            <a:r>
+              <a:rPr sz="850" b="0" i="0">
+                <a:solidFill>
+                  <a:srgbClr val="1B1B26"/>
+                </a:solidFill>
+                <a:latin typeface="Yu Gothic"/>
+                <a:ea typeface="Yu Gothic"/>
+                <a:cs typeface="Yu Gothic"/>
+              </a:rPr>
+              <a:t>9弾受注（8/17確定）が未反映。次回更新で反転見込み</a:t>
+            </a:r>
+          </a:p>
+        </p:txBody>
+      </p:sp>
+      <p:sp>
+        <p:nvSpPr>
+          <p:cNvPr id="25" name="TextBox 24"/>
+          <p:cNvSpPr txBox="1"/>
+          <p:nvPr/>
+        </p:nvSpPr>
+        <p:spPr>
+          <a:xfrm>
+            <a:off x="10972800" y="4251960"/>
+            <a:ext cx="731520" cy="274320"/>
+          </a:xfrm>
+          <a:prstGeom prst="rect">
+            <a:avLst/>
+          </a:prstGeom>
+          <a:noFill/>
+        </p:spPr>
+        <p:txBody>
+          <a:bodyPr wrap="square" lIns="0" rIns="0" tIns="0" bIns="0">
+            <a:spAutoFit/>
+          </a:bodyPr>
+          <a:lstStyle/>
+          <a:p>
+            <a:pPr algn="l">
+              <a:spcAft>
+                <a:spcPts val="400"/>
+              </a:spcAft>
+            </a:pPr>
+            <a:r>
+              <a:rPr sz="950" b="1" i="0">
+                <a:solidFill>
+                  <a:srgbClr val="2563EB"/>
+                </a:solidFill>
+                <a:latin typeface="Yu Gothic"/>
+                <a:ea typeface="Yu Gothic"/>
+                <a:cs typeface="Yu Gothic"/>
+              </a:rPr>
+              <a:t>山田</a:t>
+            </a:r>
+          </a:p>
+        </p:txBody>
+      </p:sp>
+      <p:sp>
+        <p:nvSpPr>
+          <p:cNvPr id="26" name="TextBox 25"/>
+          <p:cNvSpPr txBox="1"/>
+          <p:nvPr/>
+        </p:nvSpPr>
+        <p:spPr>
+          <a:xfrm>
+            <a:off x="502920" y="5020056"/>
+            <a:ext cx="2286000" cy="274320"/>
+          </a:xfrm>
+          <a:prstGeom prst="rect">
+            <a:avLst/>
+          </a:prstGeom>
+          <a:noFill/>
+        </p:spPr>
+        <p:txBody>
+          <a:bodyPr wrap="square" lIns="0" rIns="0" tIns="0" bIns="0">
+            <a:spAutoFit/>
+          </a:bodyPr>
+          <a:lstStyle/>
+          <a:p>
+            <a:pPr algn="l">
+              <a:spcAft>
+                <a:spcPts val="400"/>
+              </a:spcAft>
+            </a:pPr>
+            <a:r>
+              <a:rPr sz="1100" b="1" i="0">
+                <a:solidFill>
+                  <a:srgbClr val="1B1B26"/>
+                </a:solidFill>
+                <a:latin typeface="Yu Gothic"/>
+                <a:ea typeface="Yu Gothic"/>
+                <a:cs typeface="Yu Gothic"/>
+              </a:rPr>
+              <a:t>プラス側</a:t>
+            </a:r>
+          </a:p>
+        </p:txBody>
+      </p:sp>
+      <p:sp>
+        <p:nvSpPr>
+          <p:cNvPr id="27" name="Rounded Rectangle 26"/>
+          <p:cNvSpPr/>
+          <p:nvPr/>
+        </p:nvSpPr>
+        <p:spPr>
+          <a:xfrm>
+            <a:off x="2880360" y="5029200"/>
+            <a:ext cx="773083" cy="237744"/>
+          </a:xfrm>
+          <a:prstGeom prst="roundRect">
+            <a:avLst>
+              <a:gd name="adj" fmla="val 40000"/>
+            </a:avLst>
+          </a:prstGeom>
+          <a:solidFill>
+            <a:srgbClr val="2563EB"/>
+          </a:solidFill>
+          <a:ln>
+            <a:noFill/>
+          </a:ln>
+          <a:effectLst/>
+        </p:spPr>
+        <p:style>
+          <a:lnRef idx="1">
+            <a:schemeClr val="accent1"/>
+          </a:lnRef>
+          <a:fillRef idx="3">
+            <a:schemeClr val="accent1"/>
+          </a:fillRef>
+          <a:effectRef idx="2">
+            <a:schemeClr val="accent1"/>
+          </a:effectRef>
+          <a:fontRef idx="minor">
+            <a:schemeClr val="lt1"/>
+          </a:fontRef>
+        </p:style>
+        <p:txBody>
+          <a:bodyPr rtlCol="0" anchor="ctr"/>
+          <a:lstStyle/>
+          <a:p>
+            <a:pPr algn="ctr"/>
+          </a:p>
+        </p:txBody>
+      </p:sp>
+      <p:sp>
+        <p:nvSpPr>
+          <p:cNvPr id="28" name="TextBox 27"/>
+          <p:cNvSpPr txBox="1"/>
+          <p:nvPr/>
+        </p:nvSpPr>
+        <p:spPr>
+          <a:xfrm>
+            <a:off x="3744883" y="5010912"/>
+            <a:ext cx="914400" cy="274320"/>
+          </a:xfrm>
+          <a:prstGeom prst="rect">
+            <a:avLst/>
+          </a:prstGeom>
+          <a:noFill/>
+        </p:spPr>
+        <p:txBody>
+          <a:bodyPr wrap="square" lIns="0" rIns="0" tIns="0" bIns="0">
+            <a:spAutoFit/>
+          </a:bodyPr>
+          <a:lstStyle/>
+          <a:p>
+            <a:pPr algn="l">
+              <a:spcAft>
+                <a:spcPts val="400"/>
+              </a:spcAft>
+            </a:pPr>
+            <a:r>
+              <a:rPr sz="1100" b="1" i="0">
+                <a:solidFill>
+                  <a:srgbClr val="1E40AF"/>
+                </a:solidFill>
+                <a:latin typeface="Yu Gothic"/>
+                <a:ea typeface="Yu Gothic"/>
+                <a:cs typeface="Yu Gothic"/>
+              </a:rPr>
+              <a:t>+60</a:t>
+            </a:r>
+          </a:p>
+        </p:txBody>
+      </p:sp>
+      <p:sp>
+        <p:nvSpPr>
+          <p:cNvPr id="29" name="TextBox 28"/>
+          <p:cNvSpPr txBox="1"/>
+          <p:nvPr/>
+        </p:nvSpPr>
+        <p:spPr>
+          <a:xfrm>
+            <a:off x="6720840" y="5010912"/>
+            <a:ext cx="4023360" cy="512064"/>
+          </a:xfrm>
+          <a:prstGeom prst="rect">
+            <a:avLst/>
+          </a:prstGeom>
+          <a:noFill/>
+        </p:spPr>
+        <p:txBody>
+          <a:bodyPr wrap="square" lIns="0" rIns="0" tIns="0" bIns="0">
+            <a:spAutoFit/>
+          </a:bodyPr>
+          <a:lstStyle/>
+          <a:p>
+            <a:pPr algn="l">
+              <a:spcAft>
+                <a:spcPts val="400"/>
+              </a:spcAft>
+            </a:pPr>
+            <a:r>
+              <a:rPr sz="850" b="0" i="0">
+                <a:solidFill>
+                  <a:srgbClr val="1B1B26"/>
+                </a:solidFill>
+                <a:latin typeface="Yu Gothic"/>
+                <a:ea typeface="Yu Gothic"/>
+                <a:cs typeface="Yu Gothic"/>
+              </a:rPr>
+              <a:t>新規開拓＋23（海外＋33）・映像＋22・流通＋15。全部門が悪いわけではない</a:t>
+            </a:r>
+          </a:p>
+        </p:txBody>
+      </p:sp>
+      <p:sp>
+        <p:nvSpPr>
+          <p:cNvPr id="30" name="TextBox 29"/>
+          <p:cNvSpPr txBox="1"/>
+          <p:nvPr/>
+        </p:nvSpPr>
+        <p:spPr>
+          <a:xfrm>
+            <a:off x="10972800" y="5020056"/>
+            <a:ext cx="731520" cy="274320"/>
+          </a:xfrm>
+          <a:prstGeom prst="rect">
+            <a:avLst/>
+          </a:prstGeom>
+          <a:noFill/>
+        </p:spPr>
+        <p:txBody>
+          <a:bodyPr wrap="square" lIns="0" rIns="0" tIns="0" bIns="0">
+            <a:spAutoFit/>
+          </a:bodyPr>
+          <a:lstStyle/>
+          <a:p>
+            <a:pPr algn="l">
+              <a:spcAft>
+                <a:spcPts val="400"/>
+              </a:spcAft>
+            </a:pPr>
+            <a:r>
+              <a:rPr sz="950" b="1" i="0">
+                <a:solidFill>
+                  <a:srgbClr val="2563EB"/>
+                </a:solidFill>
+                <a:latin typeface="Yu Gothic"/>
+                <a:ea typeface="Yu Gothic"/>
+                <a:cs typeface="Yu Gothic"/>
+              </a:rPr>
+              <a:t>－</a:t>
+            </a:r>
+          </a:p>
+        </p:txBody>
+      </p:sp>
+      <p:sp>
+        <p:nvSpPr>
+          <p:cNvPr id="31" name="Rounded Rectangle 30"/>
+          <p:cNvSpPr/>
+          <p:nvPr/>
+        </p:nvSpPr>
+        <p:spPr>
+          <a:xfrm>
+            <a:off x="502920" y="5943600"/>
+            <a:ext cx="11183112" cy="566928"/>
+          </a:xfrm>
+          <a:prstGeom prst="roundRect">
+            <a:avLst>
+              <a:gd name="adj" fmla="val 10000"/>
+            </a:avLst>
+          </a:prstGeom>
+          <a:solidFill>
+            <a:srgbClr val="EAF1FE"/>
+          </a:solidFill>
+          <a:ln>
+            <a:noFill/>
+          </a:ln>
+          <a:effectLst/>
+        </p:spPr>
+        <p:style>
+          <a:lnRef idx="1">
+            <a:schemeClr val="accent1"/>
+          </a:lnRef>
+          <a:fillRef idx="3">
+            <a:schemeClr val="accent1"/>
+          </a:fillRef>
+          <a:effectRef idx="2">
+            <a:schemeClr val="accent1"/>
+          </a:effectRef>
+          <a:fontRef idx="minor">
+            <a:schemeClr val="lt1"/>
+          </a:fontRef>
+        </p:style>
+        <p:txBody>
+          <a:bodyPr rtlCol="0" anchor="ctr"/>
+          <a:lstStyle/>
+          <a:p>
+            <a:pPr algn="ctr"/>
+          </a:p>
+        </p:txBody>
+      </p:sp>
+      <p:sp>
+        <p:nvSpPr>
+          <p:cNvPr id="32" name="TextBox 31"/>
+          <p:cNvSpPr txBox="1"/>
+          <p:nvPr/>
+        </p:nvSpPr>
+        <p:spPr>
+          <a:xfrm>
+            <a:off x="777240" y="6053328"/>
+            <a:ext cx="10607040" cy="384048"/>
+          </a:xfrm>
+          <a:prstGeom prst="rect">
+            <a:avLst/>
+          </a:prstGeom>
+          <a:noFill/>
+        </p:spPr>
+        <p:txBody>
+          <a:bodyPr wrap="square" lIns="0" rIns="0" tIns="0" bIns="0">
+            <a:spAutoFit/>
+          </a:bodyPr>
+          <a:lstStyle/>
+          <a:p>
+            <a:pPr algn="l">
+              <a:spcAft>
+                <a:spcPts val="400"/>
+              </a:spcAft>
+            </a:pPr>
+            <a:r>
+              <a:rPr sz="1100" b="1" i="0">
+                <a:solidFill>
+                  <a:srgbClr val="1E40AF"/>
+                </a:solidFill>
+                <a:latin typeface="Yu Gothic"/>
+                <a:ea typeface="Yu Gothic"/>
+                <a:cs typeface="Yu Gothic"/>
+              </a:rPr>
+              <a:t>販管費の超過＋1.0億の最大要因は事業部門ではなく管理部門。前回会長ご指摘の「コストの緩み」と符合します</a:t>
+            </a:r>
+          </a:p>
+        </p:txBody>
+      </p:sp>
+      <p:sp>
+        <p:nvSpPr>
+          <p:cNvPr id="33" name="TextBox 32"/>
+          <p:cNvSpPr txBox="1"/>
+          <p:nvPr/>
+        </p:nvSpPr>
+        <p:spPr>
+          <a:xfrm>
+            <a:off x="502920" y="6510528"/>
+            <a:ext cx="8229600" cy="237744"/>
+          </a:xfrm>
+          <a:prstGeom prst="rect">
+            <a:avLst/>
+          </a:prstGeom>
+          <a:noFill/>
+        </p:spPr>
+        <p:txBody>
+          <a:bodyPr wrap="square" lIns="0" rIns="0" tIns="0" bIns="0">
+            <a:spAutoFit/>
+          </a:bodyPr>
+          <a:lstStyle/>
+          <a:p>
+            <a:pPr algn="l">
+              <a:spcAft>
+                <a:spcPts val="0"/>
+              </a:spcAft>
+            </a:pPr>
+            <a:r>
+              <a:rPr sz="800" b="0" i="0">
+                <a:solidFill>
+                  <a:srgbClr val="8A8F9C"/>
+                </a:solidFill>
+                <a:latin typeface="Yu Gothic"/>
+                <a:ea typeface="Yu Gothic"/>
+                <a:cs typeface="Yu Gothic"/>
+              </a:rPr>
+              <a:t>円谷プロダクション 営業改革｜社外秘</a:t>
+            </a:r>
+          </a:p>
+        </p:txBody>
+      </p:sp>
+      <p:sp>
+        <p:nvSpPr>
+          <p:cNvPr id="34" name="TextBox 33"/>
+          <p:cNvSpPr txBox="1"/>
+          <p:nvPr/>
+        </p:nvSpPr>
+        <p:spPr>
+          <a:xfrm>
+            <a:off x="11292840" y="6510528"/>
+            <a:ext cx="411480" cy="237744"/>
+          </a:xfrm>
+          <a:prstGeom prst="rect">
+            <a:avLst/>
+          </a:prstGeom>
+          <a:noFill/>
+        </p:spPr>
+        <p:txBody>
+          <a:bodyPr wrap="square" lIns="0" rIns="0" tIns="0" bIns="0">
+            <a:spAutoFit/>
+          </a:bodyPr>
+          <a:lstStyle/>
+          <a:p>
+            <a:pPr algn="r">
+              <a:spcAft>
+                <a:spcPts val="0"/>
+              </a:spcAft>
+            </a:pPr>
+            <a:r>
+              <a:rPr sz="900" b="0" i="0">
+                <a:solidFill>
+                  <a:srgbClr val="6B7280"/>
+                </a:solidFill>
+                <a:latin typeface="Yu Gothic"/>
+                <a:ea typeface="Yu Gothic"/>
+                <a:cs typeface="Yu Gothic"/>
+              </a:rPr>
+              <a:t>2</a:t>
+            </a:r>
+          </a:p>
+        </p:txBody>
+      </p:sp>
+    </p:spTree>
+  </p:cSld>
+  <p:clrMapOvr>
+    <a:masterClrMapping/>
+  </p:clrMapOvr>
+</p:sld>
+</file>
+
+<file path=ppt/slides/slide3.xml><?xml version="1.0" encoding="utf-8"?>
+<p:sld xmlns:a="http://schemas.openxmlformats.org/drawingml/2006/main" xmlns:p="http://schemas.openxmlformats.org/presentationml/2006/main" xmlns:r="http://schemas.openxmlformats.org/officeDocument/2006/relationships">
+  <p:cSld>
+    <p:spTree>
+      <p:nvGrpSpPr>
+        <p:cNvPr id="1" name=""/>
+        <p:cNvGrpSpPr/>
+        <p:nvPr/>
+      </p:nvGrpSpPr>
+      <p:grpSpPr/>
+      <p:sp>
+        <p:nvSpPr>
+          <p:cNvPr id="2" name="Rounded Rectangle 1"/>
+          <p:cNvSpPr/>
+          <p:nvPr/>
+        </p:nvSpPr>
+        <p:spPr>
+          <a:xfrm>
+            <a:off x="502920" y="274320"/>
+            <a:ext cx="2683763" cy="274320"/>
+          </a:xfrm>
+          <a:prstGeom prst="roundRect">
+            <a:avLst>
+              <a:gd name="adj" fmla="val 50000"/>
+            </a:avLst>
+          </a:prstGeom>
+          <a:solidFill>
+            <a:srgbClr val="EAF1FE"/>
+          </a:solidFill>
+          <a:ln>
+            <a:noFill/>
+          </a:ln>
+          <a:effectLst/>
+        </p:spPr>
+        <p:style>
+          <a:lnRef idx="1">
+            <a:schemeClr val="accent1"/>
+          </a:lnRef>
+          <a:fillRef idx="3">
+            <a:schemeClr val="accent1"/>
+          </a:fillRef>
+          <a:effectRef idx="2">
+            <a:schemeClr val="accent1"/>
+          </a:effectRef>
+          <a:fontRef idx="minor">
+            <a:schemeClr val="lt1"/>
+          </a:fontRef>
+        </p:style>
+        <p:txBody>
+          <a:bodyPr rtlCol="0" anchor="ctr" wrap="none" lIns="0" rIns="0" tIns="0" bIns="0"/>
+          <a:lstStyle/>
+          <a:p>
+            <a:pPr algn="ctr"/>
+            <a:r>
+              <a:rPr sz="900" b="1" i="0">
+                <a:solidFill>
+                  <a:srgbClr val="2563EB"/>
+                </a:solidFill>
+                <a:latin typeface="Yu Gothic"/>
+                <a:ea typeface="Yu Gothic"/>
+                <a:cs typeface="Yu Gothic"/>
+              </a:rPr>
+              <a:t>点検会議 2026-09-11｜業績の報告</a:t>
+            </a:r>
+          </a:p>
+        </p:txBody>
+      </p:sp>
+      <p:sp>
+        <p:nvSpPr>
+          <p:cNvPr id="3" name="TextBox 2"/>
+          <p:cNvSpPr txBox="1"/>
+          <p:nvPr/>
+        </p:nvSpPr>
+        <p:spPr>
+          <a:xfrm>
+            <a:off x="502920" y="566928"/>
+            <a:ext cx="11155680" cy="804672"/>
+          </a:xfrm>
+          <a:prstGeom prst="rect">
+            <a:avLst/>
+          </a:prstGeom>
+          <a:noFill/>
+        </p:spPr>
+        <p:txBody>
+          <a:bodyPr wrap="square" lIns="0" rIns="0" tIns="0" bIns="0">
+            <a:spAutoFit/>
+          </a:bodyPr>
+          <a:lstStyle/>
+          <a:p>
+            <a:pPr algn="l">
+              <a:spcAft>
+                <a:spcPts val="0"/>
+              </a:spcAft>
+            </a:pPr>
+            <a:r>
+              <a:rPr sz="1800" b="1" i="0">
+                <a:solidFill>
+                  <a:srgbClr val="1B1B26"/>
+                </a:solidFill>
+                <a:latin typeface="Yu Gothic"/>
+                <a:ea typeface="Yu Gothic"/>
+                <a:cs typeface="Yu Gothic"/>
+              </a:rPr>
+              <a:t>40億必達のアクション — 誰が・何を・いつまでに</a:t>
+            </a:r>
+          </a:p>
+        </p:txBody>
+      </p:sp>
+      <p:sp>
+        <p:nvSpPr>
+          <p:cNvPr id="4" name="Rectangle 3"/>
+          <p:cNvSpPr/>
+          <p:nvPr/>
+        </p:nvSpPr>
+        <p:spPr>
+          <a:xfrm>
+            <a:off x="502920" y="1335024"/>
+            <a:ext cx="11183112" cy="11430"/>
+          </a:xfrm>
+          <a:prstGeom prst="rect">
+            <a:avLst/>
+          </a:prstGeom>
+          <a:solidFill>
+            <a:srgbClr val="E5E7EB"/>
+          </a:solidFill>
+          <a:ln>
+            <a:noFill/>
+          </a:ln>
+          <a:effectLst/>
+        </p:spPr>
+        <p:style>
+          <a:lnRef idx="1">
+            <a:schemeClr val="accent1"/>
+          </a:lnRef>
+          <a:fillRef idx="3">
+            <a:schemeClr val="accent1"/>
+          </a:fillRef>
+          <a:effectRef idx="2">
+            <a:schemeClr val="accent1"/>
+          </a:effectRef>
+          <a:fontRef idx="minor">
+            <a:schemeClr val="lt1"/>
+          </a:fontRef>
+        </p:style>
+        <p:txBody>
+          <a:bodyPr rtlCol="0" anchor="ctr"/>
+          <a:lstStyle/>
+          <a:p>
+            <a:pPr algn="ctr"/>
+          </a:p>
+        </p:txBody>
+      </p:sp>
+      <p:sp>
+        <p:nvSpPr>
+          <p:cNvPr id="5" name="TextBox 4"/>
+          <p:cNvSpPr txBox="1"/>
+          <p:nvPr/>
+        </p:nvSpPr>
+        <p:spPr>
+          <a:xfrm>
+            <a:off x="502920" y="1481328"/>
+            <a:ext cx="11155680" cy="310896"/>
+          </a:xfrm>
+          <a:prstGeom prst="rect">
+            <a:avLst/>
+          </a:prstGeom>
+          <a:noFill/>
+        </p:spPr>
+        <p:txBody>
+          <a:bodyPr wrap="square" lIns="0" rIns="0" tIns="0" bIns="0">
+            <a:spAutoFit/>
+          </a:bodyPr>
+          <a:lstStyle/>
+          <a:p>
+            <a:pPr algn="l">
+              <a:spcAft>
+                <a:spcPts val="400"/>
+              </a:spcAft>
+            </a:pPr>
+            <a:r>
+              <a:rPr sz="1150" b="1" i="0">
+                <a:solidFill>
+                  <a:srgbClr val="2563EB"/>
+                </a:solidFill>
+                <a:latin typeface="Yu Gothic"/>
+                <a:ea typeface="Yu Gothic"/>
+                <a:cs typeface="Yu Gothic"/>
+              </a:rPr>
+              <a:t>挽回3本＋転換2本。すべて次回（10月）のこの場で結果を答え合わせします</a:t>
             </a:r>
           </a:p>
         </p:txBody>
@@ -4858,8 +6014,8 @@
         </p:nvSpPr>
         <p:spPr>
           <a:xfrm>
-            <a:off x="502920" y="1920240"/>
-            <a:ext cx="11183112" cy="1371600"/>
+            <a:off x="502920" y="1901952"/>
+            <a:ext cx="11183112" cy="804672"/>
           </a:xfrm>
           <a:prstGeom prst="roundRect">
             <a:avLst>
@@ -4900,311 +6056,14 @@
       </p:sp>
       <p:sp>
         <p:nvSpPr>
-          <p:cNvPr id="7" name="TextBox 6"/>
-          <p:cNvSpPr txBox="1"/>
-          <p:nvPr/>
-        </p:nvSpPr>
-        <p:spPr>
-          <a:xfrm>
-            <a:off x="777240" y="2029968"/>
-            <a:ext cx="10515600" cy="292608"/>
-          </a:xfrm>
-          <a:prstGeom prst="rect">
-            <a:avLst/>
-          </a:prstGeom>
-          <a:noFill/>
-        </p:spPr>
-        <p:txBody>
-          <a:bodyPr wrap="square" lIns="0" rIns="0" tIns="0" bIns="0">
-            <a:spAutoFit/>
-          </a:bodyPr>
-          <a:lstStyle/>
-          <a:p>
-            <a:pPr algn="l">
-              <a:spcAft>
-                <a:spcPts val="400"/>
-              </a:spcAft>
-            </a:pPr>
-            <a:r>
-              <a:rPr sz="1300" b="1" i="0">
-                <a:solidFill>
-                  <a:srgbClr val="1B1B26"/>
-                </a:solidFill>
-                <a:latin typeface="Yu Gothic"/>
-                <a:ea typeface="Yu Gothic"/>
-                <a:cs typeface="Yu Gothic"/>
-              </a:rPr>
-              <a:t>ライセンス ＋5億（社内7億）</a:t>
-            </a:r>
-          </a:p>
-        </p:txBody>
-      </p:sp>
-      <p:sp>
-        <p:nvSpPr>
-          <p:cNvPr id="8" name="Rounded Rectangle 7"/>
+          <p:cNvPr id="7" name="Rounded Rectangle 6"/>
           <p:cNvSpPr/>
           <p:nvPr/>
         </p:nvSpPr>
         <p:spPr>
           <a:xfrm>
-            <a:off x="822960" y="2395728"/>
-            <a:ext cx="310896" cy="219456"/>
-          </a:xfrm>
-          <a:prstGeom prst="roundRect">
-            <a:avLst>
-              <a:gd name="adj" fmla="val 30000"/>
-            </a:avLst>
-          </a:prstGeom>
-          <a:solidFill>
-            <a:srgbClr val="2563EB"/>
-          </a:solidFill>
-          <a:ln>
-            <a:noFill/>
-          </a:ln>
-          <a:effectLst/>
-        </p:spPr>
-        <p:style>
-          <a:lnRef idx="1">
-            <a:schemeClr val="accent1"/>
-          </a:lnRef>
-          <a:fillRef idx="3">
-            <a:schemeClr val="accent1"/>
-          </a:fillRef>
-          <a:effectRef idx="2">
-            <a:schemeClr val="accent1"/>
-          </a:effectRef>
-          <a:fontRef idx="minor">
-            <a:schemeClr val="lt1"/>
-          </a:fontRef>
-        </p:style>
-        <p:txBody>
-          <a:bodyPr rtlCol="0" anchor="ctr"/>
-          <a:lstStyle/>
-          <a:p>
-            <a:pPr algn="ctr"/>
-          </a:p>
-        </p:txBody>
-      </p:sp>
-      <p:sp>
-        <p:nvSpPr>
-          <p:cNvPr id="9" name="TextBox 8"/>
-          <p:cNvSpPr txBox="1"/>
-          <p:nvPr/>
-        </p:nvSpPr>
-        <p:spPr>
-          <a:xfrm>
-            <a:off x="822960" y="2418588"/>
-            <a:ext cx="310896" cy="182880"/>
-          </a:xfrm>
-          <a:prstGeom prst="rect">
-            <a:avLst/>
-          </a:prstGeom>
-          <a:noFill/>
-        </p:spPr>
-        <p:txBody>
-          <a:bodyPr wrap="square" lIns="0" rIns="0" tIns="0" bIns="0">
-            <a:spAutoFit/>
-          </a:bodyPr>
-          <a:lstStyle/>
-          <a:p>
-            <a:pPr algn="ctr">
-              <a:spcAft>
-                <a:spcPts val="400"/>
-              </a:spcAft>
-            </a:pPr>
-            <a:r>
-              <a:rPr sz="850" b="1" i="0">
-                <a:solidFill>
-                  <a:srgbClr val="FFFFFF"/>
-                </a:solidFill>
-                <a:latin typeface="Yu Gothic"/>
-                <a:ea typeface="Yu Gothic"/>
-                <a:cs typeface="Yu Gothic"/>
-              </a:rPr>
-              <a:t>青</a:t>
-            </a:r>
-          </a:p>
-        </p:txBody>
-      </p:sp>
-      <p:sp>
-        <p:nvSpPr>
-          <p:cNvPr id="10" name="TextBox 9"/>
-          <p:cNvSpPr txBox="1"/>
-          <p:nvPr/>
-        </p:nvSpPr>
-        <p:spPr>
-          <a:xfrm>
-            <a:off x="1261872" y="2391156"/>
-            <a:ext cx="10241280" cy="256032"/>
-          </a:xfrm>
-          <a:prstGeom prst="rect">
-            <a:avLst/>
-          </a:prstGeom>
-          <a:noFill/>
-        </p:spPr>
-        <p:txBody>
-          <a:bodyPr wrap="square" lIns="0" rIns="0" tIns="0" bIns="0">
-            <a:spAutoFit/>
-          </a:bodyPr>
-          <a:lstStyle/>
-          <a:p>
-            <a:pPr algn="l">
-              <a:spcAft>
-                <a:spcPts val="400"/>
-              </a:spcAft>
-            </a:pPr>
-            <a:r>
-              <a:rPr sz="1000" b="0" i="0">
-                <a:solidFill>
-                  <a:srgbClr val="1B1B26"/>
-                </a:solidFill>
-                <a:latin typeface="Yu Gothic"/>
-                <a:ea typeface="Yu Gothic"/>
-                <a:cs typeface="Yu Gothic"/>
-              </a:rPr>
-              <a:t>大型広告の新規・継続（4-7月実績で新規4社94百万の実勢）</a:t>
-            </a:r>
-          </a:p>
-        </p:txBody>
-      </p:sp>
-      <p:sp>
-        <p:nvSpPr>
-          <p:cNvPr id="11" name="Rounded Rectangle 10"/>
-          <p:cNvSpPr/>
-          <p:nvPr/>
-        </p:nvSpPr>
-        <p:spPr>
-          <a:xfrm>
-            <a:off x="822960" y="2679192"/>
-            <a:ext cx="310896" cy="219456"/>
-          </a:xfrm>
-          <a:prstGeom prst="roundRect">
-            <a:avLst>
-              <a:gd name="adj" fmla="val 30000"/>
-            </a:avLst>
-          </a:prstGeom>
-          <a:solidFill>
-            <a:srgbClr val="2563EB"/>
-          </a:solidFill>
-          <a:ln>
-            <a:noFill/>
-          </a:ln>
-          <a:effectLst/>
-        </p:spPr>
-        <p:style>
-          <a:lnRef idx="1">
-            <a:schemeClr val="accent1"/>
-          </a:lnRef>
-          <a:fillRef idx="3">
-            <a:schemeClr val="accent1"/>
-          </a:fillRef>
-          <a:effectRef idx="2">
-            <a:schemeClr val="accent1"/>
-          </a:effectRef>
-          <a:fontRef idx="minor">
-            <a:schemeClr val="lt1"/>
-          </a:fontRef>
-        </p:style>
-        <p:txBody>
-          <a:bodyPr rtlCol="0" anchor="ctr"/>
-          <a:lstStyle/>
-          <a:p>
-            <a:pPr algn="ctr"/>
-          </a:p>
-        </p:txBody>
-      </p:sp>
-      <p:sp>
-        <p:nvSpPr>
-          <p:cNvPr id="12" name="TextBox 11"/>
-          <p:cNvSpPr txBox="1"/>
-          <p:nvPr/>
-        </p:nvSpPr>
-        <p:spPr>
-          <a:xfrm>
-            <a:off x="822960" y="2702052"/>
-            <a:ext cx="310896" cy="182880"/>
-          </a:xfrm>
-          <a:prstGeom prst="rect">
-            <a:avLst/>
-          </a:prstGeom>
-          <a:noFill/>
-        </p:spPr>
-        <p:txBody>
-          <a:bodyPr wrap="square" lIns="0" rIns="0" tIns="0" bIns="0">
-            <a:spAutoFit/>
-          </a:bodyPr>
-          <a:lstStyle/>
-          <a:p>
-            <a:pPr algn="ctr">
-              <a:spcAft>
-                <a:spcPts val="400"/>
-              </a:spcAft>
-            </a:pPr>
-            <a:r>
-              <a:rPr sz="850" b="1" i="0">
-                <a:solidFill>
-                  <a:srgbClr val="FFFFFF"/>
-                </a:solidFill>
-                <a:latin typeface="Yu Gothic"/>
-                <a:ea typeface="Yu Gothic"/>
-                <a:cs typeface="Yu Gothic"/>
-              </a:rPr>
-              <a:t>青</a:t>
-            </a:r>
-          </a:p>
-        </p:txBody>
-      </p:sp>
-      <p:sp>
-        <p:nvSpPr>
-          <p:cNvPr id="13" name="TextBox 12"/>
-          <p:cNvSpPr txBox="1"/>
-          <p:nvPr/>
-        </p:nvSpPr>
-        <p:spPr>
-          <a:xfrm>
-            <a:off x="1261872" y="2674620"/>
-            <a:ext cx="10241280" cy="256032"/>
-          </a:xfrm>
-          <a:prstGeom prst="rect">
-            <a:avLst/>
-          </a:prstGeom>
-          <a:noFill/>
-        </p:spPr>
-        <p:txBody>
-          <a:bodyPr wrap="square" lIns="0" rIns="0" tIns="0" bIns="0">
-            <a:spAutoFit/>
-          </a:bodyPr>
-          <a:lstStyle/>
-          <a:p>
-            <a:pPr algn="l">
-              <a:spcAft>
-                <a:spcPts val="400"/>
-              </a:spcAft>
-            </a:pPr>
-            <a:r>
-              <a:rPr sz="1000" b="0" i="0">
-                <a:solidFill>
-                  <a:srgbClr val="1B1B26"/>
-                </a:solidFill>
-                <a:latin typeface="Yu Gothic"/>
-                <a:ea typeface="Yu Gothic"/>
-                <a:cs typeface="Yu Gothic"/>
-              </a:rPr>
-              <a:t>上位22社（売上の3分の2）のアップセル・四半期戦略MTG</a:t>
-            </a:r>
-          </a:p>
-        </p:txBody>
-      </p:sp>
-      <p:sp>
-        <p:nvSpPr>
-          <p:cNvPr id="14" name="Rounded Rectangle 13"/>
-          <p:cNvSpPr/>
-          <p:nvPr/>
-        </p:nvSpPr>
-        <p:spPr>
-          <a:xfrm>
-            <a:off x="822960" y="2962656"/>
-            <a:ext cx="310896" cy="219456"/>
+            <a:off x="731520" y="2121408"/>
+            <a:ext cx="868680" cy="329184"/>
           </a:xfrm>
           <a:prstGeom prst="roundRect">
             <a:avLst>
@@ -5243,14 +6102,14 @@
       </p:sp>
       <p:sp>
         <p:nvSpPr>
-          <p:cNvPr id="15" name="TextBox 14"/>
+          <p:cNvPr id="8" name="TextBox 7"/>
           <p:cNvSpPr txBox="1"/>
           <p:nvPr/>
         </p:nvSpPr>
         <p:spPr>
           <a:xfrm>
-            <a:off x="822960" y="2985516"/>
-            <a:ext cx="310896" cy="182880"/>
+            <a:off x="731520" y="2167128"/>
+            <a:ext cx="868680" cy="256032"/>
           </a:xfrm>
           <a:prstGeom prst="rect">
             <a:avLst/>
@@ -5269,7 +6128,7 @@
               </a:spcAft>
             </a:pPr>
             <a:r>
-              <a:rPr sz="850" b="1" i="0">
+              <a:rPr sz="1000" b="1" i="0">
                 <a:solidFill>
                   <a:srgbClr val="FFFFFF"/>
                 </a:solidFill>
@@ -5277,21 +6136,21 @@
                 <a:ea typeface="Yu Gothic"/>
                 <a:cs typeface="Yu Gothic"/>
               </a:rPr>
-              <a:t>赤</a:t>
-            </a:r>
-          </a:p>
-        </p:txBody>
-      </p:sp>
-      <p:sp>
-        <p:nvSpPr>
-          <p:cNvPr id="16" name="TextBox 15"/>
+              <a:t>挽回1</a:t>
+            </a:r>
+          </a:p>
+        </p:txBody>
+      </p:sp>
+      <p:sp>
+        <p:nvSpPr>
+          <p:cNvPr id="9" name="TextBox 8"/>
           <p:cNvSpPr txBox="1"/>
           <p:nvPr/>
         </p:nvSpPr>
         <p:spPr>
           <a:xfrm>
-            <a:off x="1261872" y="2958084"/>
-            <a:ext cx="10241280" cy="256032"/>
+            <a:off x="1783080" y="1993392"/>
+            <a:ext cx="6035040" cy="292608"/>
           </a:xfrm>
           <a:prstGeom prst="rect">
             <a:avLst/>
@@ -5310,7 +6169,7 @@
               </a:spcAft>
             </a:pPr>
             <a:r>
-              <a:rPr sz="1000" b="0" i="0">
+              <a:rPr sz="1250" b="1" i="0">
                 <a:solidFill>
                   <a:srgbClr val="1B1B26"/>
                 </a:solidFill>
@@ -5318,21 +6177,144 @@
                 <a:ea typeface="Yu Gothic"/>
                 <a:cs typeface="Yu Gothic"/>
               </a:rPr>
-              <a:t>トップ外交による大型案件（本日ターゲットをご相談）</a:t>
-            </a:r>
-          </a:p>
-        </p:txBody>
-      </p:sp>
-      <p:sp>
-        <p:nvSpPr>
-          <p:cNvPr id="17" name="Rounded Rectangle 16"/>
+              <a:t>ライブの後ズレ復元</a:t>
+            </a:r>
+          </a:p>
+        </p:txBody>
+      </p:sp>
+      <p:sp>
+        <p:nvSpPr>
+          <p:cNvPr id="10" name="TextBox 9"/>
+          <p:cNvSpPr txBox="1"/>
+          <p:nvPr/>
+        </p:nvSpPr>
+        <p:spPr>
+          <a:xfrm>
+            <a:off x="1783080" y="2322576"/>
+            <a:ext cx="6309360" cy="329184"/>
+          </a:xfrm>
+          <a:prstGeom prst="rect">
+            <a:avLst/>
+          </a:prstGeom>
+          <a:noFill/>
+        </p:spPr>
+        <p:txBody>
+          <a:bodyPr wrap="square" lIns="0" rIns="0" tIns="0" bIns="0">
+            <a:spAutoFit/>
+          </a:bodyPr>
+          <a:lstStyle/>
+          <a:p>
+            <a:pPr algn="l">
+              <a:spcAft>
+                <a:spcPts val="400"/>
+              </a:spcAft>
+            </a:pPr>
+            <a:r>
+              <a:rPr sz="900" b="0" i="0">
+                <a:solidFill>
+                  <a:srgbClr val="1B1B26"/>
+                </a:solidFill>
+                <a:latin typeface="Yu Gothic"/>
+                <a:ea typeface="Yu Gothic"/>
+                <a:cs typeface="Yu Gothic"/>
+              </a:rPr>
+              <a:t>計上時期の確定と通期での戻り額を確定。戻らない分は代替積み上げ</a:t>
+            </a:r>
+          </a:p>
+        </p:txBody>
+      </p:sp>
+      <p:sp>
+        <p:nvSpPr>
+          <p:cNvPr id="11" name="TextBox 10"/>
+          <p:cNvSpPr txBox="1"/>
+          <p:nvPr/>
+        </p:nvSpPr>
+        <p:spPr>
+          <a:xfrm>
+            <a:off x="8275320" y="2048256"/>
+            <a:ext cx="1554480" cy="292608"/>
+          </a:xfrm>
+          <a:prstGeom prst="rect">
+            <a:avLst/>
+          </a:prstGeom>
+          <a:noFill/>
+        </p:spPr>
+        <p:txBody>
+          <a:bodyPr wrap="square" lIns="0" rIns="0" tIns="0" bIns="0">
+            <a:spAutoFit/>
+          </a:bodyPr>
+          <a:lstStyle/>
+          <a:p>
+            <a:pPr algn="l">
+              <a:spcAft>
+                <a:spcPts val="400"/>
+              </a:spcAft>
+            </a:pPr>
+            <a:r>
+              <a:rPr sz="1050" b="1" i="0">
+                <a:solidFill>
+                  <a:srgbClr val="2563EB"/>
+                </a:solidFill>
+                <a:latin typeface="Yu Gothic"/>
+                <a:ea typeface="Yu Gothic"/>
+                <a:cs typeface="Yu Gothic"/>
+              </a:rPr>
+              <a:t>南谷・菅野</a:t>
+            </a:r>
+          </a:p>
+        </p:txBody>
+      </p:sp>
+      <p:sp>
+        <p:nvSpPr>
+          <p:cNvPr id="12" name="TextBox 11"/>
+          <p:cNvSpPr txBox="1"/>
+          <p:nvPr/>
+        </p:nvSpPr>
+        <p:spPr>
+          <a:xfrm>
+            <a:off x="9829800" y="2048256"/>
+            <a:ext cx="1828800" cy="457200"/>
+          </a:xfrm>
+          <a:prstGeom prst="rect">
+            <a:avLst/>
+          </a:prstGeom>
+          <a:noFill/>
+        </p:spPr>
+        <p:txBody>
+          <a:bodyPr wrap="square" lIns="0" rIns="0" tIns="0" bIns="0">
+            <a:spAutoFit/>
+          </a:bodyPr>
+          <a:lstStyle/>
+          <a:p>
+            <a:pPr algn="l">
+              <a:spcAft>
+                <a:spcPts val="400"/>
+              </a:spcAft>
+            </a:pPr>
+            <a:r>
+              <a:rPr sz="950" b="0" i="0">
+                <a:solidFill>
+                  <a:srgbClr val="6B7280"/>
+                </a:solidFill>
+                <a:latin typeface="Yu Gothic"/>
+                <a:ea typeface="Yu Gothic"/>
+                <a:cs typeface="Yu Gothic"/>
+              </a:rPr>
+              <a:t>9月分科会→10月報告</a:t>
+            </a:r>
+          </a:p>
+        </p:txBody>
+      </p:sp>
+      <p:sp>
+        <p:nvSpPr>
+          <p:cNvPr id="13" name="Rounded Rectangle 12"/>
           <p:cNvSpPr/>
           <p:nvPr/>
         </p:nvSpPr>
         <p:spPr>
           <a:xfrm>
-            <a:off x="502920" y="3419856"/>
-            <a:ext cx="11183112" cy="1371600"/>
+            <a:off x="502920" y="2807208"/>
+            <a:ext cx="11183112" cy="804672"/>
           </a:xfrm>
           <a:prstGeom prst="roundRect">
             <a:avLst>
@@ -5373,311 +6355,14 @@
       </p:sp>
       <p:sp>
         <p:nvSpPr>
-          <p:cNvPr id="18" name="TextBox 17"/>
-          <p:cNvSpPr txBox="1"/>
-          <p:nvPr/>
-        </p:nvSpPr>
-        <p:spPr>
-          <a:xfrm>
-            <a:off x="777240" y="3529584"/>
-            <a:ext cx="10515600" cy="292608"/>
-          </a:xfrm>
-          <a:prstGeom prst="rect">
-            <a:avLst/>
-          </a:prstGeom>
-          <a:noFill/>
-        </p:spPr>
-        <p:txBody>
-          <a:bodyPr wrap="square" lIns="0" rIns="0" tIns="0" bIns="0">
-            <a:spAutoFit/>
-          </a:bodyPr>
-          <a:lstStyle/>
-          <a:p>
-            <a:pPr algn="l">
-              <a:spcAft>
-                <a:spcPts val="400"/>
-              </a:spcAft>
-            </a:pPr>
-            <a:r>
-              <a:rPr sz="1300" b="1" i="0">
-                <a:solidFill>
-                  <a:srgbClr val="1B1B26"/>
-                </a:solidFill>
-                <a:latin typeface="Yu Gothic"/>
-                <a:ea typeface="Yu Gothic"/>
-                <a:cs typeface="Yu Gothic"/>
-              </a:rPr>
-              <a:t>商品 ＋5億（社内6億）</a:t>
-            </a:r>
-          </a:p>
-        </p:txBody>
-      </p:sp>
-      <p:sp>
-        <p:nvSpPr>
-          <p:cNvPr id="19" name="Rounded Rectangle 18"/>
+          <p:cNvPr id="14" name="Rounded Rectangle 13"/>
           <p:cNvSpPr/>
           <p:nvPr/>
         </p:nvSpPr>
         <p:spPr>
           <a:xfrm>
-            <a:off x="822960" y="3895344"/>
-            <a:ext cx="310896" cy="219456"/>
-          </a:xfrm>
-          <a:prstGeom prst="roundRect">
-            <a:avLst>
-              <a:gd name="adj" fmla="val 30000"/>
-            </a:avLst>
-          </a:prstGeom>
-          <a:solidFill>
-            <a:srgbClr val="1B1B26"/>
-          </a:solidFill>
-          <a:ln>
-            <a:noFill/>
-          </a:ln>
-          <a:effectLst/>
-        </p:spPr>
-        <p:style>
-          <a:lnRef idx="1">
-            <a:schemeClr val="accent1"/>
-          </a:lnRef>
-          <a:fillRef idx="3">
-            <a:schemeClr val="accent1"/>
-          </a:fillRef>
-          <a:effectRef idx="2">
-            <a:schemeClr val="accent1"/>
-          </a:effectRef>
-          <a:fontRef idx="minor">
-            <a:schemeClr val="lt1"/>
-          </a:fontRef>
-        </p:style>
-        <p:txBody>
-          <a:bodyPr rtlCol="0" anchor="ctr"/>
-          <a:lstStyle/>
-          <a:p>
-            <a:pPr algn="ctr"/>
-          </a:p>
-        </p:txBody>
-      </p:sp>
-      <p:sp>
-        <p:nvSpPr>
-          <p:cNvPr id="20" name="TextBox 19"/>
-          <p:cNvSpPr txBox="1"/>
-          <p:nvPr/>
-        </p:nvSpPr>
-        <p:spPr>
-          <a:xfrm>
-            <a:off x="822960" y="3918204"/>
-            <a:ext cx="310896" cy="182880"/>
-          </a:xfrm>
-          <a:prstGeom prst="rect">
-            <a:avLst/>
-          </a:prstGeom>
-          <a:noFill/>
-        </p:spPr>
-        <p:txBody>
-          <a:bodyPr wrap="square" lIns="0" rIns="0" tIns="0" bIns="0">
-            <a:spAutoFit/>
-          </a:bodyPr>
-          <a:lstStyle/>
-          <a:p>
-            <a:pPr algn="ctr">
-              <a:spcAft>
-                <a:spcPts val="400"/>
-              </a:spcAft>
-            </a:pPr>
-            <a:r>
-              <a:rPr sz="850" b="1" i="0">
-                <a:solidFill>
-                  <a:srgbClr val="FFFFFF"/>
-                </a:solidFill>
-                <a:latin typeface="Yu Gothic"/>
-                <a:ea typeface="Yu Gothic"/>
-                <a:cs typeface="Yu Gothic"/>
-              </a:rPr>
-              <a:t>黒</a:t>
-            </a:r>
-          </a:p>
-        </p:txBody>
-      </p:sp>
-      <p:sp>
-        <p:nvSpPr>
-          <p:cNvPr id="21" name="TextBox 20"/>
-          <p:cNvSpPr txBox="1"/>
-          <p:nvPr/>
-        </p:nvSpPr>
-        <p:spPr>
-          <a:xfrm>
-            <a:off x="1261872" y="3890772"/>
-            <a:ext cx="10241280" cy="256032"/>
-          </a:xfrm>
-          <a:prstGeom prst="rect">
-            <a:avLst/>
-          </a:prstGeom>
-          <a:noFill/>
-        </p:spPr>
-        <p:txBody>
-          <a:bodyPr wrap="square" lIns="0" rIns="0" tIns="0" bIns="0">
-            <a:spAutoFit/>
-          </a:bodyPr>
-          <a:lstStyle/>
-          <a:p>
-            <a:pPr algn="l">
-              <a:spcAft>
-                <a:spcPts val="400"/>
-              </a:spcAft>
-            </a:pPr>
-            <a:r>
-              <a:rPr sz="1000" b="0" i="0">
-                <a:solidFill>
-                  <a:srgbClr val="1B1B26"/>
-                </a:solidFill>
-                <a:latin typeface="Yu Gothic"/>
-                <a:ea typeface="Yu Gothic"/>
-                <a:cs typeface="Yu Gothic"/>
-              </a:rPr>
-              <a:t>カード9弾受注確定分（8/17確定・単弾で営業利益＋0.3億水準）</a:t>
-            </a:r>
-          </a:p>
-        </p:txBody>
-      </p:sp>
-      <p:sp>
-        <p:nvSpPr>
-          <p:cNvPr id="22" name="Rounded Rectangle 21"/>
-          <p:cNvSpPr/>
-          <p:nvPr/>
-        </p:nvSpPr>
-        <p:spPr>
-          <a:xfrm>
-            <a:off x="822960" y="4178807"/>
-            <a:ext cx="310896" cy="219456"/>
-          </a:xfrm>
-          <a:prstGeom prst="roundRect">
-            <a:avLst>
-              <a:gd name="adj" fmla="val 30000"/>
-            </a:avLst>
-          </a:prstGeom>
-          <a:solidFill>
-            <a:srgbClr val="2563EB"/>
-          </a:solidFill>
-          <a:ln>
-            <a:noFill/>
-          </a:ln>
-          <a:effectLst/>
-        </p:spPr>
-        <p:style>
-          <a:lnRef idx="1">
-            <a:schemeClr val="accent1"/>
-          </a:lnRef>
-          <a:fillRef idx="3">
-            <a:schemeClr val="accent1"/>
-          </a:fillRef>
-          <a:effectRef idx="2">
-            <a:schemeClr val="accent1"/>
-          </a:effectRef>
-          <a:fontRef idx="minor">
-            <a:schemeClr val="lt1"/>
-          </a:fontRef>
-        </p:style>
-        <p:txBody>
-          <a:bodyPr rtlCol="0" anchor="ctr"/>
-          <a:lstStyle/>
-          <a:p>
-            <a:pPr algn="ctr"/>
-          </a:p>
-        </p:txBody>
-      </p:sp>
-      <p:sp>
-        <p:nvSpPr>
-          <p:cNvPr id="23" name="TextBox 22"/>
-          <p:cNvSpPr txBox="1"/>
-          <p:nvPr/>
-        </p:nvSpPr>
-        <p:spPr>
-          <a:xfrm>
-            <a:off x="822960" y="4201668"/>
-            <a:ext cx="310896" cy="182880"/>
-          </a:xfrm>
-          <a:prstGeom prst="rect">
-            <a:avLst/>
-          </a:prstGeom>
-          <a:noFill/>
-        </p:spPr>
-        <p:txBody>
-          <a:bodyPr wrap="square" lIns="0" rIns="0" tIns="0" bIns="0">
-            <a:spAutoFit/>
-          </a:bodyPr>
-          <a:lstStyle/>
-          <a:p>
-            <a:pPr algn="ctr">
-              <a:spcAft>
-                <a:spcPts val="400"/>
-              </a:spcAft>
-            </a:pPr>
-            <a:r>
-              <a:rPr sz="850" b="1" i="0">
-                <a:solidFill>
-                  <a:srgbClr val="FFFFFF"/>
-                </a:solidFill>
-                <a:latin typeface="Yu Gothic"/>
-                <a:ea typeface="Yu Gothic"/>
-                <a:cs typeface="Yu Gothic"/>
-              </a:rPr>
-              <a:t>青</a:t>
-            </a:r>
-          </a:p>
-        </p:txBody>
-      </p:sp>
-      <p:sp>
-        <p:nvSpPr>
-          <p:cNvPr id="24" name="TextBox 23"/>
-          <p:cNvSpPr txBox="1"/>
-          <p:nvPr/>
-        </p:nvSpPr>
-        <p:spPr>
-          <a:xfrm>
-            <a:off x="1261872" y="4174235"/>
-            <a:ext cx="10241280" cy="256032"/>
-          </a:xfrm>
-          <a:prstGeom prst="rect">
-            <a:avLst/>
-          </a:prstGeom>
-          <a:noFill/>
-        </p:spPr>
-        <p:txBody>
-          <a:bodyPr wrap="square" lIns="0" rIns="0" tIns="0" bIns="0">
-            <a:spAutoFit/>
-          </a:bodyPr>
-          <a:lstStyle/>
-          <a:p>
-            <a:pPr algn="l">
-              <a:spcAft>
-                <a:spcPts val="400"/>
-              </a:spcAft>
-            </a:pPr>
-            <a:r>
-              <a:rPr sz="1000" b="0" i="0">
-                <a:solidFill>
-                  <a:srgbClr val="1B1B26"/>
-                </a:solidFill>
-                <a:latin typeface="Yu Gothic"/>
-                <a:ea typeface="Yu Gothic"/>
-                <a:cs typeface="Yu Gothic"/>
-              </a:rPr>
-              <a:t>ウルトラマート（日販100万円ライン）・EC受注前年比2倍</a:t>
-            </a:r>
-          </a:p>
-        </p:txBody>
-      </p:sp>
-      <p:sp>
-        <p:nvSpPr>
-          <p:cNvPr id="25" name="Rounded Rectangle 24"/>
-          <p:cNvSpPr/>
-          <p:nvPr/>
-        </p:nvSpPr>
-        <p:spPr>
-          <a:xfrm>
-            <a:off x="822960" y="4462271"/>
-            <a:ext cx="310896" cy="219456"/>
+            <a:off x="731520" y="3026664"/>
+            <a:ext cx="868680" cy="329184"/>
           </a:xfrm>
           <a:prstGeom prst="roundRect">
             <a:avLst>
@@ -5716,14 +6401,14 @@
       </p:sp>
       <p:sp>
         <p:nvSpPr>
-          <p:cNvPr id="26" name="TextBox 25"/>
+          <p:cNvPr id="15" name="TextBox 14"/>
           <p:cNvSpPr txBox="1"/>
           <p:nvPr/>
         </p:nvSpPr>
         <p:spPr>
           <a:xfrm>
-            <a:off x="822960" y="4485131"/>
-            <a:ext cx="310896" cy="182880"/>
+            <a:off x="731520" y="3072384"/>
+            <a:ext cx="868680" cy="256032"/>
           </a:xfrm>
           <a:prstGeom prst="rect">
             <a:avLst/>
@@ -5742,7 +6427,7 @@
               </a:spcAft>
             </a:pPr>
             <a:r>
-              <a:rPr sz="850" b="1" i="0">
+              <a:rPr sz="1000" b="1" i="0">
                 <a:solidFill>
                   <a:srgbClr val="FFFFFF"/>
                 </a:solidFill>
@@ -5750,21 +6435,21 @@
                 <a:ea typeface="Yu Gothic"/>
                 <a:cs typeface="Yu Gothic"/>
               </a:rPr>
-              <a:t>赤</a:t>
-            </a:r>
-          </a:p>
-        </p:txBody>
-      </p:sp>
-      <p:sp>
-        <p:nvSpPr>
-          <p:cNvPr id="27" name="TextBox 26"/>
+              <a:t>挽回2</a:t>
+            </a:r>
+          </a:p>
+        </p:txBody>
+      </p:sp>
+      <p:sp>
+        <p:nvSpPr>
+          <p:cNvPr id="16" name="TextBox 15"/>
           <p:cNvSpPr txBox="1"/>
           <p:nvPr/>
         </p:nvSpPr>
         <p:spPr>
           <a:xfrm>
-            <a:off x="1261872" y="4457699"/>
-            <a:ext cx="10241280" cy="256032"/>
+            <a:off x="1783080" y="2898648"/>
+            <a:ext cx="6035040" cy="292608"/>
           </a:xfrm>
           <a:prstGeom prst="rect">
             <a:avLst/>
@@ -5783,7 +6468,7 @@
               </a:spcAft>
             </a:pPr>
             <a:r>
-              <a:rPr sz="1000" b="0" i="0">
+              <a:rPr sz="1250" b="1" i="0">
                 <a:solidFill>
                   <a:srgbClr val="1B1B26"/>
                 </a:solidFill>
@@ -5791,21 +6476,144 @@
                 <a:ea typeface="Yu Gothic"/>
                 <a:cs typeface="Yu Gothic"/>
               </a:rPr>
-              <a:t>mofusand型の60周年横展開・フワヌイ追加発注</a:t>
-            </a:r>
-          </a:p>
-        </p:txBody>
-      </p:sp>
-      <p:sp>
-        <p:nvSpPr>
-          <p:cNvPr id="28" name="Rounded Rectangle 27"/>
+              <a:t>海外ディス・国内MDの立て直し</a:t>
+            </a:r>
+          </a:p>
+        </p:txBody>
+      </p:sp>
+      <p:sp>
+        <p:nvSpPr>
+          <p:cNvPr id="17" name="TextBox 16"/>
+          <p:cNvSpPr txBox="1"/>
+          <p:nvPr/>
+        </p:nvSpPr>
+        <p:spPr>
+          <a:xfrm>
+            <a:off x="1783080" y="3227832"/>
+            <a:ext cx="6309360" cy="329184"/>
+          </a:xfrm>
+          <a:prstGeom prst="rect">
+            <a:avLst/>
+          </a:prstGeom>
+          <a:noFill/>
+        </p:spPr>
+        <p:txBody>
+          <a:bodyPr wrap="square" lIns="0" rIns="0" tIns="0" bIns="0">
+            <a:spAutoFit/>
+          </a:bodyPr>
+          <a:lstStyle/>
+          <a:p>
+            <a:pPr algn="l">
+              <a:spcAft>
+                <a:spcPts val="400"/>
+              </a:spcAft>
+            </a:pPr>
+            <a:r>
+              <a:rPr sz="900" b="0" i="0">
+                <a:solidFill>
+                  <a:srgbClr val="1B1B26"/>
+                </a:solidFill>
+                <a:latin typeface="Yu Gothic"/>
+                <a:ea typeface="Yu Gothic"/>
+                <a:cs typeface="Yu Gothic"/>
+              </a:rPr>
+              <a:t>売上マイナス値の正体特定（返品・解約・計上）→復元プラン</a:t>
+            </a:r>
+          </a:p>
+        </p:txBody>
+      </p:sp>
+      <p:sp>
+        <p:nvSpPr>
+          <p:cNvPr id="18" name="TextBox 17"/>
+          <p:cNvSpPr txBox="1"/>
+          <p:nvPr/>
+        </p:nvSpPr>
+        <p:spPr>
+          <a:xfrm>
+            <a:off x="8275320" y="2953512"/>
+            <a:ext cx="1554480" cy="292608"/>
+          </a:xfrm>
+          <a:prstGeom prst="rect">
+            <a:avLst/>
+          </a:prstGeom>
+          <a:noFill/>
+        </p:spPr>
+        <p:txBody>
+          <a:bodyPr wrap="square" lIns="0" rIns="0" tIns="0" bIns="0">
+            <a:spAutoFit/>
+          </a:bodyPr>
+          <a:lstStyle/>
+          <a:p>
+            <a:pPr algn="l">
+              <a:spcAft>
+                <a:spcPts val="400"/>
+              </a:spcAft>
+            </a:pPr>
+            <a:r>
+              <a:rPr sz="1050" b="1" i="0">
+                <a:solidFill>
+                  <a:srgbClr val="2563EB"/>
+                </a:solidFill>
+                <a:latin typeface="Yu Gothic"/>
+                <a:ea typeface="Yu Gothic"/>
+                <a:cs typeface="Yu Gothic"/>
+              </a:rPr>
+              <a:t>南谷</a:t>
+            </a:r>
+          </a:p>
+        </p:txBody>
+      </p:sp>
+      <p:sp>
+        <p:nvSpPr>
+          <p:cNvPr id="19" name="TextBox 18"/>
+          <p:cNvSpPr txBox="1"/>
+          <p:nvPr/>
+        </p:nvSpPr>
+        <p:spPr>
+          <a:xfrm>
+            <a:off x="9829800" y="2953512"/>
+            <a:ext cx="1828800" cy="457200"/>
+          </a:xfrm>
+          <a:prstGeom prst="rect">
+            <a:avLst/>
+          </a:prstGeom>
+          <a:noFill/>
+        </p:spPr>
+        <p:txBody>
+          <a:bodyPr wrap="square" lIns="0" rIns="0" tIns="0" bIns="0">
+            <a:spAutoFit/>
+          </a:bodyPr>
+          <a:lstStyle/>
+          <a:p>
+            <a:pPr algn="l">
+              <a:spcAft>
+                <a:spcPts val="400"/>
+              </a:spcAft>
+            </a:pPr>
+            <a:r>
+              <a:rPr sz="950" b="0" i="0">
+                <a:solidFill>
+                  <a:srgbClr val="6B7280"/>
+                </a:solidFill>
+                <a:latin typeface="Yu Gothic"/>
+                <a:ea typeface="Yu Gothic"/>
+                <a:cs typeface="Yu Gothic"/>
+              </a:rPr>
+              <a:t>9月末</a:t>
+            </a:r>
+          </a:p>
+        </p:txBody>
+      </p:sp>
+      <p:sp>
+        <p:nvSpPr>
+          <p:cNvPr id="20" name="Rounded Rectangle 19"/>
           <p:cNvSpPr/>
           <p:nvPr/>
         </p:nvSpPr>
         <p:spPr>
           <a:xfrm>
-            <a:off x="502920" y="4919472"/>
-            <a:ext cx="11183112" cy="1371600"/>
+            <a:off x="502920" y="3712464"/>
+            <a:ext cx="11183112" cy="804672"/>
           </a:xfrm>
           <a:prstGeom prst="roundRect">
             <a:avLst>
@@ -5846,14 +6654,60 @@
       </p:sp>
       <p:sp>
         <p:nvSpPr>
-          <p:cNvPr id="29" name="TextBox 28"/>
+          <p:cNvPr id="21" name="Rounded Rectangle 20"/>
+          <p:cNvSpPr/>
+          <p:nvPr/>
+        </p:nvSpPr>
+        <p:spPr>
+          <a:xfrm>
+            <a:off x="731520" y="3931920"/>
+            <a:ext cx="868680" cy="329184"/>
+          </a:xfrm>
+          <a:prstGeom prst="roundRect">
+            <a:avLst>
+              <a:gd name="adj" fmla="val 30000"/>
+            </a:avLst>
+          </a:prstGeom>
+          <a:solidFill>
+            <a:srgbClr val="B43C2E"/>
+          </a:solidFill>
+          <a:ln>
+            <a:noFill/>
+          </a:ln>
+          <a:effectLst/>
+        </p:spPr>
+        <p:style>
+          <a:lnRef idx="1">
+            <a:schemeClr val="accent1"/>
+          </a:lnRef>
+          <a:fillRef idx="3">
+            <a:schemeClr val="accent1"/>
+          </a:fillRef>
+          <a:effectRef idx="2">
+            <a:schemeClr val="accent1"/>
+          </a:effectRef>
+          <a:fontRef idx="minor">
+            <a:schemeClr val="lt1"/>
+          </a:fontRef>
+        </p:style>
+        <p:txBody>
+          <a:bodyPr rtlCol="0" anchor="ctr"/>
+          <a:lstStyle/>
+          <a:p>
+            <a:pPr algn="ctr"/>
+          </a:p>
+        </p:txBody>
+      </p:sp>
+      <p:sp>
+        <p:nvSpPr>
+          <p:cNvPr id="22" name="TextBox 21"/>
           <p:cNvSpPr txBox="1"/>
           <p:nvPr/>
         </p:nvSpPr>
         <p:spPr>
           <a:xfrm>
-            <a:off x="777240" y="5029200"/>
-            <a:ext cx="10515600" cy="292608"/>
+            <a:off x="731520" y="3977640"/>
+            <a:ext cx="868680" cy="256032"/>
           </a:xfrm>
           <a:prstGeom prst="rect">
             <a:avLst/>
@@ -5866,13 +6720,54 @@
           </a:bodyPr>
           <a:lstStyle/>
           <a:p>
+            <a:pPr algn="ctr">
+              <a:spcAft>
+                <a:spcPts val="400"/>
+              </a:spcAft>
+            </a:pPr>
+            <a:r>
+              <a:rPr sz="1000" b="1" i="0">
+                <a:solidFill>
+                  <a:srgbClr val="FFFFFF"/>
+                </a:solidFill>
+                <a:latin typeface="Yu Gothic"/>
+                <a:ea typeface="Yu Gothic"/>
+                <a:cs typeface="Yu Gothic"/>
+              </a:rPr>
+              <a:t>挽回3</a:t>
+            </a:r>
+          </a:p>
+        </p:txBody>
+      </p:sp>
+      <p:sp>
+        <p:nvSpPr>
+          <p:cNvPr id="23" name="TextBox 22"/>
+          <p:cNvSpPr txBox="1"/>
+          <p:nvPr/>
+        </p:nvSpPr>
+        <p:spPr>
+          <a:xfrm>
+            <a:off x="1783080" y="3803904"/>
+            <a:ext cx="6035040" cy="292608"/>
+          </a:xfrm>
+          <a:prstGeom prst="rect">
+            <a:avLst/>
+          </a:prstGeom>
+          <a:noFill/>
+        </p:spPr>
+        <p:txBody>
+          <a:bodyPr wrap="square" lIns="0" rIns="0" tIns="0" bIns="0">
+            <a:spAutoFit/>
+          </a:bodyPr>
+          <a:lstStyle/>
+          <a:p>
             <a:pPr algn="l">
               <a:spcAft>
                 <a:spcPts val="400"/>
               </a:spcAft>
             </a:pPr>
             <a:r>
-              <a:rPr sz="1300" b="1" i="0">
+              <a:rPr sz="1250" b="1" i="0">
                 <a:solidFill>
                   <a:srgbClr val="1B1B26"/>
                 </a:solidFill>
@@ -5880,21 +6775,192 @@
                 <a:ea typeface="Yu Gothic"/>
                 <a:cs typeface="Yu Gothic"/>
               </a:rPr>
-              <a:t>中国 ＋5億（社内7億）</a:t>
-            </a:r>
-          </a:p>
-        </p:txBody>
-      </p:sp>
-      <p:sp>
-        <p:nvSpPr>
-          <p:cNvPr id="30" name="Rounded Rectangle 29"/>
+              <a:t>管理販管費＋1.5億の削減</a:t>
+            </a:r>
+          </a:p>
+        </p:txBody>
+      </p:sp>
+      <p:sp>
+        <p:nvSpPr>
+          <p:cNvPr id="24" name="TextBox 23"/>
+          <p:cNvSpPr txBox="1"/>
+          <p:nvPr/>
+        </p:nvSpPr>
+        <p:spPr>
+          <a:xfrm>
+            <a:off x="1783080" y="4133088"/>
+            <a:ext cx="6309360" cy="329184"/>
+          </a:xfrm>
+          <a:prstGeom prst="rect">
+            <a:avLst/>
+          </a:prstGeom>
+          <a:noFill/>
+        </p:spPr>
+        <p:txBody>
+          <a:bodyPr wrap="square" lIns="0" rIns="0" tIns="0" bIns="0">
+            <a:spAutoFit/>
+          </a:bodyPr>
+          <a:lstStyle/>
+          <a:p>
+            <a:pPr algn="l">
+              <a:spcAft>
+                <a:spcPts val="400"/>
+              </a:spcAft>
+            </a:pPr>
+            <a:r>
+              <a:rPr sz="900" b="0" i="0">
+                <a:solidFill>
+                  <a:srgbClr val="1B1B26"/>
+                </a:solidFill>
+                <a:latin typeface="Yu Gothic"/>
+                <a:ea typeface="Yu Gothic"/>
+                <a:cs typeface="Yu Gothic"/>
+              </a:rPr>
+              <a:t>総務・法務/人事/財務経理の超過分解→削減施策第1弾（本日別掲）</a:t>
+            </a:r>
+          </a:p>
+        </p:txBody>
+      </p:sp>
+      <p:sp>
+        <p:nvSpPr>
+          <p:cNvPr id="25" name="TextBox 24"/>
+          <p:cNvSpPr txBox="1"/>
+          <p:nvPr/>
+        </p:nvSpPr>
+        <p:spPr>
+          <a:xfrm>
+            <a:off x="8275320" y="3858768"/>
+            <a:ext cx="1554480" cy="292608"/>
+          </a:xfrm>
+          <a:prstGeom prst="rect">
+            <a:avLst/>
+          </a:prstGeom>
+          <a:noFill/>
+        </p:spPr>
+        <p:txBody>
+          <a:bodyPr wrap="square" lIns="0" rIns="0" tIns="0" bIns="0">
+            <a:spAutoFit/>
+          </a:bodyPr>
+          <a:lstStyle/>
+          <a:p>
+            <a:pPr algn="l">
+              <a:spcAft>
+                <a:spcPts val="400"/>
+              </a:spcAft>
+            </a:pPr>
+            <a:r>
+              <a:rPr sz="1050" b="1" i="0">
+                <a:solidFill>
+                  <a:srgbClr val="2563EB"/>
+                </a:solidFill>
+                <a:latin typeface="Yu Gothic"/>
+                <a:ea typeface="Yu Gothic"/>
+                <a:cs typeface="Yu Gothic"/>
+              </a:rPr>
+              <a:t>高橋</a:t>
+            </a:r>
+          </a:p>
+        </p:txBody>
+      </p:sp>
+      <p:sp>
+        <p:nvSpPr>
+          <p:cNvPr id="26" name="TextBox 25"/>
+          <p:cNvSpPr txBox="1"/>
+          <p:nvPr/>
+        </p:nvSpPr>
+        <p:spPr>
+          <a:xfrm>
+            <a:off x="9829800" y="3858768"/>
+            <a:ext cx="1828800" cy="457200"/>
+          </a:xfrm>
+          <a:prstGeom prst="rect">
+            <a:avLst/>
+          </a:prstGeom>
+          <a:noFill/>
+        </p:spPr>
+        <p:txBody>
+          <a:bodyPr wrap="square" lIns="0" rIns="0" tIns="0" bIns="0">
+            <a:spAutoFit/>
+          </a:bodyPr>
+          <a:lstStyle/>
+          <a:p>
+            <a:pPr algn="l">
+              <a:spcAft>
+                <a:spcPts val="400"/>
+              </a:spcAft>
+            </a:pPr>
+            <a:r>
+              <a:rPr sz="950" b="0" i="0">
+                <a:solidFill>
+                  <a:srgbClr val="6B7280"/>
+                </a:solidFill>
+                <a:latin typeface="Yu Gothic"/>
+                <a:ea typeface="Yu Gothic"/>
+                <a:cs typeface="Yu Gothic"/>
+              </a:rPr>
+              <a:t>本日目標承認→10月実行報告</a:t>
+            </a:r>
+          </a:p>
+        </p:txBody>
+      </p:sp>
+      <p:sp>
+        <p:nvSpPr>
+          <p:cNvPr id="27" name="Rounded Rectangle 26"/>
           <p:cNvSpPr/>
           <p:nvPr/>
         </p:nvSpPr>
         <p:spPr>
           <a:xfrm>
-            <a:off x="822960" y="5394959"/>
-            <a:ext cx="310896" cy="219456"/>
+            <a:off x="502920" y="4617720"/>
+            <a:ext cx="11183112" cy="804672"/>
+          </a:xfrm>
+          <a:prstGeom prst="roundRect">
+            <a:avLst>
+              <a:gd name="adj" fmla="val 10000"/>
+            </a:avLst>
+          </a:prstGeom>
+          <a:solidFill>
+            <a:srgbClr val="F6F8FB"/>
+          </a:solidFill>
+          <a:ln w="9525">
+            <a:solidFill>
+              <a:srgbClr val="E5E7EB"/>
+            </a:solidFill>
+          </a:ln>
+          <a:effectLst/>
+        </p:spPr>
+        <p:style>
+          <a:lnRef idx="1">
+            <a:schemeClr val="accent1"/>
+          </a:lnRef>
+          <a:fillRef idx="3">
+            <a:schemeClr val="accent1"/>
+          </a:fillRef>
+          <a:effectRef idx="2">
+            <a:schemeClr val="accent1"/>
+          </a:effectRef>
+          <a:fontRef idx="minor">
+            <a:schemeClr val="lt1"/>
+          </a:fontRef>
+        </p:style>
+        <p:txBody>
+          <a:bodyPr rtlCol="0" anchor="ctr"/>
+          <a:lstStyle/>
+          <a:p>
+            <a:pPr algn="ctr"/>
+          </a:p>
+        </p:txBody>
+      </p:sp>
+      <p:sp>
+        <p:nvSpPr>
+          <p:cNvPr id="28" name="Rounded Rectangle 27"/>
+          <p:cNvSpPr/>
+          <p:nvPr/>
+        </p:nvSpPr>
+        <p:spPr>
+          <a:xfrm>
+            <a:off x="731520" y="4837176"/>
+            <a:ext cx="868680" cy="329184"/>
           </a:xfrm>
           <a:prstGeom prst="roundRect">
             <a:avLst>
@@ -5933,14 +6999,96 @@
       </p:sp>
       <p:sp>
         <p:nvSpPr>
+          <p:cNvPr id="29" name="TextBox 28"/>
+          <p:cNvSpPr txBox="1"/>
+          <p:nvPr/>
+        </p:nvSpPr>
+        <p:spPr>
+          <a:xfrm>
+            <a:off x="731520" y="4882896"/>
+            <a:ext cx="868680" cy="256032"/>
+          </a:xfrm>
+          <a:prstGeom prst="rect">
+            <a:avLst/>
+          </a:prstGeom>
+          <a:noFill/>
+        </p:spPr>
+        <p:txBody>
+          <a:bodyPr wrap="square" lIns="0" rIns="0" tIns="0" bIns="0">
+            <a:spAutoFit/>
+          </a:bodyPr>
+          <a:lstStyle/>
+          <a:p>
+            <a:pPr algn="ctr">
+              <a:spcAft>
+                <a:spcPts val="400"/>
+              </a:spcAft>
+            </a:pPr>
+            <a:r>
+              <a:rPr sz="1000" b="1" i="0">
+                <a:solidFill>
+                  <a:srgbClr val="FFFFFF"/>
+                </a:solidFill>
+                <a:latin typeface="Yu Gothic"/>
+                <a:ea typeface="Yu Gothic"/>
+                <a:cs typeface="Yu Gothic"/>
+              </a:rPr>
+              <a:t>転換1</a:t>
+            </a:r>
+          </a:p>
+        </p:txBody>
+      </p:sp>
+      <p:sp>
+        <p:nvSpPr>
+          <p:cNvPr id="30" name="TextBox 29"/>
+          <p:cNvSpPr txBox="1"/>
+          <p:nvPr/>
+        </p:nvSpPr>
+        <p:spPr>
+          <a:xfrm>
+            <a:off x="1783080" y="4709160"/>
+            <a:ext cx="6035040" cy="292608"/>
+          </a:xfrm>
+          <a:prstGeom prst="rect">
+            <a:avLst/>
+          </a:prstGeom>
+          <a:noFill/>
+        </p:spPr>
+        <p:txBody>
+          <a:bodyPr wrap="square" lIns="0" rIns="0" tIns="0" bIns="0">
+            <a:spAutoFit/>
+          </a:bodyPr>
+          <a:lstStyle/>
+          <a:p>
+            <a:pPr algn="l">
+              <a:spcAft>
+                <a:spcPts val="400"/>
+              </a:spcAft>
+            </a:pPr>
+            <a:r>
+              <a:rPr sz="1250" b="1" i="0">
+                <a:solidFill>
+                  <a:srgbClr val="1B1B26"/>
+                </a:solidFill>
+                <a:latin typeface="Yu Gothic"/>
+                <a:ea typeface="Yu Gothic"/>
+                <a:cs typeface="Yu Gothic"/>
+              </a:rPr>
+              <a:t>カード9弾の見込反映</a:t>
+            </a:r>
+          </a:p>
+        </p:txBody>
+      </p:sp>
+      <p:sp>
+        <p:nvSpPr>
           <p:cNvPr id="31" name="TextBox 30"/>
           <p:cNvSpPr txBox="1"/>
           <p:nvPr/>
         </p:nvSpPr>
         <p:spPr>
           <a:xfrm>
-            <a:off x="822960" y="5417820"/>
-            <a:ext cx="310896" cy="182880"/>
+            <a:off x="1783080" y="5038344"/>
+            <a:ext cx="6309360" cy="329184"/>
           </a:xfrm>
           <a:prstGeom prst="rect">
             <a:avLst/>
@@ -5953,21 +7101,21 @@
           </a:bodyPr>
           <a:lstStyle/>
           <a:p>
-            <a:pPr algn="ctr">
+            <a:pPr algn="l">
               <a:spcAft>
                 <a:spcPts val="400"/>
               </a:spcAft>
             </a:pPr>
             <a:r>
-              <a:rPr sz="850" b="1" i="0">
-                <a:solidFill>
-                  <a:srgbClr val="FFFFFF"/>
-                </a:solidFill>
-                <a:latin typeface="Yu Gothic"/>
-                <a:ea typeface="Yu Gothic"/>
-                <a:cs typeface="Yu Gothic"/>
-              </a:rPr>
-              <a:t>青</a:t>
+              <a:rPr sz="900" b="0" i="0">
+                <a:solidFill>
+                  <a:srgbClr val="1B1B26"/>
+                </a:solidFill>
+                <a:latin typeface="Yu Gothic"/>
+                <a:ea typeface="Yu Gothic"/>
+                <a:cs typeface="Yu Gothic"/>
+              </a:rPr>
+              <a:t>8/17受注確定分を月次更新に反映（＋の初弾）</a:t>
             </a:r>
           </a:p>
         </p:txBody>
@@ -5980,8 +7128,8 @@
         </p:nvSpPr>
         <p:spPr>
           <a:xfrm>
-            <a:off x="1261872" y="5390388"/>
-            <a:ext cx="10241280" cy="256032"/>
+            <a:off x="8275320" y="4764024"/>
+            <a:ext cx="1554480" cy="292608"/>
           </a:xfrm>
           <a:prstGeom prst="rect">
             <a:avLst/>
@@ -6000,6 +7148,846 @@
               </a:spcAft>
             </a:pPr>
             <a:r>
+              <a:rPr sz="1050" b="1" i="0">
+                <a:solidFill>
+                  <a:srgbClr val="2563EB"/>
+                </a:solidFill>
+                <a:latin typeface="Yu Gothic"/>
+                <a:ea typeface="Yu Gothic"/>
+                <a:cs typeface="Yu Gothic"/>
+              </a:rPr>
+              <a:t>山田・柳沼</a:t>
+            </a:r>
+          </a:p>
+        </p:txBody>
+      </p:sp>
+      <p:sp>
+        <p:nvSpPr>
+          <p:cNvPr id="33" name="TextBox 32"/>
+          <p:cNvSpPr txBox="1"/>
+          <p:nvPr/>
+        </p:nvSpPr>
+        <p:spPr>
+          <a:xfrm>
+            <a:off x="9829800" y="4764024"/>
+            <a:ext cx="1828800" cy="457200"/>
+          </a:xfrm>
+          <a:prstGeom prst="rect">
+            <a:avLst/>
+          </a:prstGeom>
+          <a:noFill/>
+        </p:spPr>
+        <p:txBody>
+          <a:bodyPr wrap="square" lIns="0" rIns="0" tIns="0" bIns="0">
+            <a:spAutoFit/>
+          </a:bodyPr>
+          <a:lstStyle/>
+          <a:p>
+            <a:pPr algn="l">
+              <a:spcAft>
+                <a:spcPts val="400"/>
+              </a:spcAft>
+            </a:pPr>
+            <a:r>
+              <a:rPr sz="950" b="0" i="0">
+                <a:solidFill>
+                  <a:srgbClr val="6B7280"/>
+                </a:solidFill>
+                <a:latin typeface="Yu Gothic"/>
+                <a:ea typeface="Yu Gothic"/>
+                <a:cs typeface="Yu Gothic"/>
+              </a:rPr>
+              <a:t>9月月次</a:t>
+            </a:r>
+          </a:p>
+        </p:txBody>
+      </p:sp>
+      <p:sp>
+        <p:nvSpPr>
+          <p:cNvPr id="34" name="Rounded Rectangle 33"/>
+          <p:cNvSpPr/>
+          <p:nvPr/>
+        </p:nvSpPr>
+        <p:spPr>
+          <a:xfrm>
+            <a:off x="502920" y="5522976"/>
+            <a:ext cx="11183112" cy="804672"/>
+          </a:xfrm>
+          <a:prstGeom prst="roundRect">
+            <a:avLst>
+              <a:gd name="adj" fmla="val 10000"/>
+            </a:avLst>
+          </a:prstGeom>
+          <a:solidFill>
+            <a:srgbClr val="F6F8FB"/>
+          </a:solidFill>
+          <a:ln w="9525">
+            <a:solidFill>
+              <a:srgbClr val="E5E7EB"/>
+            </a:solidFill>
+          </a:ln>
+          <a:effectLst/>
+        </p:spPr>
+        <p:style>
+          <a:lnRef idx="1">
+            <a:schemeClr val="accent1"/>
+          </a:lnRef>
+          <a:fillRef idx="3">
+            <a:schemeClr val="accent1"/>
+          </a:fillRef>
+          <a:effectRef idx="2">
+            <a:schemeClr val="accent1"/>
+          </a:effectRef>
+          <a:fontRef idx="minor">
+            <a:schemeClr val="lt1"/>
+          </a:fontRef>
+        </p:style>
+        <p:txBody>
+          <a:bodyPr rtlCol="0" anchor="ctr"/>
+          <a:lstStyle/>
+          <a:p>
+            <a:pPr algn="ctr"/>
+          </a:p>
+        </p:txBody>
+      </p:sp>
+      <p:sp>
+        <p:nvSpPr>
+          <p:cNvPr id="35" name="Rounded Rectangle 34"/>
+          <p:cNvSpPr/>
+          <p:nvPr/>
+        </p:nvSpPr>
+        <p:spPr>
+          <a:xfrm>
+            <a:off x="731520" y="5742432"/>
+            <a:ext cx="868680" cy="329184"/>
+          </a:xfrm>
+          <a:prstGeom prst="roundRect">
+            <a:avLst>
+              <a:gd name="adj" fmla="val 30000"/>
+            </a:avLst>
+          </a:prstGeom>
+          <a:solidFill>
+            <a:srgbClr val="2563EB"/>
+          </a:solidFill>
+          <a:ln>
+            <a:noFill/>
+          </a:ln>
+          <a:effectLst/>
+        </p:spPr>
+        <p:style>
+          <a:lnRef idx="1">
+            <a:schemeClr val="accent1"/>
+          </a:lnRef>
+          <a:fillRef idx="3">
+            <a:schemeClr val="accent1"/>
+          </a:fillRef>
+          <a:effectRef idx="2">
+            <a:schemeClr val="accent1"/>
+          </a:effectRef>
+          <a:fontRef idx="minor">
+            <a:schemeClr val="lt1"/>
+          </a:fontRef>
+        </p:style>
+        <p:txBody>
+          <a:bodyPr rtlCol="0" anchor="ctr"/>
+          <a:lstStyle/>
+          <a:p>
+            <a:pPr algn="ctr"/>
+          </a:p>
+        </p:txBody>
+      </p:sp>
+      <p:sp>
+        <p:nvSpPr>
+          <p:cNvPr id="36" name="TextBox 35"/>
+          <p:cNvSpPr txBox="1"/>
+          <p:nvPr/>
+        </p:nvSpPr>
+        <p:spPr>
+          <a:xfrm>
+            <a:off x="731520" y="5788152"/>
+            <a:ext cx="868680" cy="256032"/>
+          </a:xfrm>
+          <a:prstGeom prst="rect">
+            <a:avLst/>
+          </a:prstGeom>
+          <a:noFill/>
+        </p:spPr>
+        <p:txBody>
+          <a:bodyPr wrap="square" lIns="0" rIns="0" tIns="0" bIns="0">
+            <a:spAutoFit/>
+          </a:bodyPr>
+          <a:lstStyle/>
+          <a:p>
+            <a:pPr algn="ctr">
+              <a:spcAft>
+                <a:spcPts val="400"/>
+              </a:spcAft>
+            </a:pPr>
+            <a:r>
+              <a:rPr sz="1000" b="1" i="0">
+                <a:solidFill>
+                  <a:srgbClr val="FFFFFF"/>
+                </a:solidFill>
+                <a:latin typeface="Yu Gothic"/>
+                <a:ea typeface="Yu Gothic"/>
+                <a:cs typeface="Yu Gothic"/>
+              </a:rPr>
+              <a:t>転換2</a:t>
+            </a:r>
+          </a:p>
+        </p:txBody>
+      </p:sp>
+      <p:sp>
+        <p:nvSpPr>
+          <p:cNvPr id="37" name="TextBox 36"/>
+          <p:cNvSpPr txBox="1"/>
+          <p:nvPr/>
+        </p:nvSpPr>
+        <p:spPr>
+          <a:xfrm>
+            <a:off x="1783080" y="5614416"/>
+            <a:ext cx="6035040" cy="292608"/>
+          </a:xfrm>
+          <a:prstGeom prst="rect">
+            <a:avLst/>
+          </a:prstGeom>
+          <a:noFill/>
+        </p:spPr>
+        <p:txBody>
+          <a:bodyPr wrap="square" lIns="0" rIns="0" tIns="0" bIns="0">
+            <a:spAutoFit/>
+          </a:bodyPr>
+          <a:lstStyle/>
+          <a:p>
+            <a:pPr algn="l">
+              <a:spcAft>
+                <a:spcPts val="400"/>
+              </a:spcAft>
+            </a:pPr>
+            <a:r>
+              <a:rPr sz="1250" b="1" i="0">
+                <a:solidFill>
+                  <a:srgbClr val="1B1B26"/>
+                </a:solidFill>
+                <a:latin typeface="Yu Gothic"/>
+                <a:ea typeface="Yu Gothic"/>
+                <a:cs typeface="Yu Gothic"/>
+              </a:rPr>
+              <a:t>アップサイドの赤→青転換</a:t>
+            </a:r>
+          </a:p>
+        </p:txBody>
+      </p:sp>
+      <p:sp>
+        <p:nvSpPr>
+          <p:cNvPr id="38" name="TextBox 37"/>
+          <p:cNvSpPr txBox="1"/>
+          <p:nvPr/>
+        </p:nvSpPr>
+        <p:spPr>
+          <a:xfrm>
+            <a:off x="1783080" y="5943600"/>
+            <a:ext cx="6309360" cy="329184"/>
+          </a:xfrm>
+          <a:prstGeom prst="rect">
+            <a:avLst/>
+          </a:prstGeom>
+          <a:noFill/>
+        </p:spPr>
+        <p:txBody>
+          <a:bodyPr wrap="square" lIns="0" rIns="0" tIns="0" bIns="0">
+            <a:spAutoFit/>
+          </a:bodyPr>
+          <a:lstStyle/>
+          <a:p>
+            <a:pPr algn="l">
+              <a:spcAft>
+                <a:spcPts val="400"/>
+              </a:spcAft>
+            </a:pPr>
+            <a:r>
+              <a:rPr sz="900" b="0" i="0">
+                <a:solidFill>
+                  <a:srgbClr val="1B1B26"/>
+                </a:solidFill>
+                <a:latin typeface="Yu Gothic"/>
+                <a:ea typeface="Yu Gothic"/>
+                <a:cs typeface="Yu Gothic"/>
+              </a:rPr>
+              <a:t>トップ外交ターゲット（本日ご相談）・上位22社の四半期MTG開始・MG改定</a:t>
+            </a:r>
+          </a:p>
+        </p:txBody>
+      </p:sp>
+      <p:sp>
+        <p:nvSpPr>
+          <p:cNvPr id="39" name="TextBox 38"/>
+          <p:cNvSpPr txBox="1"/>
+          <p:nvPr/>
+        </p:nvSpPr>
+        <p:spPr>
+          <a:xfrm>
+            <a:off x="8275320" y="5669280"/>
+            <a:ext cx="1554480" cy="292608"/>
+          </a:xfrm>
+          <a:prstGeom prst="rect">
+            <a:avLst/>
+          </a:prstGeom>
+          <a:noFill/>
+        </p:spPr>
+        <p:txBody>
+          <a:bodyPr wrap="square" lIns="0" rIns="0" tIns="0" bIns="0">
+            <a:spAutoFit/>
+          </a:bodyPr>
+          <a:lstStyle/>
+          <a:p>
+            <a:pPr algn="l">
+              <a:spcAft>
+                <a:spcPts val="400"/>
+              </a:spcAft>
+            </a:pPr>
+            <a:r>
+              <a:rPr sz="1050" b="1" i="0">
+                <a:solidFill>
+                  <a:srgbClr val="2563EB"/>
+                </a:solidFill>
+                <a:latin typeface="Yu Gothic"/>
+                <a:ea typeface="Yu Gothic"/>
+                <a:cs typeface="Yu Gothic"/>
+              </a:rPr>
+              <a:t>南谷・新谷</a:t>
+            </a:r>
+          </a:p>
+        </p:txBody>
+      </p:sp>
+      <p:sp>
+        <p:nvSpPr>
+          <p:cNvPr id="40" name="TextBox 39"/>
+          <p:cNvSpPr txBox="1"/>
+          <p:nvPr/>
+        </p:nvSpPr>
+        <p:spPr>
+          <a:xfrm>
+            <a:off x="9829800" y="5669280"/>
+            <a:ext cx="1828800" cy="457200"/>
+          </a:xfrm>
+          <a:prstGeom prst="rect">
+            <a:avLst/>
+          </a:prstGeom>
+          <a:noFill/>
+        </p:spPr>
+        <p:txBody>
+          <a:bodyPr wrap="square" lIns="0" rIns="0" tIns="0" bIns="0">
+            <a:spAutoFit/>
+          </a:bodyPr>
+          <a:lstStyle/>
+          <a:p>
+            <a:pPr algn="l">
+              <a:spcAft>
+                <a:spcPts val="400"/>
+              </a:spcAft>
+            </a:pPr>
+            <a:r>
+              <a:rPr sz="950" b="0" i="0">
+                <a:solidFill>
+                  <a:srgbClr val="6B7280"/>
+                </a:solidFill>
+                <a:latin typeface="Yu Gothic"/>
+                <a:ea typeface="Yu Gothic"/>
+                <a:cs typeface="Yu Gothic"/>
+              </a:rPr>
+              <a:t>毎月更新</a:t>
+            </a:r>
+          </a:p>
+        </p:txBody>
+      </p:sp>
+      <p:sp>
+        <p:nvSpPr>
+          <p:cNvPr id="41" name="TextBox 40"/>
+          <p:cNvSpPr txBox="1"/>
+          <p:nvPr/>
+        </p:nvSpPr>
+        <p:spPr>
+          <a:xfrm>
+            <a:off x="502920" y="6510528"/>
+            <a:ext cx="8229600" cy="237744"/>
+          </a:xfrm>
+          <a:prstGeom prst="rect">
+            <a:avLst/>
+          </a:prstGeom>
+          <a:noFill/>
+        </p:spPr>
+        <p:txBody>
+          <a:bodyPr wrap="square" lIns="0" rIns="0" tIns="0" bIns="0">
+            <a:spAutoFit/>
+          </a:bodyPr>
+          <a:lstStyle/>
+          <a:p>
+            <a:pPr algn="l">
+              <a:spcAft>
+                <a:spcPts val="0"/>
+              </a:spcAft>
+            </a:pPr>
+            <a:r>
+              <a:rPr sz="800" b="0" i="0">
+                <a:solidFill>
+                  <a:srgbClr val="8A8F9C"/>
+                </a:solidFill>
+                <a:latin typeface="Yu Gothic"/>
+                <a:ea typeface="Yu Gothic"/>
+                <a:cs typeface="Yu Gothic"/>
+              </a:rPr>
+              <a:t>円谷プロダクション 営業改革｜社外秘</a:t>
+            </a:r>
+          </a:p>
+        </p:txBody>
+      </p:sp>
+      <p:sp>
+        <p:nvSpPr>
+          <p:cNvPr id="42" name="TextBox 41"/>
+          <p:cNvSpPr txBox="1"/>
+          <p:nvPr/>
+        </p:nvSpPr>
+        <p:spPr>
+          <a:xfrm>
+            <a:off x="11292840" y="6510528"/>
+            <a:ext cx="411480" cy="237744"/>
+          </a:xfrm>
+          <a:prstGeom prst="rect">
+            <a:avLst/>
+          </a:prstGeom>
+          <a:noFill/>
+        </p:spPr>
+        <p:txBody>
+          <a:bodyPr wrap="square" lIns="0" rIns="0" tIns="0" bIns="0">
+            <a:spAutoFit/>
+          </a:bodyPr>
+          <a:lstStyle/>
+          <a:p>
+            <a:pPr algn="r">
+              <a:spcAft>
+                <a:spcPts val="0"/>
+              </a:spcAft>
+            </a:pPr>
+            <a:r>
+              <a:rPr sz="900" b="0" i="0">
+                <a:solidFill>
+                  <a:srgbClr val="6B7280"/>
+                </a:solidFill>
+                <a:latin typeface="Yu Gothic"/>
+                <a:ea typeface="Yu Gothic"/>
+                <a:cs typeface="Yu Gothic"/>
+              </a:rPr>
+              <a:t>3</a:t>
+            </a:r>
+          </a:p>
+        </p:txBody>
+      </p:sp>
+    </p:spTree>
+  </p:cSld>
+  <p:clrMapOvr>
+    <a:masterClrMapping/>
+  </p:clrMapOvr>
+</p:sld>
+</file>
+
+<file path=ppt/slides/slide4.xml><?xml version="1.0" encoding="utf-8"?>
+<p:sld xmlns:a="http://schemas.openxmlformats.org/drawingml/2006/main" xmlns:p="http://schemas.openxmlformats.org/presentationml/2006/main" xmlns:r="http://schemas.openxmlformats.org/officeDocument/2006/relationships">
+  <p:cSld>
+    <p:spTree>
+      <p:nvGrpSpPr>
+        <p:cNvPr id="1" name=""/>
+        <p:cNvGrpSpPr/>
+        <p:nvPr/>
+      </p:nvGrpSpPr>
+      <p:grpSpPr/>
+      <p:sp>
+        <p:nvSpPr>
+          <p:cNvPr id="2" name="Rounded Rectangle 1"/>
+          <p:cNvSpPr/>
+          <p:nvPr/>
+        </p:nvSpPr>
+        <p:spPr>
+          <a:xfrm>
+            <a:off x="502920" y="274320"/>
+            <a:ext cx="2683763" cy="274320"/>
+          </a:xfrm>
+          <a:prstGeom prst="roundRect">
+            <a:avLst>
+              <a:gd name="adj" fmla="val 50000"/>
+            </a:avLst>
+          </a:prstGeom>
+          <a:solidFill>
+            <a:srgbClr val="EAF1FE"/>
+          </a:solidFill>
+          <a:ln>
+            <a:noFill/>
+          </a:ln>
+          <a:effectLst/>
+        </p:spPr>
+        <p:style>
+          <a:lnRef idx="1">
+            <a:schemeClr val="accent1"/>
+          </a:lnRef>
+          <a:fillRef idx="3">
+            <a:schemeClr val="accent1"/>
+          </a:fillRef>
+          <a:effectRef idx="2">
+            <a:schemeClr val="accent1"/>
+          </a:effectRef>
+          <a:fontRef idx="minor">
+            <a:schemeClr val="lt1"/>
+          </a:fontRef>
+        </p:style>
+        <p:txBody>
+          <a:bodyPr rtlCol="0" anchor="ctr" wrap="none" lIns="0" rIns="0" tIns="0" bIns="0"/>
+          <a:lstStyle/>
+          <a:p>
+            <a:pPr algn="ctr"/>
+            <a:r>
+              <a:rPr sz="900" b="1" i="0">
+                <a:solidFill>
+                  <a:srgbClr val="2563EB"/>
+                </a:solidFill>
+                <a:latin typeface="Yu Gothic"/>
+                <a:ea typeface="Yu Gothic"/>
+                <a:cs typeface="Yu Gothic"/>
+              </a:rPr>
+              <a:t>点検会議 2026-09-11｜業績の報告</a:t>
+            </a:r>
+          </a:p>
+        </p:txBody>
+      </p:sp>
+      <p:sp>
+        <p:nvSpPr>
+          <p:cNvPr id="3" name="TextBox 2"/>
+          <p:cNvSpPr txBox="1"/>
+          <p:nvPr/>
+        </p:nvSpPr>
+        <p:spPr>
+          <a:xfrm>
+            <a:off x="502920" y="566928"/>
+            <a:ext cx="11155680" cy="804672"/>
+          </a:xfrm>
+          <a:prstGeom prst="rect">
+            <a:avLst/>
+          </a:prstGeom>
+          <a:noFill/>
+        </p:spPr>
+        <p:txBody>
+          <a:bodyPr wrap="square" lIns="0" rIns="0" tIns="0" bIns="0">
+            <a:spAutoFit/>
+          </a:bodyPr>
+          <a:lstStyle/>
+          <a:p>
+            <a:pPr algn="l">
+              <a:spcAft>
+                <a:spcPts val="0"/>
+              </a:spcAft>
+            </a:pPr>
+            <a:r>
+              <a:rPr sz="1800" b="1" i="0">
+                <a:solidFill>
+                  <a:srgbClr val="1B1B26"/>
+                </a:solidFill>
+                <a:latin typeface="Yu Gothic"/>
+                <a:ea typeface="Yu Gothic"/>
+                <a:cs typeface="Yu Gothic"/>
+              </a:rPr>
+              <a:t>アップサイド15億の中身 — 確度別パイプライン</a:t>
+            </a:r>
+          </a:p>
+        </p:txBody>
+      </p:sp>
+      <p:sp>
+        <p:nvSpPr>
+          <p:cNvPr id="4" name="Rectangle 3"/>
+          <p:cNvSpPr/>
+          <p:nvPr/>
+        </p:nvSpPr>
+        <p:spPr>
+          <a:xfrm>
+            <a:off x="502920" y="1335024"/>
+            <a:ext cx="11183112" cy="11430"/>
+          </a:xfrm>
+          <a:prstGeom prst="rect">
+            <a:avLst/>
+          </a:prstGeom>
+          <a:solidFill>
+            <a:srgbClr val="E5E7EB"/>
+          </a:solidFill>
+          <a:ln>
+            <a:noFill/>
+          </a:ln>
+          <a:effectLst/>
+        </p:spPr>
+        <p:style>
+          <a:lnRef idx="1">
+            <a:schemeClr val="accent1"/>
+          </a:lnRef>
+          <a:fillRef idx="3">
+            <a:schemeClr val="accent1"/>
+          </a:fillRef>
+          <a:effectRef idx="2">
+            <a:schemeClr val="accent1"/>
+          </a:effectRef>
+          <a:fontRef idx="minor">
+            <a:schemeClr val="lt1"/>
+          </a:fontRef>
+        </p:style>
+        <p:txBody>
+          <a:bodyPr rtlCol="0" anchor="ctr"/>
+          <a:lstStyle/>
+          <a:p>
+            <a:pPr algn="ctr"/>
+          </a:p>
+        </p:txBody>
+      </p:sp>
+      <p:sp>
+        <p:nvSpPr>
+          <p:cNvPr id="5" name="TextBox 4"/>
+          <p:cNvSpPr txBox="1"/>
+          <p:nvPr/>
+        </p:nvSpPr>
+        <p:spPr>
+          <a:xfrm>
+            <a:off x="502920" y="1481328"/>
+            <a:ext cx="11155680" cy="310896"/>
+          </a:xfrm>
+          <a:prstGeom prst="rect">
+            <a:avLst/>
+          </a:prstGeom>
+          <a:noFill/>
+        </p:spPr>
+        <p:txBody>
+          <a:bodyPr wrap="square" lIns="0" rIns="0" tIns="0" bIns="0">
+            <a:spAutoFit/>
+          </a:bodyPr>
+          <a:lstStyle/>
+          <a:p>
+            <a:pPr algn="l">
+              <a:spcAft>
+                <a:spcPts val="400"/>
+              </a:spcAft>
+            </a:pPr>
+            <a:r>
+              <a:rPr sz="1150" b="1" i="0">
+                <a:solidFill>
+                  <a:srgbClr val="2563EB"/>
+                </a:solidFill>
+                <a:latin typeface="Yu Gothic"/>
+                <a:ea typeface="Yu Gothic"/>
+                <a:cs typeface="Yu Gothic"/>
+              </a:rPr>
+              <a:t>黒（確定）・青（根拠あり）・赤（構想）。毎月「赤が青に、青が黒に変わったか」だけを確認します</a:t>
+            </a:r>
+          </a:p>
+        </p:txBody>
+      </p:sp>
+      <p:sp>
+        <p:nvSpPr>
+          <p:cNvPr id="6" name="Rounded Rectangle 5"/>
+          <p:cNvSpPr/>
+          <p:nvPr/>
+        </p:nvSpPr>
+        <p:spPr>
+          <a:xfrm>
+            <a:off x="502920" y="1920240"/>
+            <a:ext cx="11183112" cy="1371600"/>
+          </a:xfrm>
+          <a:prstGeom prst="roundRect">
+            <a:avLst>
+              <a:gd name="adj" fmla="val 10000"/>
+            </a:avLst>
+          </a:prstGeom>
+          <a:solidFill>
+            <a:srgbClr val="F6F8FB"/>
+          </a:solidFill>
+          <a:ln w="9525">
+            <a:solidFill>
+              <a:srgbClr val="E5E7EB"/>
+            </a:solidFill>
+          </a:ln>
+          <a:effectLst/>
+        </p:spPr>
+        <p:style>
+          <a:lnRef idx="1">
+            <a:schemeClr val="accent1"/>
+          </a:lnRef>
+          <a:fillRef idx="3">
+            <a:schemeClr val="accent1"/>
+          </a:fillRef>
+          <a:effectRef idx="2">
+            <a:schemeClr val="accent1"/>
+          </a:effectRef>
+          <a:fontRef idx="minor">
+            <a:schemeClr val="lt1"/>
+          </a:fontRef>
+        </p:style>
+        <p:txBody>
+          <a:bodyPr rtlCol="0" anchor="ctr"/>
+          <a:lstStyle/>
+          <a:p>
+            <a:pPr algn="ctr"/>
+          </a:p>
+        </p:txBody>
+      </p:sp>
+      <p:sp>
+        <p:nvSpPr>
+          <p:cNvPr id="7" name="TextBox 6"/>
+          <p:cNvSpPr txBox="1"/>
+          <p:nvPr/>
+        </p:nvSpPr>
+        <p:spPr>
+          <a:xfrm>
+            <a:off x="777240" y="2029968"/>
+            <a:ext cx="10515600" cy="292608"/>
+          </a:xfrm>
+          <a:prstGeom prst="rect">
+            <a:avLst/>
+          </a:prstGeom>
+          <a:noFill/>
+        </p:spPr>
+        <p:txBody>
+          <a:bodyPr wrap="square" lIns="0" rIns="0" tIns="0" bIns="0">
+            <a:spAutoFit/>
+          </a:bodyPr>
+          <a:lstStyle/>
+          <a:p>
+            <a:pPr algn="l">
+              <a:spcAft>
+                <a:spcPts val="400"/>
+              </a:spcAft>
+            </a:pPr>
+            <a:r>
+              <a:rPr sz="1300" b="1" i="0">
+                <a:solidFill>
+                  <a:srgbClr val="1B1B26"/>
+                </a:solidFill>
+                <a:latin typeface="Yu Gothic"/>
+                <a:ea typeface="Yu Gothic"/>
+                <a:cs typeface="Yu Gothic"/>
+              </a:rPr>
+              <a:t>ライセンス ＋5億（社内7億）</a:t>
+            </a:r>
+          </a:p>
+        </p:txBody>
+      </p:sp>
+      <p:sp>
+        <p:nvSpPr>
+          <p:cNvPr id="8" name="Rounded Rectangle 7"/>
+          <p:cNvSpPr/>
+          <p:nvPr/>
+        </p:nvSpPr>
+        <p:spPr>
+          <a:xfrm>
+            <a:off x="822960" y="2395728"/>
+            <a:ext cx="310896" cy="219456"/>
+          </a:xfrm>
+          <a:prstGeom prst="roundRect">
+            <a:avLst>
+              <a:gd name="adj" fmla="val 30000"/>
+            </a:avLst>
+          </a:prstGeom>
+          <a:solidFill>
+            <a:srgbClr val="2563EB"/>
+          </a:solidFill>
+          <a:ln>
+            <a:noFill/>
+          </a:ln>
+          <a:effectLst/>
+        </p:spPr>
+        <p:style>
+          <a:lnRef idx="1">
+            <a:schemeClr val="accent1"/>
+          </a:lnRef>
+          <a:fillRef idx="3">
+            <a:schemeClr val="accent1"/>
+          </a:fillRef>
+          <a:effectRef idx="2">
+            <a:schemeClr val="accent1"/>
+          </a:effectRef>
+          <a:fontRef idx="minor">
+            <a:schemeClr val="lt1"/>
+          </a:fontRef>
+        </p:style>
+        <p:txBody>
+          <a:bodyPr rtlCol="0" anchor="ctr"/>
+          <a:lstStyle/>
+          <a:p>
+            <a:pPr algn="ctr"/>
+          </a:p>
+        </p:txBody>
+      </p:sp>
+      <p:sp>
+        <p:nvSpPr>
+          <p:cNvPr id="9" name="TextBox 8"/>
+          <p:cNvSpPr txBox="1"/>
+          <p:nvPr/>
+        </p:nvSpPr>
+        <p:spPr>
+          <a:xfrm>
+            <a:off x="822960" y="2418588"/>
+            <a:ext cx="310896" cy="182880"/>
+          </a:xfrm>
+          <a:prstGeom prst="rect">
+            <a:avLst/>
+          </a:prstGeom>
+          <a:noFill/>
+        </p:spPr>
+        <p:txBody>
+          <a:bodyPr wrap="square" lIns="0" rIns="0" tIns="0" bIns="0">
+            <a:spAutoFit/>
+          </a:bodyPr>
+          <a:lstStyle/>
+          <a:p>
+            <a:pPr algn="ctr">
+              <a:spcAft>
+                <a:spcPts val="400"/>
+              </a:spcAft>
+            </a:pPr>
+            <a:r>
+              <a:rPr sz="850" b="1" i="0">
+                <a:solidFill>
+                  <a:srgbClr val="FFFFFF"/>
+                </a:solidFill>
+                <a:latin typeface="Yu Gothic"/>
+                <a:ea typeface="Yu Gothic"/>
+                <a:cs typeface="Yu Gothic"/>
+              </a:rPr>
+              <a:t>青</a:t>
+            </a:r>
+          </a:p>
+        </p:txBody>
+      </p:sp>
+      <p:sp>
+        <p:nvSpPr>
+          <p:cNvPr id="10" name="TextBox 9"/>
+          <p:cNvSpPr txBox="1"/>
+          <p:nvPr/>
+        </p:nvSpPr>
+        <p:spPr>
+          <a:xfrm>
+            <a:off x="1261872" y="2391156"/>
+            <a:ext cx="10241280" cy="256032"/>
+          </a:xfrm>
+          <a:prstGeom prst="rect">
+            <a:avLst/>
+          </a:prstGeom>
+          <a:noFill/>
+        </p:spPr>
+        <p:txBody>
+          <a:bodyPr wrap="square" lIns="0" rIns="0" tIns="0" bIns="0">
+            <a:spAutoFit/>
+          </a:bodyPr>
+          <a:lstStyle/>
+          <a:p>
+            <a:pPr algn="l">
+              <a:spcAft>
+                <a:spcPts val="400"/>
+              </a:spcAft>
+            </a:pPr>
+            <a:r>
               <a:rPr sz="1000" b="0" i="0">
                 <a:solidFill>
                   <a:srgbClr val="1B1B26"/>
@@ -6008,20 +7996,148 @@
                 <a:ea typeface="Yu Gothic"/>
                 <a:cs typeface="Yu Gothic"/>
               </a:rPr>
-              <a:t>MG改定・Blokees（該当部門より詳述）</a:t>
-            </a:r>
-          </a:p>
-        </p:txBody>
-      </p:sp>
-      <p:sp>
-        <p:nvSpPr>
-          <p:cNvPr id="33" name="Rounded Rectangle 32"/>
+              <a:t>大型広告の新規・継続（4-7月実績で新規4社94百万の実勢）</a:t>
+            </a:r>
+          </a:p>
+        </p:txBody>
+      </p:sp>
+      <p:sp>
+        <p:nvSpPr>
+          <p:cNvPr id="11" name="Rounded Rectangle 10"/>
           <p:cNvSpPr/>
           <p:nvPr/>
         </p:nvSpPr>
         <p:spPr>
           <a:xfrm>
-            <a:off x="822960" y="5678423"/>
+            <a:off x="822960" y="2679192"/>
+            <a:ext cx="310896" cy="219456"/>
+          </a:xfrm>
+          <a:prstGeom prst="roundRect">
+            <a:avLst>
+              <a:gd name="adj" fmla="val 30000"/>
+            </a:avLst>
+          </a:prstGeom>
+          <a:solidFill>
+            <a:srgbClr val="2563EB"/>
+          </a:solidFill>
+          <a:ln>
+            <a:noFill/>
+          </a:ln>
+          <a:effectLst/>
+        </p:spPr>
+        <p:style>
+          <a:lnRef idx="1">
+            <a:schemeClr val="accent1"/>
+          </a:lnRef>
+          <a:fillRef idx="3">
+            <a:schemeClr val="accent1"/>
+          </a:fillRef>
+          <a:effectRef idx="2">
+            <a:schemeClr val="accent1"/>
+          </a:effectRef>
+          <a:fontRef idx="minor">
+            <a:schemeClr val="lt1"/>
+          </a:fontRef>
+        </p:style>
+        <p:txBody>
+          <a:bodyPr rtlCol="0" anchor="ctr"/>
+          <a:lstStyle/>
+          <a:p>
+            <a:pPr algn="ctr"/>
+          </a:p>
+        </p:txBody>
+      </p:sp>
+      <p:sp>
+        <p:nvSpPr>
+          <p:cNvPr id="12" name="TextBox 11"/>
+          <p:cNvSpPr txBox="1"/>
+          <p:nvPr/>
+        </p:nvSpPr>
+        <p:spPr>
+          <a:xfrm>
+            <a:off x="822960" y="2702052"/>
+            <a:ext cx="310896" cy="182880"/>
+          </a:xfrm>
+          <a:prstGeom prst="rect">
+            <a:avLst/>
+          </a:prstGeom>
+          <a:noFill/>
+        </p:spPr>
+        <p:txBody>
+          <a:bodyPr wrap="square" lIns="0" rIns="0" tIns="0" bIns="0">
+            <a:spAutoFit/>
+          </a:bodyPr>
+          <a:lstStyle/>
+          <a:p>
+            <a:pPr algn="ctr">
+              <a:spcAft>
+                <a:spcPts val="400"/>
+              </a:spcAft>
+            </a:pPr>
+            <a:r>
+              <a:rPr sz="850" b="1" i="0">
+                <a:solidFill>
+                  <a:srgbClr val="FFFFFF"/>
+                </a:solidFill>
+                <a:latin typeface="Yu Gothic"/>
+                <a:ea typeface="Yu Gothic"/>
+                <a:cs typeface="Yu Gothic"/>
+              </a:rPr>
+              <a:t>青</a:t>
+            </a:r>
+          </a:p>
+        </p:txBody>
+      </p:sp>
+      <p:sp>
+        <p:nvSpPr>
+          <p:cNvPr id="13" name="TextBox 12"/>
+          <p:cNvSpPr txBox="1"/>
+          <p:nvPr/>
+        </p:nvSpPr>
+        <p:spPr>
+          <a:xfrm>
+            <a:off x="1261872" y="2674620"/>
+            <a:ext cx="10241280" cy="256032"/>
+          </a:xfrm>
+          <a:prstGeom prst="rect">
+            <a:avLst/>
+          </a:prstGeom>
+          <a:noFill/>
+        </p:spPr>
+        <p:txBody>
+          <a:bodyPr wrap="square" lIns="0" rIns="0" tIns="0" bIns="0">
+            <a:spAutoFit/>
+          </a:bodyPr>
+          <a:lstStyle/>
+          <a:p>
+            <a:pPr algn="l">
+              <a:spcAft>
+                <a:spcPts val="400"/>
+              </a:spcAft>
+            </a:pPr>
+            <a:r>
+              <a:rPr sz="1000" b="0" i="0">
+                <a:solidFill>
+                  <a:srgbClr val="1B1B26"/>
+                </a:solidFill>
+                <a:latin typeface="Yu Gothic"/>
+                <a:ea typeface="Yu Gothic"/>
+                <a:cs typeface="Yu Gothic"/>
+              </a:rPr>
+              <a:t>上位22社（売上の3分の2）のアップセル・四半期戦略MTG</a:t>
+            </a:r>
+          </a:p>
+        </p:txBody>
+      </p:sp>
+      <p:sp>
+        <p:nvSpPr>
+          <p:cNvPr id="14" name="Rounded Rectangle 13"/>
+          <p:cNvSpPr/>
+          <p:nvPr/>
+        </p:nvSpPr>
+        <p:spPr>
+          <a:xfrm>
+            <a:off x="822960" y="2962656"/>
             <a:ext cx="310896" cy="219456"/>
           </a:xfrm>
           <a:prstGeom prst="roundRect">
@@ -6061,13 +8177,13 @@
       </p:sp>
       <p:sp>
         <p:nvSpPr>
-          <p:cNvPr id="34" name="TextBox 33"/>
+          <p:cNvPr id="15" name="TextBox 14"/>
           <p:cNvSpPr txBox="1"/>
           <p:nvPr/>
         </p:nvSpPr>
         <p:spPr>
           <a:xfrm>
-            <a:off x="822960" y="5701283"/>
+            <a:off x="822960" y="2985516"/>
             <a:ext cx="310896" cy="182880"/>
           </a:xfrm>
           <a:prstGeom prst="rect">
@@ -6102,13 +8218,13 @@
       </p:sp>
       <p:sp>
         <p:nvSpPr>
-          <p:cNvPr id="35" name="TextBox 34"/>
+          <p:cNvPr id="16" name="TextBox 15"/>
           <p:cNvSpPr txBox="1"/>
           <p:nvPr/>
         </p:nvSpPr>
         <p:spPr>
           <a:xfrm>
-            <a:off x="1261872" y="5673851"/>
+            <a:off x="1261872" y="2958084"/>
             <a:ext cx="10241280" cy="256032"/>
           </a:xfrm>
           <a:prstGeom prst="rect">
@@ -6136,20 +8252,365 @@
                 <a:ea typeface="Yu Gothic"/>
                 <a:cs typeface="Yu Gothic"/>
               </a:rPr>
-              <a:t>越境EC拡大（月商1,000万→3,000万の段階）・新規座組</a:t>
-            </a:r>
-          </a:p>
-        </p:txBody>
-      </p:sp>
-      <p:sp>
-        <p:nvSpPr>
-          <p:cNvPr id="36" name="Rounded Rectangle 35"/>
+              <a:t>トップ外交による大型案件（本日ターゲットをご相談）</a:t>
+            </a:r>
+          </a:p>
+        </p:txBody>
+      </p:sp>
+      <p:sp>
+        <p:nvSpPr>
+          <p:cNvPr id="17" name="Rounded Rectangle 16"/>
           <p:cNvSpPr/>
           <p:nvPr/>
         </p:nvSpPr>
         <p:spPr>
           <a:xfrm>
-            <a:off x="822960" y="5961887"/>
+            <a:off x="502920" y="3419856"/>
+            <a:ext cx="11183112" cy="1371600"/>
+          </a:xfrm>
+          <a:prstGeom prst="roundRect">
+            <a:avLst>
+              <a:gd name="adj" fmla="val 10000"/>
+            </a:avLst>
+          </a:prstGeom>
+          <a:solidFill>
+            <a:srgbClr val="F6F8FB"/>
+          </a:solidFill>
+          <a:ln w="9525">
+            <a:solidFill>
+              <a:srgbClr val="E5E7EB"/>
+            </a:solidFill>
+          </a:ln>
+          <a:effectLst/>
+        </p:spPr>
+        <p:style>
+          <a:lnRef idx="1">
+            <a:schemeClr val="accent1"/>
+          </a:lnRef>
+          <a:fillRef idx="3">
+            <a:schemeClr val="accent1"/>
+          </a:fillRef>
+          <a:effectRef idx="2">
+            <a:schemeClr val="accent1"/>
+          </a:effectRef>
+          <a:fontRef idx="minor">
+            <a:schemeClr val="lt1"/>
+          </a:fontRef>
+        </p:style>
+        <p:txBody>
+          <a:bodyPr rtlCol="0" anchor="ctr"/>
+          <a:lstStyle/>
+          <a:p>
+            <a:pPr algn="ctr"/>
+          </a:p>
+        </p:txBody>
+      </p:sp>
+      <p:sp>
+        <p:nvSpPr>
+          <p:cNvPr id="18" name="TextBox 17"/>
+          <p:cNvSpPr txBox="1"/>
+          <p:nvPr/>
+        </p:nvSpPr>
+        <p:spPr>
+          <a:xfrm>
+            <a:off x="777240" y="3529584"/>
+            <a:ext cx="10515600" cy="292608"/>
+          </a:xfrm>
+          <a:prstGeom prst="rect">
+            <a:avLst/>
+          </a:prstGeom>
+          <a:noFill/>
+        </p:spPr>
+        <p:txBody>
+          <a:bodyPr wrap="square" lIns="0" rIns="0" tIns="0" bIns="0">
+            <a:spAutoFit/>
+          </a:bodyPr>
+          <a:lstStyle/>
+          <a:p>
+            <a:pPr algn="l">
+              <a:spcAft>
+                <a:spcPts val="400"/>
+              </a:spcAft>
+            </a:pPr>
+            <a:r>
+              <a:rPr sz="1300" b="1" i="0">
+                <a:solidFill>
+                  <a:srgbClr val="1B1B26"/>
+                </a:solidFill>
+                <a:latin typeface="Yu Gothic"/>
+                <a:ea typeface="Yu Gothic"/>
+                <a:cs typeface="Yu Gothic"/>
+              </a:rPr>
+              <a:t>商品 ＋5億（社内6億）</a:t>
+            </a:r>
+          </a:p>
+        </p:txBody>
+      </p:sp>
+      <p:sp>
+        <p:nvSpPr>
+          <p:cNvPr id="19" name="Rounded Rectangle 18"/>
+          <p:cNvSpPr/>
+          <p:nvPr/>
+        </p:nvSpPr>
+        <p:spPr>
+          <a:xfrm>
+            <a:off x="822960" y="3895344"/>
+            <a:ext cx="310896" cy="219456"/>
+          </a:xfrm>
+          <a:prstGeom prst="roundRect">
+            <a:avLst>
+              <a:gd name="adj" fmla="val 30000"/>
+            </a:avLst>
+          </a:prstGeom>
+          <a:solidFill>
+            <a:srgbClr val="1B1B26"/>
+          </a:solidFill>
+          <a:ln>
+            <a:noFill/>
+          </a:ln>
+          <a:effectLst/>
+        </p:spPr>
+        <p:style>
+          <a:lnRef idx="1">
+            <a:schemeClr val="accent1"/>
+          </a:lnRef>
+          <a:fillRef idx="3">
+            <a:schemeClr val="accent1"/>
+          </a:fillRef>
+          <a:effectRef idx="2">
+            <a:schemeClr val="accent1"/>
+          </a:effectRef>
+          <a:fontRef idx="minor">
+            <a:schemeClr val="lt1"/>
+          </a:fontRef>
+        </p:style>
+        <p:txBody>
+          <a:bodyPr rtlCol="0" anchor="ctr"/>
+          <a:lstStyle/>
+          <a:p>
+            <a:pPr algn="ctr"/>
+          </a:p>
+        </p:txBody>
+      </p:sp>
+      <p:sp>
+        <p:nvSpPr>
+          <p:cNvPr id="20" name="TextBox 19"/>
+          <p:cNvSpPr txBox="1"/>
+          <p:nvPr/>
+        </p:nvSpPr>
+        <p:spPr>
+          <a:xfrm>
+            <a:off x="822960" y="3918204"/>
+            <a:ext cx="310896" cy="182880"/>
+          </a:xfrm>
+          <a:prstGeom prst="rect">
+            <a:avLst/>
+          </a:prstGeom>
+          <a:noFill/>
+        </p:spPr>
+        <p:txBody>
+          <a:bodyPr wrap="square" lIns="0" rIns="0" tIns="0" bIns="0">
+            <a:spAutoFit/>
+          </a:bodyPr>
+          <a:lstStyle/>
+          <a:p>
+            <a:pPr algn="ctr">
+              <a:spcAft>
+                <a:spcPts val="400"/>
+              </a:spcAft>
+            </a:pPr>
+            <a:r>
+              <a:rPr sz="850" b="1" i="0">
+                <a:solidFill>
+                  <a:srgbClr val="FFFFFF"/>
+                </a:solidFill>
+                <a:latin typeface="Yu Gothic"/>
+                <a:ea typeface="Yu Gothic"/>
+                <a:cs typeface="Yu Gothic"/>
+              </a:rPr>
+              <a:t>黒</a:t>
+            </a:r>
+          </a:p>
+        </p:txBody>
+      </p:sp>
+      <p:sp>
+        <p:nvSpPr>
+          <p:cNvPr id="21" name="TextBox 20"/>
+          <p:cNvSpPr txBox="1"/>
+          <p:nvPr/>
+        </p:nvSpPr>
+        <p:spPr>
+          <a:xfrm>
+            <a:off x="1261872" y="3890772"/>
+            <a:ext cx="10241280" cy="256032"/>
+          </a:xfrm>
+          <a:prstGeom prst="rect">
+            <a:avLst/>
+          </a:prstGeom>
+          <a:noFill/>
+        </p:spPr>
+        <p:txBody>
+          <a:bodyPr wrap="square" lIns="0" rIns="0" tIns="0" bIns="0">
+            <a:spAutoFit/>
+          </a:bodyPr>
+          <a:lstStyle/>
+          <a:p>
+            <a:pPr algn="l">
+              <a:spcAft>
+                <a:spcPts val="400"/>
+              </a:spcAft>
+            </a:pPr>
+            <a:r>
+              <a:rPr sz="1000" b="0" i="0">
+                <a:solidFill>
+                  <a:srgbClr val="1B1B26"/>
+                </a:solidFill>
+                <a:latin typeface="Yu Gothic"/>
+                <a:ea typeface="Yu Gothic"/>
+                <a:cs typeface="Yu Gothic"/>
+              </a:rPr>
+              <a:t>カード9弾受注確定分（8/17確定・単弾で営業利益＋0.3億水準）</a:t>
+            </a:r>
+          </a:p>
+        </p:txBody>
+      </p:sp>
+      <p:sp>
+        <p:nvSpPr>
+          <p:cNvPr id="22" name="Rounded Rectangle 21"/>
+          <p:cNvSpPr/>
+          <p:nvPr/>
+        </p:nvSpPr>
+        <p:spPr>
+          <a:xfrm>
+            <a:off x="822960" y="4178807"/>
+            <a:ext cx="310896" cy="219456"/>
+          </a:xfrm>
+          <a:prstGeom prst="roundRect">
+            <a:avLst>
+              <a:gd name="adj" fmla="val 30000"/>
+            </a:avLst>
+          </a:prstGeom>
+          <a:solidFill>
+            <a:srgbClr val="2563EB"/>
+          </a:solidFill>
+          <a:ln>
+            <a:noFill/>
+          </a:ln>
+          <a:effectLst/>
+        </p:spPr>
+        <p:style>
+          <a:lnRef idx="1">
+            <a:schemeClr val="accent1"/>
+          </a:lnRef>
+          <a:fillRef idx="3">
+            <a:schemeClr val="accent1"/>
+          </a:fillRef>
+          <a:effectRef idx="2">
+            <a:schemeClr val="accent1"/>
+          </a:effectRef>
+          <a:fontRef idx="minor">
+            <a:schemeClr val="lt1"/>
+          </a:fontRef>
+        </p:style>
+        <p:txBody>
+          <a:bodyPr rtlCol="0" anchor="ctr"/>
+          <a:lstStyle/>
+          <a:p>
+            <a:pPr algn="ctr"/>
+          </a:p>
+        </p:txBody>
+      </p:sp>
+      <p:sp>
+        <p:nvSpPr>
+          <p:cNvPr id="23" name="TextBox 22"/>
+          <p:cNvSpPr txBox="1"/>
+          <p:nvPr/>
+        </p:nvSpPr>
+        <p:spPr>
+          <a:xfrm>
+            <a:off x="822960" y="4201668"/>
+            <a:ext cx="310896" cy="182880"/>
+          </a:xfrm>
+          <a:prstGeom prst="rect">
+            <a:avLst/>
+          </a:prstGeom>
+          <a:noFill/>
+        </p:spPr>
+        <p:txBody>
+          <a:bodyPr wrap="square" lIns="0" rIns="0" tIns="0" bIns="0">
+            <a:spAutoFit/>
+          </a:bodyPr>
+          <a:lstStyle/>
+          <a:p>
+            <a:pPr algn="ctr">
+              <a:spcAft>
+                <a:spcPts val="400"/>
+              </a:spcAft>
+            </a:pPr>
+            <a:r>
+              <a:rPr sz="850" b="1" i="0">
+                <a:solidFill>
+                  <a:srgbClr val="FFFFFF"/>
+                </a:solidFill>
+                <a:latin typeface="Yu Gothic"/>
+                <a:ea typeface="Yu Gothic"/>
+                <a:cs typeface="Yu Gothic"/>
+              </a:rPr>
+              <a:t>青</a:t>
+            </a:r>
+          </a:p>
+        </p:txBody>
+      </p:sp>
+      <p:sp>
+        <p:nvSpPr>
+          <p:cNvPr id="24" name="TextBox 23"/>
+          <p:cNvSpPr txBox="1"/>
+          <p:nvPr/>
+        </p:nvSpPr>
+        <p:spPr>
+          <a:xfrm>
+            <a:off x="1261872" y="4174235"/>
+            <a:ext cx="10241280" cy="256032"/>
+          </a:xfrm>
+          <a:prstGeom prst="rect">
+            <a:avLst/>
+          </a:prstGeom>
+          <a:noFill/>
+        </p:spPr>
+        <p:txBody>
+          <a:bodyPr wrap="square" lIns="0" rIns="0" tIns="0" bIns="0">
+            <a:spAutoFit/>
+          </a:bodyPr>
+          <a:lstStyle/>
+          <a:p>
+            <a:pPr algn="l">
+              <a:spcAft>
+                <a:spcPts val="400"/>
+              </a:spcAft>
+            </a:pPr>
+            <a:r>
+              <a:rPr sz="1000" b="0" i="0">
+                <a:solidFill>
+                  <a:srgbClr val="1B1B26"/>
+                </a:solidFill>
+                <a:latin typeface="Yu Gothic"/>
+                <a:ea typeface="Yu Gothic"/>
+                <a:cs typeface="Yu Gothic"/>
+              </a:rPr>
+              <a:t>ウルトラマート（日販100万円ライン）・EC受注前年比2倍</a:t>
+            </a:r>
+          </a:p>
+        </p:txBody>
+      </p:sp>
+      <p:sp>
+        <p:nvSpPr>
+          <p:cNvPr id="25" name="Rounded Rectangle 24"/>
+          <p:cNvSpPr/>
+          <p:nvPr/>
+        </p:nvSpPr>
+        <p:spPr>
+          <a:xfrm>
+            <a:off x="822960" y="4462271"/>
             <a:ext cx="310896" cy="219456"/>
           </a:xfrm>
           <a:prstGeom prst="roundRect">
@@ -6189,6 +8650,479 @@
       </p:sp>
       <p:sp>
         <p:nvSpPr>
+          <p:cNvPr id="26" name="TextBox 25"/>
+          <p:cNvSpPr txBox="1"/>
+          <p:nvPr/>
+        </p:nvSpPr>
+        <p:spPr>
+          <a:xfrm>
+            <a:off x="822960" y="4485131"/>
+            <a:ext cx="310896" cy="182880"/>
+          </a:xfrm>
+          <a:prstGeom prst="rect">
+            <a:avLst/>
+          </a:prstGeom>
+          <a:noFill/>
+        </p:spPr>
+        <p:txBody>
+          <a:bodyPr wrap="square" lIns="0" rIns="0" tIns="0" bIns="0">
+            <a:spAutoFit/>
+          </a:bodyPr>
+          <a:lstStyle/>
+          <a:p>
+            <a:pPr algn="ctr">
+              <a:spcAft>
+                <a:spcPts val="400"/>
+              </a:spcAft>
+            </a:pPr>
+            <a:r>
+              <a:rPr sz="850" b="1" i="0">
+                <a:solidFill>
+                  <a:srgbClr val="FFFFFF"/>
+                </a:solidFill>
+                <a:latin typeface="Yu Gothic"/>
+                <a:ea typeface="Yu Gothic"/>
+                <a:cs typeface="Yu Gothic"/>
+              </a:rPr>
+              <a:t>赤</a:t>
+            </a:r>
+          </a:p>
+        </p:txBody>
+      </p:sp>
+      <p:sp>
+        <p:nvSpPr>
+          <p:cNvPr id="27" name="TextBox 26"/>
+          <p:cNvSpPr txBox="1"/>
+          <p:nvPr/>
+        </p:nvSpPr>
+        <p:spPr>
+          <a:xfrm>
+            <a:off x="1261872" y="4457699"/>
+            <a:ext cx="10241280" cy="256032"/>
+          </a:xfrm>
+          <a:prstGeom prst="rect">
+            <a:avLst/>
+          </a:prstGeom>
+          <a:noFill/>
+        </p:spPr>
+        <p:txBody>
+          <a:bodyPr wrap="square" lIns="0" rIns="0" tIns="0" bIns="0">
+            <a:spAutoFit/>
+          </a:bodyPr>
+          <a:lstStyle/>
+          <a:p>
+            <a:pPr algn="l">
+              <a:spcAft>
+                <a:spcPts val="400"/>
+              </a:spcAft>
+            </a:pPr>
+            <a:r>
+              <a:rPr sz="1000" b="0" i="0">
+                <a:solidFill>
+                  <a:srgbClr val="1B1B26"/>
+                </a:solidFill>
+                <a:latin typeface="Yu Gothic"/>
+                <a:ea typeface="Yu Gothic"/>
+                <a:cs typeface="Yu Gothic"/>
+              </a:rPr>
+              <a:t>mofusand型の60周年横展開・フワヌイ追加発注</a:t>
+            </a:r>
+          </a:p>
+        </p:txBody>
+      </p:sp>
+      <p:sp>
+        <p:nvSpPr>
+          <p:cNvPr id="28" name="Rounded Rectangle 27"/>
+          <p:cNvSpPr/>
+          <p:nvPr/>
+        </p:nvSpPr>
+        <p:spPr>
+          <a:xfrm>
+            <a:off x="502920" y="4919472"/>
+            <a:ext cx="11183112" cy="1371600"/>
+          </a:xfrm>
+          <a:prstGeom prst="roundRect">
+            <a:avLst>
+              <a:gd name="adj" fmla="val 10000"/>
+            </a:avLst>
+          </a:prstGeom>
+          <a:solidFill>
+            <a:srgbClr val="F6F8FB"/>
+          </a:solidFill>
+          <a:ln w="9525">
+            <a:solidFill>
+              <a:srgbClr val="E5E7EB"/>
+            </a:solidFill>
+          </a:ln>
+          <a:effectLst/>
+        </p:spPr>
+        <p:style>
+          <a:lnRef idx="1">
+            <a:schemeClr val="accent1"/>
+          </a:lnRef>
+          <a:fillRef idx="3">
+            <a:schemeClr val="accent1"/>
+          </a:fillRef>
+          <a:effectRef idx="2">
+            <a:schemeClr val="accent1"/>
+          </a:effectRef>
+          <a:fontRef idx="minor">
+            <a:schemeClr val="lt1"/>
+          </a:fontRef>
+        </p:style>
+        <p:txBody>
+          <a:bodyPr rtlCol="0" anchor="ctr"/>
+          <a:lstStyle/>
+          <a:p>
+            <a:pPr algn="ctr"/>
+          </a:p>
+        </p:txBody>
+      </p:sp>
+      <p:sp>
+        <p:nvSpPr>
+          <p:cNvPr id="29" name="TextBox 28"/>
+          <p:cNvSpPr txBox="1"/>
+          <p:nvPr/>
+        </p:nvSpPr>
+        <p:spPr>
+          <a:xfrm>
+            <a:off x="777240" y="5029200"/>
+            <a:ext cx="10515600" cy="292608"/>
+          </a:xfrm>
+          <a:prstGeom prst="rect">
+            <a:avLst/>
+          </a:prstGeom>
+          <a:noFill/>
+        </p:spPr>
+        <p:txBody>
+          <a:bodyPr wrap="square" lIns="0" rIns="0" tIns="0" bIns="0">
+            <a:spAutoFit/>
+          </a:bodyPr>
+          <a:lstStyle/>
+          <a:p>
+            <a:pPr algn="l">
+              <a:spcAft>
+                <a:spcPts val="400"/>
+              </a:spcAft>
+            </a:pPr>
+            <a:r>
+              <a:rPr sz="1300" b="1" i="0">
+                <a:solidFill>
+                  <a:srgbClr val="1B1B26"/>
+                </a:solidFill>
+                <a:latin typeface="Yu Gothic"/>
+                <a:ea typeface="Yu Gothic"/>
+                <a:cs typeface="Yu Gothic"/>
+              </a:rPr>
+              <a:t>中国 ＋5億（社内7億）</a:t>
+            </a:r>
+          </a:p>
+        </p:txBody>
+      </p:sp>
+      <p:sp>
+        <p:nvSpPr>
+          <p:cNvPr id="30" name="Rounded Rectangle 29"/>
+          <p:cNvSpPr/>
+          <p:nvPr/>
+        </p:nvSpPr>
+        <p:spPr>
+          <a:xfrm>
+            <a:off x="822960" y="5394959"/>
+            <a:ext cx="310896" cy="219456"/>
+          </a:xfrm>
+          <a:prstGeom prst="roundRect">
+            <a:avLst>
+              <a:gd name="adj" fmla="val 30000"/>
+            </a:avLst>
+          </a:prstGeom>
+          <a:solidFill>
+            <a:srgbClr val="2563EB"/>
+          </a:solidFill>
+          <a:ln>
+            <a:noFill/>
+          </a:ln>
+          <a:effectLst/>
+        </p:spPr>
+        <p:style>
+          <a:lnRef idx="1">
+            <a:schemeClr val="accent1"/>
+          </a:lnRef>
+          <a:fillRef idx="3">
+            <a:schemeClr val="accent1"/>
+          </a:fillRef>
+          <a:effectRef idx="2">
+            <a:schemeClr val="accent1"/>
+          </a:effectRef>
+          <a:fontRef idx="minor">
+            <a:schemeClr val="lt1"/>
+          </a:fontRef>
+        </p:style>
+        <p:txBody>
+          <a:bodyPr rtlCol="0" anchor="ctr"/>
+          <a:lstStyle/>
+          <a:p>
+            <a:pPr algn="ctr"/>
+          </a:p>
+        </p:txBody>
+      </p:sp>
+      <p:sp>
+        <p:nvSpPr>
+          <p:cNvPr id="31" name="TextBox 30"/>
+          <p:cNvSpPr txBox="1"/>
+          <p:nvPr/>
+        </p:nvSpPr>
+        <p:spPr>
+          <a:xfrm>
+            <a:off x="822960" y="5417820"/>
+            <a:ext cx="310896" cy="182880"/>
+          </a:xfrm>
+          <a:prstGeom prst="rect">
+            <a:avLst/>
+          </a:prstGeom>
+          <a:noFill/>
+        </p:spPr>
+        <p:txBody>
+          <a:bodyPr wrap="square" lIns="0" rIns="0" tIns="0" bIns="0">
+            <a:spAutoFit/>
+          </a:bodyPr>
+          <a:lstStyle/>
+          <a:p>
+            <a:pPr algn="ctr">
+              <a:spcAft>
+                <a:spcPts val="400"/>
+              </a:spcAft>
+            </a:pPr>
+            <a:r>
+              <a:rPr sz="850" b="1" i="0">
+                <a:solidFill>
+                  <a:srgbClr val="FFFFFF"/>
+                </a:solidFill>
+                <a:latin typeface="Yu Gothic"/>
+                <a:ea typeface="Yu Gothic"/>
+                <a:cs typeface="Yu Gothic"/>
+              </a:rPr>
+              <a:t>青</a:t>
+            </a:r>
+          </a:p>
+        </p:txBody>
+      </p:sp>
+      <p:sp>
+        <p:nvSpPr>
+          <p:cNvPr id="32" name="TextBox 31"/>
+          <p:cNvSpPr txBox="1"/>
+          <p:nvPr/>
+        </p:nvSpPr>
+        <p:spPr>
+          <a:xfrm>
+            <a:off x="1261872" y="5390388"/>
+            <a:ext cx="10241280" cy="256032"/>
+          </a:xfrm>
+          <a:prstGeom prst="rect">
+            <a:avLst/>
+          </a:prstGeom>
+          <a:noFill/>
+        </p:spPr>
+        <p:txBody>
+          <a:bodyPr wrap="square" lIns="0" rIns="0" tIns="0" bIns="0">
+            <a:spAutoFit/>
+          </a:bodyPr>
+          <a:lstStyle/>
+          <a:p>
+            <a:pPr algn="l">
+              <a:spcAft>
+                <a:spcPts val="400"/>
+              </a:spcAft>
+            </a:pPr>
+            <a:r>
+              <a:rPr sz="1000" b="0" i="0">
+                <a:solidFill>
+                  <a:srgbClr val="1B1B26"/>
+                </a:solidFill>
+                <a:latin typeface="Yu Gothic"/>
+                <a:ea typeface="Yu Gothic"/>
+                <a:cs typeface="Yu Gothic"/>
+              </a:rPr>
+              <a:t>MG改定・Blokees（該当部門より詳述）</a:t>
+            </a:r>
+          </a:p>
+        </p:txBody>
+      </p:sp>
+      <p:sp>
+        <p:nvSpPr>
+          <p:cNvPr id="33" name="Rounded Rectangle 32"/>
+          <p:cNvSpPr/>
+          <p:nvPr/>
+        </p:nvSpPr>
+        <p:spPr>
+          <a:xfrm>
+            <a:off x="822960" y="5678423"/>
+            <a:ext cx="310896" cy="219456"/>
+          </a:xfrm>
+          <a:prstGeom prst="roundRect">
+            <a:avLst>
+              <a:gd name="adj" fmla="val 30000"/>
+            </a:avLst>
+          </a:prstGeom>
+          <a:solidFill>
+            <a:srgbClr val="B43C2E"/>
+          </a:solidFill>
+          <a:ln>
+            <a:noFill/>
+          </a:ln>
+          <a:effectLst/>
+        </p:spPr>
+        <p:style>
+          <a:lnRef idx="1">
+            <a:schemeClr val="accent1"/>
+          </a:lnRef>
+          <a:fillRef idx="3">
+            <a:schemeClr val="accent1"/>
+          </a:fillRef>
+          <a:effectRef idx="2">
+            <a:schemeClr val="accent1"/>
+          </a:effectRef>
+          <a:fontRef idx="minor">
+            <a:schemeClr val="lt1"/>
+          </a:fontRef>
+        </p:style>
+        <p:txBody>
+          <a:bodyPr rtlCol="0" anchor="ctr"/>
+          <a:lstStyle/>
+          <a:p>
+            <a:pPr algn="ctr"/>
+          </a:p>
+        </p:txBody>
+      </p:sp>
+      <p:sp>
+        <p:nvSpPr>
+          <p:cNvPr id="34" name="TextBox 33"/>
+          <p:cNvSpPr txBox="1"/>
+          <p:nvPr/>
+        </p:nvSpPr>
+        <p:spPr>
+          <a:xfrm>
+            <a:off x="822960" y="5701283"/>
+            <a:ext cx="310896" cy="182880"/>
+          </a:xfrm>
+          <a:prstGeom prst="rect">
+            <a:avLst/>
+          </a:prstGeom>
+          <a:noFill/>
+        </p:spPr>
+        <p:txBody>
+          <a:bodyPr wrap="square" lIns="0" rIns="0" tIns="0" bIns="0">
+            <a:spAutoFit/>
+          </a:bodyPr>
+          <a:lstStyle/>
+          <a:p>
+            <a:pPr algn="ctr">
+              <a:spcAft>
+                <a:spcPts val="400"/>
+              </a:spcAft>
+            </a:pPr>
+            <a:r>
+              <a:rPr sz="850" b="1" i="0">
+                <a:solidFill>
+                  <a:srgbClr val="FFFFFF"/>
+                </a:solidFill>
+                <a:latin typeface="Yu Gothic"/>
+                <a:ea typeface="Yu Gothic"/>
+                <a:cs typeface="Yu Gothic"/>
+              </a:rPr>
+              <a:t>赤</a:t>
+            </a:r>
+          </a:p>
+        </p:txBody>
+      </p:sp>
+      <p:sp>
+        <p:nvSpPr>
+          <p:cNvPr id="35" name="TextBox 34"/>
+          <p:cNvSpPr txBox="1"/>
+          <p:nvPr/>
+        </p:nvSpPr>
+        <p:spPr>
+          <a:xfrm>
+            <a:off x="1261872" y="5673851"/>
+            <a:ext cx="10241280" cy="256032"/>
+          </a:xfrm>
+          <a:prstGeom prst="rect">
+            <a:avLst/>
+          </a:prstGeom>
+          <a:noFill/>
+        </p:spPr>
+        <p:txBody>
+          <a:bodyPr wrap="square" lIns="0" rIns="0" tIns="0" bIns="0">
+            <a:spAutoFit/>
+          </a:bodyPr>
+          <a:lstStyle/>
+          <a:p>
+            <a:pPr algn="l">
+              <a:spcAft>
+                <a:spcPts val="400"/>
+              </a:spcAft>
+            </a:pPr>
+            <a:r>
+              <a:rPr sz="1000" b="0" i="0">
+                <a:solidFill>
+                  <a:srgbClr val="1B1B26"/>
+                </a:solidFill>
+                <a:latin typeface="Yu Gothic"/>
+                <a:ea typeface="Yu Gothic"/>
+                <a:cs typeface="Yu Gothic"/>
+              </a:rPr>
+              <a:t>越境EC拡大（月商1,000万→3,000万の段階）・新規座組</a:t>
+            </a:r>
+          </a:p>
+        </p:txBody>
+      </p:sp>
+      <p:sp>
+        <p:nvSpPr>
+          <p:cNvPr id="36" name="Rounded Rectangle 35"/>
+          <p:cNvSpPr/>
+          <p:nvPr/>
+        </p:nvSpPr>
+        <p:spPr>
+          <a:xfrm>
+            <a:off x="822960" y="5961887"/>
+            <a:ext cx="310896" cy="219456"/>
+          </a:xfrm>
+          <a:prstGeom prst="roundRect">
+            <a:avLst>
+              <a:gd name="adj" fmla="val 30000"/>
+            </a:avLst>
+          </a:prstGeom>
+          <a:solidFill>
+            <a:srgbClr val="B43C2E"/>
+          </a:solidFill>
+          <a:ln>
+            <a:noFill/>
+          </a:ln>
+          <a:effectLst/>
+        </p:spPr>
+        <p:style>
+          <a:lnRef idx="1">
+            <a:schemeClr val="accent1"/>
+          </a:lnRef>
+          <a:fillRef idx="3">
+            <a:schemeClr val="accent1"/>
+          </a:fillRef>
+          <a:effectRef idx="2">
+            <a:schemeClr val="accent1"/>
+          </a:effectRef>
+          <a:fontRef idx="minor">
+            <a:schemeClr val="lt1"/>
+          </a:fontRef>
+        </p:style>
+        <p:txBody>
+          <a:bodyPr rtlCol="0" anchor="ctr"/>
+          <a:lstStyle/>
+          <a:p>
+            <a:pPr algn="ctr"/>
+          </a:p>
+        </p:txBody>
+      </p:sp>
+      <p:sp>
+        <p:nvSpPr>
           <p:cNvPr id="37" name="TextBox 36"/>
           <p:cNvSpPr txBox="1"/>
           <p:nvPr/>
@@ -6305,7 +9239,7 @@
                 <a:ea typeface="Yu Gothic"/>
                 <a:cs typeface="Yu Gothic"/>
               </a:rPr>
-              <a:t>※ 販管費25億の内訳・削減シミュレーションは次頁（コスト削減チーム報告）</a:t>
+              <a:t>※ 見込に未反映の要素：カード9弾／家賃▲26.4・退職▲18.4／出向＋40／海外ディス▲58（要確認）。毎月消し込みます</a:t>
             </a:r>
           </a:p>
         </p:txBody>
@@ -6387,7 +9321,7 @@
                 <a:ea typeface="Yu Gothic"/>
                 <a:cs typeface="Yu Gothic"/>
               </a:rPr>
-              <a:t>2</a:t>
+              <a:t>4</a:t>
             </a:r>
           </a:p>
         </p:txBody>
